--- a/docs/presentation.pptx
+++ b/docs/presentation.pptx
@@ -29,9 +29,10 @@
     <p:sldId id="277" r:id="rId23"/>
     <p:sldId id="278" r:id="rId24"/>
     <p:sldId id="279" r:id="rId25"/>
+    <p:sldId id="280" r:id="rId26"/>
   </p:sldIdLst>
   <p:notesMasterIdLst>
-    <p:notesMasterId r:id="rId26"/>
+    <p:notesMasterId r:id="rId27"/>
   </p:notesMasterIdLst>
   <p:sldSz cx="12192000" cy="6858000"/>
   <p:notesSz cx="6858000" cy="12192000"/>
@@ -527,7 +528,7 @@
               <a:rPr lang="en-US" dirty="0"/>
               <a:t>السلام عليكم ورحمة الله وبركاته. أعضاء لجنة التحكيم الموقّرة، أساتذتي الكرام، أشكركم على وقتكم وحضوركم.
 نحن عبد الله البكور وأحمد الفاضل ومحمد خطيب، ونقدّم اليوم مشروعنا الفصلي بعنوان «نظام إدارة المخيمات»، بإشراف المهندسة لبنى الأنيس، وهو نظام ويب متكامل بُني بإطار عمل Laravel لإدارة العمليات اليومية داخل مخيمات اللجوء: من تسجيل اللاجئ لحظة وصوله، إلى تخصيص وحدته السكنية، وتوزيع المساعدات عليه، وتتبّع حركة دخوله وخروجه عبر البوابات.
-المشروع ليس واجهات فقط: خلفه قاعدة بيانات من ثمانية عشر جدولًا، وسبعة أدوار بصلاحيات دقيقة، ومساعد ذكي يجيب بالعربية، ومجموعة اختبارات آلية من 284 اختبارًا تعمل عند كل تعديل.
+المشروع ليس واجهات فقط: خلفه قاعدة بيانات من ثمانية عشر جدولًا، وسبعة أدوار بصلاحيات دقيقة، ومساعد ذكي يجيب بالعربية، ومجموعة اختبارات آلية من 347 اختبارًا تعمل عند كل تعديل.
 سأعرض عليكم البنية أولًا، ثم الوظائف، ثم الميزة البرمجية الأهم وهي المساعد الذكي، ثم كيف عالجت الحالات الاستثنائية وكيف أثبتّ ذلك بالاختبار.
 [أداء] لا تقرأ الشريحة. انظر إلى اللجنة، وابتسم، وتنفّس قبل أن تبدأ. عرّف بنفسك وبزميليك ثم انتقل. الزمن: 45 ثانية.</a:t>
             </a:r>
@@ -1461,7 +1462,7 @@
               <a:rPr lang="en-US" dirty="0"/>
               <a:t>هذه هي آلية المحرّك في أربع مراحل، ثم مثالان يوضحان لماذا صمّمته هكذا.
 المرحلة الأولى، تطبيع النص: يُفَّرد السؤال إلى صورته الموحّدة. فتصبح «أين يسكن أحمد؟» و«اين يسكن احمد» السؤال نفسه داخل النظام.
-المرحلة الثانية، مطالبة النوايا: لدي عشر نوايا، كل واحدة صنف برمجي مستقل. وكل نيّة تفحص السؤال وتجيب عن سؤال واحد: هل هذا السؤال يخصّني؟
+المرحلة الثانية، مطالبة النوايا: لدينا سبع عشرة نية، كل واحدة صنف برمجي مستقل. وكل نيّة تفحص السؤال وتجيب عن سؤال واحد: هل هذا السؤال يخصّني؟
 المرحلة الثالثة، الترجيح بالنقاط، وهي ألطف جزئية في التصميم: النيّة لا تجيب بنعم أو لا، بل بدرجة ثقة تساوي عدد الإشارات المستقلة التي التقطتها من السؤال. ثم تفوز صاحبة الدرجة الأعلى، وترتيب السجل يفصل بين متساويتين.
 المرحلة الرابعة، التنفيذ: تستخرج النيّة الفائزة الاسم أو الرقم من السؤال بعد حذف كلماتها المفتاحية وكلمات الوقف، ثم تُنفَّذ الاستعلام الجاهز.
 والآن المثالان، وهما جوهر الشريحة. انظروا إلى السؤالين: «أين يسكن أحمد الحسن؟» و«كم شخصًا بلا سكن؟». كلاهما يحتوي كلمة «سكن». لكن الأول سؤال عن شخص بعينه، والثاني إحصاء عن المخيم كله.
@@ -1651,13 +1652,12 @@
           <a:p>
             <a:r>
               <a:rPr lang="en-US" dirty="0"/>
-              <a:t>هذه لقطة حقيقية للمساعد وهو يعمل، وليست رسمًا توضيحيًا.
-كتبنا في مربع الحوار سؤالًا عاديًا بالعربية: «كم عدد السكان في مخيم السلام؟» — بلا صيغة محددة ولا أمر ولا اختيار من قائمة.
-والإجابة التي عادت: «عدد السكان الفعّالين في مخيم السلام هو 199 شخصًا». ولاحظوا ثلاثة أمور فيها:
-الأول أن الإجابة جملة عربية مفهومة أولًا، لا رقمًا مجردًا. لأن الرقم وحده يحتاج من يفسّره، والجملة تحمل معها ما تعنيه: «الفعّالين» تعني أن المؤرشفين غير محسوبين، و«في مخيم السلام» تؤكد أن السؤال فُهم على وجهه.
-الثاني أن الرقم من قاعدة البيانات لا تقدير. النيّة التي فازت بالسؤال نفّذت استعلامًا مكتوبًا في صنف برمجي ويغطّيه اختبار، فالرقم هو ما في الجدول.
-الثالث أن تحت الجملة أرقامًا مساندة: إجمالي السكان، وكم منهم داخل المخيم، وكم خارجه. وهذا مقصود: من يسأل عن عدد السكان غالبًا سيسأل بعدها عن التوزيع، فنجيبه قبل أن يسأل.
-وأعلى المحادثة ترون شرائح أسئلة مقترحة. وهي ليست ثابتة: تُبنى من النوايا التي يسمح بها دور المستخدم، وتذكر اسم مخيم موجود فعلًا في قاعدة البيانات — حتى لا نقترح على الموظف سؤالًا سيُرفض أو لن يجد له إجابة.
+              <a:t>بعد أن رأينا كيف يختار المحرّك، هذه خريطة ما يفهمه فعلًا. سبع عشرة نيّة موزّعة على أربعة محاور، وكل سؤال على الشريحة مأخوذ من أمثلة النيّة نفسها في الكود لا من مخيّلتنا.
+المحور الأول، الإحصائيات: عدد السكان، وعدد من بلا سكن، والوحدات الفارغة، ولمحة عامة عن النظام. وكلها أرقام من الجداول لا تقديرات، والمؤرشفون خارج الحساب.
+المحور الثاني، البحث والسكن: أين يسكن فلان، ومن يسكن في وحدة بعينها، وما حالة تلك الوحدة، ومن أفراد أسرة برقمها. ولاحظوا تعدد المداخل: الاسم، أو رقم الوثيقة، أو رمز الوحدة مثل A-01، أو رقم الأسرة مثل HH-0012 — كلها تصل إلى الإجابة نفسها.
+المحور الثالث، الأمن والحركة: هل الشخص داخل المخيم الآن، ومتى كانت آخر حركة له، وكم حركة عبرت بوابة بعينها اليوم. وهذا المحور مقصور على الأدوار الأمنية: من لا يملك الصلاحية يُمنع بأدب وبرسالة تشرح السبب، لا بصفحة خطأ.
+المحور الرابع، المساعدات والجهات الداعمة: ماذا استلم فرد، وماذا استلمت أسرة، وماذا قدّمت جهة مانحة، وكم وُزّع هذا الشهر، وكم جهة مسجّلة. أي أننا نغطّي المساعدة من ثلاث زوايا: المستفيد الفرد، والأسرة، والمانح.
+والشريط الأسفل هو الضمانة: ما خرج عن هذه المحاور لا يُقابَل بصمت ولا برسالة «لم أفهم». يُمرَّر السؤال إلى بحث شامل في اللاجئين والأسر والوحدات والجهات، فإن وجد شيئًا عرضه، وإن لم يجد عرض أمثلة يفهمها النظام. المستخدم يخرج من كل سؤال بخطوة تالية.
 الزمن: دقيقة ونصف.</a:t>
             </a:r>
             <a:endParaRPr lang="en-US" dirty="0"/>
@@ -1746,15 +1746,14 @@
           <a:p>
             <a:r>
               <a:rPr lang="en-US" dirty="0"/>
-              <a:t>هاتان لقطتان حقيقيتان من النظام، لا رسمين توضيحيين. سألنا المساعد سؤالين لا تملك إجابة واحدة صحيحة، وهذه ردوده.
-الحالة الأولى على اليمين: الاسم الملتبس. كتبنا «أين يسكن محمد»، وفي قاعدة البيانات أربعة أشخاص يطابقون هذا الاسم.
-الخطأ الفادح هنا أن يختار النظام الأول ويجيب بثقة، فيُعطي عنوان شخص آخر. وفي سياق إنساني هذا ليس خطأً تقنيًا فقط، بل قد يكون خطرًا على شخص.
-والحل الناقص أن يقول «الاسم ملتبس، اختر السجل». وقد جرّبناه أولًا ثم رفضناه، لأن من كتب «محمد» غالبًا لا يملك سوى هذا الاسم؛ فإخباره بأن الاسم ملتبس لا يعطيه خطوة تالية.
-والحل الذي اعتمدناه تروْنه: النظام يعلن العدد، ويشرح كيف يُضيَّق البحث — «اكتب الاسم الثلاثي كاملًا أو رقم الوثيقة» — ثم يعرض المطابقين الأربعة مع مخيماتهم ووحداتهم وأرقام وثائقهم ليُحسم الأمر بنقرة. أي أن النظام لا يخبر المستخدم بأنه فشل، بل يعلّمه كيف ينجح. وهناك اختبار آلي يتحقق أن الاسم الثلاثي الكامل يعيد فعلًا شخصًا واحدًا — لأن النصيحة يجب أن تكون قابلة للتنفيذ لا مجرد كلام مهذّب.
-الحالة الثانية على اليسار، وهي عيب حقيقي اكتشفناه وأصلحناه: سألنا عن «مخيم الزعتري» وهو غير مسجّل. الكود القديم كان يعامل هذه الحالة كأن المستخدم لم يذكر مخيمًا أصلًا، فيحسب إجمالي جميع المخيمات ويعرضه. والنتيجة رقم صحيح حسابيًا وخاطئ تمامًا في معناه، والمستخدم يظنه إجابة عن سؤاله.
-وجذر المشكلة أننا كنا نمثّل حالتين مختلفتين بقيمة فارغة واحدة: «لم يُذكر مخيم» و«ذُكر مخيم غير موجود». والحل أن أنشأنا صنفًا خاصًا يمثّل ثلاث حالات صراحةً، فأصبح المبرمج مضطرًا لمعالجة الحالة الثالثة ولم تعد تسقط صامتة.
-والرد اليوم كما ترون: يصرّح بعدم وجود المخيم، ثم يعرض المخيمات المسجّلة فعلًا — لأن السبب الأغلب اختلاف في التسمية، وعرض الأسماء الحقيقية يحلّ المشكلة في خطوة واحدة. ولاحظوا أنه يعيد الاسم بالإملاء الذي كتبه المستخدم لا بصورته المعالَجة، حتى يتعرّف على سؤاله.
-[أداء] هذه أقوى شريحة تملكونها أمام لجنة هندسية: تعترفون بعيب في تصميمكم وتشرحون جذره وحلّه. الزمن: 2.5 دقيقة.</a:t>
+              <a:t>هذه لقطة حقيقية للمساعد وهو يعمل، وليست رسمًا توضيحيًا.
+كتبنا في مربع الحوار سؤالًا عاديًا بالعربية: «كم عدد السكان في مخيم السلام؟» — بلا صيغة محددة ولا أمر ولا اختيار من قائمة.
+والإجابة التي عادت: «عدد السكان الفعّالين في مخيم السلام هو 199 شخصًا». ولاحظوا ثلاثة أمور فيها:
+الأول أن الإجابة جملة عربية مفهومة أولًا، لا رقمًا مجردًا. لأن الرقم وحده يحتاج من يفسّره، والجملة تحمل معها ما تعنيه: «الفعّالين» تعني أن المؤرشفين غير محسوبين، و«في مخيم السلام» تؤكد أن السؤال فُهم على وجهه.
+الثاني أن الرقم من قاعدة البيانات لا تقدير. النيّة التي فازت بالسؤال نفّذت استعلامًا مكتوبًا في صنف برمجي ويغطّيه اختبار، فالرقم هو ما في الجدول.
+الثالث أن تحت الجملة أرقامًا مساندة: إجمالي السكان، وكم منهم داخل المخيم، وكم خارجه. وهذا مقصود: من يسأل عن عدد السكان غالبًا سيسأل بعدها عن التوزيع، فنجيبه قبل أن يسأل.
+وأعلى المحادثة ترون شرائح أسئلة مقترحة. وهي ليست ثابتة: تُبنى من النوايا التي يسمح بها دور المستخدم، وتذكر اسم مخيم موجود فعلًا في قاعدة البيانات — حتى لا نقترح على الموظف سؤالًا سيُرفض أو لن يجد له إجابة.
+الزمن: دقيقة ونصف.</a:t>
             </a:r>
             <a:endParaRPr lang="en-US" dirty="0"/>
           </a:p>
@@ -1842,15 +1841,15 @@
           <a:p>
             <a:r>
               <a:rPr lang="en-US" dirty="0"/>
-              <a:t>كل ما عرضته في الشريحة السابقة معالجةٌ لأخطاء توقّعتها. لكن ماذا عن الخطأ الذي لم أتوقعه؟ عمودٌ حُذف، أو اتصال بقاعدة البيانات انقطع، أو ثغرة أدخلها تعديل مستقبلي؟
-في التطبيق العادي ينتج عن ذلك صفحة خطأ 500. وهي في صندوق حوار كارثة مضاعفة: المستخدم لا يفهم ما جرى، وقد تتسرّب في رسالة الخطأ تفاصيل عن بنية قاعدة البيانات تفيد المهاجم.
-لذلك أحطتُ نقطة الدخول كاملة بـ try و catch يلتقط Throwable — أي كل خطأ واستثناء دون استثناء، وليس فئة معينة منها. وترون الشيفرة الفعلية على اليسار.
-وعند وقوع أي عطل يحدث أمران معًا، وهذه النقطة جوهرية:
-للمستخدم: جملة عربية لبقة تقترح خطوة بديلة — «تعذّر إعداد الإجابة على هذا السؤال. جرّب صياغة أبسط، أو استخدم البحث من الشريط العلوي». بحالة 200 لأن الطلب وصل وعولج، ودون أي تفصيل تقني.
-وللمطوّر: يُكتب في سجل الأخطاء الاستثناء كاملًا، ومعه نص السؤال الذي سبّبه ومُعرِّف المستخدم. أي أن الخطأ يُخفى عن المستخدم ولا يُبتلع. فالمشكلة تصل إلى المطوّر بكل ما يلزم لإعادة إنتاجها وإصلاحها، وهذا هو الفرق بين إخفاء الخطأ وابتلاعه.
-ولاحظوا الشريط السفلي: هذا السلوك ليس ادّعاءً في عرض تقديمي، بل مُثبَت باختبارين آليين. الأول يفتعل عطلًا داخل المساعد ويتحقق أن الاستجابة 200 لا 500، وأن كلمة الخطأ التقنية لم تظهر في استجابة المتصفح. والثاني يتحقق أن السؤال المتسبّب سُجِّل فعلًا في سجل الأخطاء.
-والخلاصة في جملة: المساعد قد يعجز عن الإجابة، لكنه لا ينهار، ولا يخترع إجابة، ولا يفشل بصمت.
-الزمن: 2 دقيقة.</a:t>
+              <a:t>هاتان لقطتان حقيقيتان من النظام، لا رسمين توضيحيين. سألنا المساعد سؤالين لا تملك إجابة واحدة صحيحة، وهذه ردوده.
+الحالة الأولى على اليمين: الاسم الملتبس. كتبنا «أين يسكن محمد»، وفي قاعدة البيانات أربعة أشخاص يطابقون هذا الاسم.
+الخطأ الفادح هنا أن يختار النظام الأول ويجيب بثقة، فيُعطي عنوان شخص آخر. وفي سياق إنساني هذا ليس خطأً تقنيًا فقط، بل قد يكون خطرًا على شخص.
+والحل الناقص أن يقول «الاسم ملتبس، اختر السجل». وقد جرّبناه أولًا ثم رفضناه، لأن من كتب «محمد» غالبًا لا يملك سوى هذا الاسم؛ فإخباره بأن الاسم ملتبس لا يعطيه خطوة تالية.
+والحل الذي اعتمدناه تروْنه: النظام يعلن العدد، ويشرح كيف يُضيَّق البحث — «اكتب الاسم الثلاثي كاملًا أو رقم الوثيقة» — ثم يعرض المطابقين الأربعة مع مخيماتهم ووحداتهم وأرقام وثائقهم ليُحسم الأمر بنقرة. أي أن النظام لا يخبر المستخدم بأنه فشل، بل يعلّمه كيف ينجح. وهناك اختبار آلي يتحقق أن الاسم الثلاثي الكامل يعيد فعلًا شخصًا واحدًا — لأن النصيحة يجب أن تكون قابلة للتنفيذ لا مجرد كلام مهذّب.
+الحالة الثانية على اليسار، وهي عيب حقيقي اكتشفناه وأصلحناه: سألنا عن «مخيم الزعتري» وهو غير مسجّل. الكود القديم كان يعامل هذه الحالة كأن المستخدم لم يذكر مخيمًا أصلًا، فيحسب إجمالي جميع المخيمات ويعرضه. والنتيجة رقم صحيح حسابيًا وخاطئ تمامًا في معناه، والمستخدم يظنه إجابة عن سؤاله.
+وجذر المشكلة أننا كنا نمثّل حالتين مختلفتين بقيمة فارغة واحدة: «لم يُذكر مخيم» و«ذُكر مخيم غير موجود». والحل أن أنشأنا صنفًا خاصًا يمثّل ثلاث حالات صراحةً، فأصبح المبرمج مضطرًا لمعالجة الحالة الثالثة ولم تعد تسقط صامتة.
+والرد اليوم كما ترون: يصرّح بعدم وجود المخيم، ثم يعرض المخيمات المسجّلة فعلًا — لأن السبب الأغلب اختلاف في التسمية، وعرض الأسماء الحقيقية يحلّ المشكلة في خطوة واحدة. ولاحظوا أنه يعيد الاسم بالإملاء الذي كتبه المستخدم لا بصورته المعالَجة، حتى يتعرّف على سؤاله.
+[أداء] هذه أقوى شريحة تملكونها أمام لجنة هندسية: تعترفون بعيب في تصميمكم وتشرحون جذره وحلّه. الزمن: 2.5 دقيقة.</a:t>
             </a:r>
             <a:endParaRPr lang="en-US" dirty="0"/>
           </a:p>
@@ -1938,13 +1937,15 @@
           <a:p>
             <a:r>
               <a:rPr lang="en-US" dirty="0"/>
-              <a:t>هذه ليست صورة من الإنترنت — هذه مخرجات تشغيل المجموعة على هذا المشروع، وقد شغّلتها قبل هذا العرض.
-284 اختبارًا، 883 تأكيدًا، تعمل كلها في أقل من سبع ثوانٍ، والنتيجة: OK. أي لا فشل ولا اختبار متجاوَز.
-ولماذا هذا مهم في مشروع تخرّج؟ لأن أي أحد يستطيع أن يقول في عرض تقديمي «النظام يعالج الأخطاء» أو «الصلاحيات مضبوطة». الاختبار هو ما يحوّل الادّعاء إلى برهان: إن كسرت الصلاحيات غدًا، يسقط اختبار ويخبرني قبل أن يكتشفها مستخدم.
-وانظروا أين تتركّز التغطية على اليمين: خمسون اختبارًا للمساعد الذكي وحده — وهو أكثر جزء مُختبَر في النظام كله، لأنه الجزء الذي يتعامل مع نص حر كتبه إنسان، وهو أكثر ما يمكن أن يسوء. ثم ثمانية وعشرون لخدمات المجال، ومثلها للترشيح والقوائم، واثنان وعشرون للبحث العربي والفهرسة، وثلاثة عشر للتحقق من المدخلات، وأحد عشر للصلاحيات والمصادقة.
-ونقطة تقنية: الاختبارات تعمل على قاعدة بيانات في الذاكرة تُنشأ من الصفر عند كل تشغيل. أي أنها لا تعتمد على بيانات موجودة مسبقًا، وتعطي النتيجة نفسها على أي جهاز — وهذا شرط أن تكون ذات معنى.
-وأخيرًا، هذه المجموعة ليست شيئًا أشغّله يدويًا حين أتذكّر: GitHub Actions يشغّلها آليًا عند كل رفع، ويفحص تنسيق الكود قبلها. فلا يدخل إلى الفرع الرئيسي كودٌ يكسر اختبارًا.
-[أداء] إن سألوك «كيف تضمن أن ما تقوله يعمل؟» — أشِر إلى هذه الشريحة. الزمن: 1.5 دقيقة.</a:t>
+              <a:t>كل ما عرضته في الشريحة السابقة معالجةٌ لأخطاء توقّعتها. لكن ماذا عن الخطأ الذي لم أتوقعه؟ عمودٌ حُذف، أو اتصال بقاعدة البيانات انقطع، أو ثغرة أدخلها تعديل مستقبلي؟
+في التطبيق العادي ينتج عن ذلك صفحة خطأ 500. وهي في صندوق حوار كارثة مضاعفة: المستخدم لا يفهم ما جرى، وقد تتسرّب في رسالة الخطأ تفاصيل عن بنية قاعدة البيانات تفيد المهاجم.
+لذلك أحطتُ نقطة الدخول كاملة بـ try و catch يلتقط Throwable — أي كل خطأ واستثناء دون استثناء، وليس فئة معينة منها. وترون الشيفرة الفعلية على اليسار.
+وعند وقوع أي عطل يحدث أمران معًا، وهذه النقطة جوهرية:
+للمستخدم: جملة عربية لبقة تقترح خطوة بديلة — «تعذّر إعداد الإجابة على هذا السؤال. جرّب صياغة أبسط، أو استخدم البحث من الشريط العلوي». بحالة 200 لأن الطلب وصل وعولج، ودون أي تفصيل تقني.
+وللمطوّر: يُكتب في سجل الأخطاء الاستثناء كاملًا، ومعه نص السؤال الذي سبّبه ومُعرِّف المستخدم. أي أن الخطأ يُخفى عن المستخدم ولا يُبتلع. فالمشكلة تصل إلى المطوّر بكل ما يلزم لإعادة إنتاجها وإصلاحها، وهذا هو الفرق بين إخفاء الخطأ وابتلاعه.
+ولاحظوا الشريط السفلي: هذا السلوك ليس ادّعاءً في عرض تقديمي، بل مُثبَت باختبارين آليين. الأول يفتعل عطلًا داخل المساعد ويتحقق أن الاستجابة 200 لا 500، وأن كلمة الخطأ التقنية لم تظهر في استجابة المتصفح. والثاني يتحقق أن السؤال المتسبّب سُجِّل فعلًا في سجل الأخطاء.
+والخلاصة في جملة: المساعد قد يعجز عن الإجابة، لكنه لا ينهار، ولا يخترع إجابة، ولا يفشل بصمت.
+الزمن: 2 دقيقة.</a:t>
             </a:r>
             <a:endParaRPr lang="en-US" dirty="0"/>
           </a:p>
@@ -2032,12 +2033,13 @@
           <a:p>
             <a:r>
               <a:rPr lang="en-US" dirty="0"/>
-              <a:t>أختم بثلاث نقاط موجزة.
-أولًا، ما أُنجز: نظام متكامل يغطي دورة حياة اللاجئ داخل المخيم — من التسجيل إلى السكن إلى المساعدات إلى حركة الدخول والخروج — بست وحدات مترابطة وسبعة أدوار بصلاحيات دقيقة، مبني على Laravel وMySQL، ومغطّى بـ 284 اختبارًا آليًا تعمل عند كل تعديل.
-ثانيًا، ما أعتبره الإسهام الحقيقي للمشروع: ليس عدد الشاشات، بل أمران. الأول هو المساعد الذكي بالعربية الذي يوصل الموظف إلى المعلومة بجملة واحدة، ويعمل داخل الخادم بالكامل دون إرسال بيانات اللاجئين إلى أي جهة خارجية — وهو ما يجعله صالحًا للتشغيل في بيئة إنسانية حقيقية، لا في العرض التجريبي فقط. والثاني هو التدهور الآمن: أن يتعامل النظام مع الاسم الملتبس، والمخيم غير الموجود، والنتيجة الفارغة، والخطأ غير المتوقع — بردود واضحة، دون أن ينهار ودون أن يخترع.
-ثالثًا، آفاق التطوير: تطبيق جوّال لضباط البوابات يسجّل الحركة بمسح باركود البطاقة بدل الإدخال اليدوي. ودعم متعدد اللغات، والبنية جاهزة له لأن كل النصوص مركزية. ولوحات تحليلية تكشف المؤشرات مبكرًا — كاكتظاظ متصاعد في وحدة، أو تأخر في متابعة طبية. وواجهات تكامل مع أنظمة المنظمات الإنسانية لتبادل البيانات بأمان.
-وفي الختام، أشكر أستاذي المشرف على متابعته وتوجيهه، وأشكر لجنة التحكيم الموقّرة على وقتها واهتمامها. والآن يسعدني أن أستمع إلى أسئلتكم وملاحظاتكم.
-[أداء] اختم ثم اصمت وانظر إلى اللجنة. لا تُتبعها باعتذار ولا بجملة زائدة. الزمن: 1.5 دقيقة.</a:t>
+              <a:t>هذه ليست صورة من الإنترنت — هذه مخرجات تشغيل المجموعة على هذا المشروع، وقد شغّلتها قبل هذا العرض.
+347 اختبارًا، 1066 تأكيدًا، تعمل كلها في نحو عشر ثوانٍ، والنتيجة: OK. أي لا فشل ولا اختبار متجاوَز.
+ولماذا هذا مهم في مشروع فصلي؟ لأن أي أحد يستطيع أن يقول في عرض تقديمي «النظام يعالج الأخطاء» أو «الصلاحيات مضبوطة». الاختبار هو ما يحوّل الادّعاء إلى برهان: إن كسرت الصلاحيات غدًا، يسقط اختبار ويخبرني قبل أن يكتشفها مستخدم.
+وانظروا أين تتركّز التغطية على اليمين: سبعون اختبارًا للمساعد الذكي وحده — وهو أكثر جزء مُختبَر في النظام كله، لأنه الجزء الذي يتعامل مع نص حر كتبه إنسان، وهو أكثر ما يمكن أن يسوء. ثم ثمانية وعشرون لخدمات المجال، ومثلها للترشيح والقوائم، وسبعة وعشرون للحذف والأرشفة، واثنان وعشرون للبحث العربي والفهرسة، وتسعة للبيانات الاختبارية.
+ونقطة تقنية: الاختبارات تعمل على قاعدة بيانات في الذاكرة تُنشأ من الصفر عند كل تشغيل. أي أنها لا تعتمد على بيانات موجودة مسبقًا، وتعطي النتيجة نفسها على أي جهاز — وهذا شرط أن تكون ذات معنى.
+وأخيرًا، هذه المجموعة ليست شيئًا أشغّله يدويًا حين أتذكّر: GitHub Actions يشغّلها آليًا عند كل رفع، ويفحص تنسيق الكود قبلها. فلا يدخل إلى الفرع الرئيسي كودٌ يكسر اختبارًا.
+[أداء] إن سألوك «كيف تضمن أن ما تقوله يعمل؟» — أشِر إلى هذه الشريحة. الزمن: 1.5 دقيقة.</a:t>
             </a:r>
             <a:endParaRPr lang="en-US" dirty="0"/>
           </a:p>
@@ -2061,6 +2063,99 @@
             <a:fld id="{F7021451-1387-4CA6-816F-3879F97B5CBC}" type="slidenum">
               <a:rPr lang="en-US"/>
               <a:t>24</a:t>
+            </a:fld>
+            <a:endParaRPr lang="en-US"/>
+          </a:p>
+        </p:txBody>
+      </p:sp>
+    </p:spTree>
+    <p:extLst>
+      <p:ext uri="{BB962C8B-B14F-4D97-AF65-F5344CB8AC3E}">
+        <p14:creationId xmlns:p14="http://schemas.microsoft.com/office/powerpoint/2010/main" val="1024086991"/>
+      </p:ext>
+    </p:extLst>
+  </p:cSld>
+  <p:clrMapOvr>
+    <a:masterClrMapping/>
+  </p:clrMapOvr>
+</p:notes>
+</file>
+
+<file path=ppt/notesSlides/notesSlide25.xml><?xml version="1.0" encoding="utf-8"?>
+<p:notes xmlns:a="http://schemas.openxmlformats.org/drawingml/2006/main" xmlns:r="http://schemas.openxmlformats.org/officeDocument/2006/relationships" xmlns:p="http://schemas.openxmlformats.org/presentationml/2006/main">
+  <p:cSld>
+    <p:spTree>
+      <p:nvGrpSpPr>
+        <p:cNvPr id="1" name=""/>
+        <p:cNvGrpSpPr/>
+        <p:nvPr/>
+      </p:nvGrpSpPr>
+      <p:grpSpPr>
+        <a:xfrm>
+          <a:off x="0" y="0"/>
+          <a:ext cx="0" cy="0"/>
+          <a:chOff x="0" y="0"/>
+          <a:chExt cx="0" cy="0"/>
+        </a:xfrm>
+      </p:grpSpPr>
+      <p:sp>
+        <p:nvSpPr>
+          <p:cNvPr id="2" name="Slide Image Placeholder 1"/>
+          <p:cNvSpPr>
+            <a:spLocks noGrp="1" noRot="1" noChangeAspect="1"/>
+          </p:cNvSpPr>
+          <p:nvPr>
+            <p:ph type="sldImg"/>
+          </p:nvPr>
+        </p:nvSpPr>
+        <p:spPr/>
+      </p:sp>
+      <p:sp>
+        <p:nvSpPr>
+          <p:cNvPr id="3" name="Notes Placeholder 2"/>
+          <p:cNvSpPr>
+            <a:spLocks noGrp="1"/>
+          </p:cNvSpPr>
+          <p:nvPr>
+            <p:ph type="body" idx="1"/>
+          </p:nvPr>
+        </p:nvSpPr>
+        <p:spPr/>
+        <p:txBody>
+          <a:bodyPr/>
+          <a:lstStyle/>
+          <a:p>
+            <a:r>
+              <a:rPr lang="en-US" dirty="0"/>
+              <a:t>أختم بثلاث نقاط موجزة.
+أولًا، ما أُنجز: نظام متكامل يغطي دورة حياة اللاجئ داخل المخيم — من التسجيل إلى السكن إلى المساعدات إلى حركة الدخول والخروج — بست وحدات مترابطة وسبعة أدوار بصلاحيات دقيقة، مبني على Laravel وMySQL، ومغطّى بـ 347 اختبارًا آليًا تعمل عند كل تعديل.
+ثانيًا، ما أعتبره الإسهام الحقيقي للمشروع: ليس عدد الشاشات، بل أمران. الأول هو المساعد الذكي بالعربية الذي يوصل الموظف إلى المعلومة بجملة واحدة، ويعمل داخل الخادم بالكامل دون إرسال بيانات اللاجئين إلى أي جهة خارجية — وهو ما يجعله صالحًا للتشغيل في بيئة إنسانية حقيقية، لا في العرض التجريبي فقط. والثاني هو التدهور الآمن: أن يتعامل النظام مع الاسم الملتبس، والمخيم غير الموجود، والنتيجة الفارغة، والخطأ غير المتوقع — بردود واضحة، دون أن ينهار ودون أن يخترع.
+ثالثًا، آفاق التطوير: تطبيق جوّال لضباط البوابات يسجّل الحركة بمسح باركود البطاقة بدل الإدخال اليدوي. ودعم متعدد اللغات، والبنية جاهزة له لأن كل النصوص مركزية. ولوحات تحليلية تكشف المؤشرات مبكرًا — كاكتظاظ متصاعد في وحدة، أو تأخر في متابعة طبية. وواجهات تكامل مع أنظمة المنظمات الإنسانية لتبادل البيانات بأمان.
+وفي الختام، أشكر أستاذي المشرف على متابعته وتوجيهه، وأشكر لجنة التحكيم الموقّرة على وقتها واهتمامها. والآن يسعدني أن أستمع إلى أسئلتكم وملاحظاتكم.
+[أداء] اختم ثم اصمت وانظر إلى اللجنة. لا تُتبعها باعتذار ولا بجملة زائدة. الزمن: 1.5 دقيقة.</a:t>
+            </a:r>
+            <a:endParaRPr lang="en-US" dirty="0"/>
+          </a:p>
+        </p:txBody>
+      </p:sp>
+      <p:sp>
+        <p:nvSpPr>
+          <p:cNvPr id="4" name="Slide Number Placeholder 3"/>
+          <p:cNvSpPr>
+            <a:spLocks noGrp="1"/>
+          </p:cNvSpPr>
+          <p:nvPr>
+            <p:ph type="sldNum" sz="quarter" idx="10"/>
+          </p:nvPr>
+        </p:nvSpPr>
+        <p:spPr/>
+        <p:txBody>
+          <a:bodyPr/>
+          <a:lstStyle/>
+          <a:p>
+            <a:fld id="{F7021451-1387-4CA6-816F-3879F97B5CBC}" type="slidenum">
+              <a:rPr lang="en-US"/>
+              <a:t>25</a:t>
             </a:fld>
             <a:endParaRPr lang="en-US"/>
           </a:p>
@@ -2319,7 +2414,7 @@
 الواجهة: Blade مع CSS وJavaScript عاديين، بلا أي خطوة بناء. قرار مقصود: النظام مُوجَّه لبيئات محدودة الموارد والاتصال، ووجود عملية بناء معقّدة يجعل النشر والصيانة أصعب على فريق ميداني.
 بيئة التطوير: XAMPP التي توفّر Apache وMySQL وPHP في حزمة واحدة، وهي الأنسب للتطوير المحلي والتشغيل التجريبي. وأضفت أيضًا ملف Docker Compose في المستودع كخيار بديل.
 وإدارة الأكواد: Git وGitHub — لا كمخزن للنسخ فقط، بل بمنهجية فروع ومراجعة عبر طلبات دمج، مع تكامل مستمر عبر GitHub Actions يفحص التنسيق ويشغّل الاختبارات آليًا عند كل رفع.
-والأرقام على اليسار: 284 اختبارًا، 18 جدولًا، 12 خدمة، نحو 13,500 سطر.
+والأرقام على اليسار: 347 اختبارًا، 18 جدولًا، 12 خدمة، نحو 13,500 سطر.
 الزمن: 1.5 دقيقة.</a:t>
             </a:r>
             <a:endParaRPr lang="en-US" dirty="0"/>
@@ -10012,7 +10107,7 @@
                 <a:ea typeface="Arial" pitchFamily="34" charset="-122"/>
                 <a:cs typeface="Arial" pitchFamily="34" charset="-120"/>
               </a:rPr>
-              <a:t>عشر نوايا، كل واحدة صنف مستقل</a:t>
+              <a:t>سبع عشرة نية، كل واحدة صنف مستقل</a:t>
             </a:r>
             <a:endParaRPr lang="en-US" sz="1000" dirty="0"/>
           </a:p>
@@ -12481,7 +12576,7 @@
                 <a:ea typeface="Arial" pitchFamily="34" charset="-122"/>
                 <a:cs typeface="Arial" pitchFamily="34" charset="-120"/>
               </a:rPr>
-              <a:t>المحور الرابع · لقطة حقيقية</a:t>
+              <a:t>المحور الرابع · ما يفهمه المساعد</a:t>
             </a:r>
             <a:endParaRPr lang="en-US" sz="1300" dirty="0"/>
           </a:p>
@@ -12520,7 +12615,7 @@
                 <a:ea typeface="Arial" pitchFamily="34" charset="-122"/>
                 <a:cs typeface="Arial" pitchFamily="34" charset="-120"/>
               </a:rPr>
-              <a:t>المساعد داخل النظام</a:t>
+              <a:t>أربعة محاور، سبع عشرة نية</a:t>
             </a:r>
             <a:endParaRPr lang="en-US" sz="3300" dirty="0"/>
           </a:p>
@@ -12534,12 +12629,132 @@
         </p:nvSpPr>
         <p:spPr>
           <a:xfrm>
-            <a:off x="7701991" y="1517904"/>
-            <a:ext cx="3172968" cy="4673956"/>
+            <a:off x="9034043" y="1536192"/>
+            <a:ext cx="2609012" cy="731520"/>
           </a:xfrm>
           <a:prstGeom prst="roundRect">
             <a:avLst>
-              <a:gd name="adj" fmla="val 2594"/>
+              <a:gd name="adj" fmla="val 11250"/>
+            </a:avLst>
+          </a:prstGeom>
+          <a:solidFill>
+            <a:srgbClr val="0A2E36"/>
+          </a:solidFill>
+          <a:ln/>
+        </p:spPr>
+      </p:sp>
+      <p:sp>
+        <p:nvSpPr>
+          <p:cNvPr id="5" name="Shape 3"/>
+          <p:cNvSpPr/>
+          <p:nvPr/>
+        </p:nvSpPr>
+        <p:spPr>
+          <a:xfrm>
+            <a:off x="11167567" y="1792224"/>
+            <a:ext cx="219456" cy="219456"/>
+          </a:xfrm>
+          <a:prstGeom prst="ellipse">
+            <a:avLst/>
+          </a:prstGeom>
+          <a:solidFill>
+            <a:srgbClr val="02717D"/>
+          </a:solidFill>
+          <a:ln/>
+        </p:spPr>
+      </p:sp>
+      <p:sp>
+        <p:nvSpPr>
+          <p:cNvPr id="6" name="Text 4"/>
+          <p:cNvSpPr txBox="1"/>
+          <p:nvPr/>
+        </p:nvSpPr>
+        <p:spPr>
+          <a:xfrm>
+            <a:off x="9235211" y="1627632"/>
+            <a:ext cx="1831772" cy="292608"/>
+          </a:xfrm>
+          <a:prstGeom prst="rect">
+            <a:avLst/>
+          </a:prstGeom>
+          <a:noFill/>
+          <a:ln/>
+        </p:spPr>
+        <p:txBody>
+          <a:bodyPr wrap="square" lIns="0" tIns="0" rIns="0" bIns="0" rtlCol="0" anchor="ctr"/>
+          <a:lstStyle/>
+          <a:p>
+            <a:pPr rtl="1" algn="r" indent="0" marL="0">
+              <a:buNone/>
+            </a:pPr>
+            <a:r>
+              <a:rPr lang="en-US" sz="1300" b="1" dirty="0">
+                <a:solidFill>
+                  <a:srgbClr val="FFFFFF"/>
+                </a:solidFill>
+                <a:latin typeface="Arial" pitchFamily="34" charset="0"/>
+                <a:ea typeface="Arial" pitchFamily="34" charset="-122"/>
+                <a:cs typeface="Arial" pitchFamily="34" charset="-120"/>
+              </a:rPr>
+              <a:t>الإحصائيات والمؤشرات</a:t>
+            </a:r>
+            <a:endParaRPr lang="en-US" sz="1300" dirty="0"/>
+          </a:p>
+        </p:txBody>
+      </p:sp>
+      <p:sp>
+        <p:nvSpPr>
+          <p:cNvPr id="7" name="Text 5"/>
+          <p:cNvSpPr txBox="1"/>
+          <p:nvPr/>
+        </p:nvSpPr>
+        <p:spPr>
+          <a:xfrm>
+            <a:off x="9235211" y="1938528"/>
+            <a:ext cx="1831772" cy="256032"/>
+          </a:xfrm>
+          <a:prstGeom prst="rect">
+            <a:avLst/>
+          </a:prstGeom>
+          <a:noFill/>
+          <a:ln/>
+        </p:spPr>
+        <p:txBody>
+          <a:bodyPr wrap="square" lIns="0" tIns="0" rIns="0" bIns="0" rtlCol="0" anchor="ctr"/>
+          <a:lstStyle/>
+          <a:p>
+            <a:pPr rtl="1" algn="r" indent="0" marL="0">
+              <a:buNone/>
+            </a:pPr>
+            <a:r>
+              <a:rPr lang="en-US" sz="1000" dirty="0">
+                <a:solidFill>
+                  <a:srgbClr val="BFD4D7"/>
+                </a:solidFill>
+                <a:latin typeface="Arial" pitchFamily="34" charset="0"/>
+                <a:ea typeface="Arial" pitchFamily="34" charset="-122"/>
+                <a:cs typeface="Arial" pitchFamily="34" charset="-120"/>
+              </a:rPr>
+              <a:t>أربع نوايا</a:t>
+            </a:r>
+            <a:endParaRPr lang="en-US" sz="1000" dirty="0"/>
+          </a:p>
+        </p:txBody>
+      </p:sp>
+      <p:sp>
+        <p:nvSpPr>
+          <p:cNvPr id="8" name="Shape 6"/>
+          <p:cNvSpPr/>
+          <p:nvPr/>
+        </p:nvSpPr>
+        <p:spPr>
+          <a:xfrm>
+            <a:off x="9034043" y="2340864"/>
+            <a:ext cx="2609012" cy="3310128"/>
+          </a:xfrm>
+          <a:prstGeom prst="roundRect">
+            <a:avLst>
+              <a:gd name="adj" fmla="val 3154"/>
             </a:avLst>
           </a:prstGeom>
           <a:solidFill>
@@ -12555,83 +12770,438 @@
           </a:effectLst>
         </p:spPr>
       </p:sp>
-      <p:pic>
-        <p:nvPicPr>
-          <p:cNvPr id="5" name="Image 0" descr="/home/user/Camp_management/docs/screenshots/assistant_ok.png">    </p:cNvPr>
-          <p:cNvPicPr>
-            <a:picLocks noChangeAspect="1"/>
-          </p:cNvPicPr>
-          <p:nvPr/>
-        </p:nvPicPr>
-        <p:blipFill>
-          <a:blip r:embed="rId1"/>
-          <a:stretch>
-            <a:fillRect/>
-          </a:stretch>
-        </p:blipFill>
-        <p:spPr>
-          <a:xfrm>
-            <a:off x="7756855" y="1572768"/>
-            <a:ext cx="3063240" cy="4564228"/>
-          </a:xfrm>
-          <a:prstGeom prst="rect">
-            <a:avLst/>
-          </a:prstGeom>
-        </p:spPr>
-      </p:pic>
-      <p:sp>
-        <p:nvSpPr>
-          <p:cNvPr id="6" name="Text 3"/>
-          <p:cNvSpPr txBox="1"/>
-          <p:nvPr/>
-        </p:nvSpPr>
-        <p:spPr>
-          <a:xfrm>
-            <a:off x="548640" y="1627632"/>
-            <a:ext cx="6705295" cy="310896"/>
-          </a:xfrm>
-          <a:prstGeom prst="rect">
-            <a:avLst/>
-          </a:prstGeom>
-          <a:noFill/>
-          <a:ln/>
-        </p:spPr>
-        <p:txBody>
-          <a:bodyPr wrap="square" lIns="0" tIns="0" rIns="0" bIns="0" rtlCol="0" anchor="ctr"/>
-          <a:lstStyle/>
-          <a:p>
-            <a:pPr rtl="1" algn="r" indent="0" marL="0">
-              <a:buNone/>
-            </a:pPr>
-            <a:r>
-              <a:rPr lang="en-US" sz="1400" b="1" dirty="0">
-                <a:solidFill>
-                  <a:srgbClr val="02717D"/>
-                </a:solidFill>
-                <a:latin typeface="Arial" pitchFamily="34" charset="0"/>
-                <a:ea typeface="Arial" pitchFamily="34" charset="-122"/>
-                <a:cs typeface="Arial" pitchFamily="34" charset="-120"/>
-              </a:rPr>
-              <a:t>سؤال واحد بالعربية، وإجابة من قاعدة البيانات</a:t>
-            </a:r>
-            <a:endParaRPr lang="en-US" sz="1400" dirty="0"/>
-          </a:p>
-        </p:txBody>
-      </p:sp>
-      <p:sp>
-        <p:nvSpPr>
-          <p:cNvPr id="7" name="Shape 4"/>
-          <p:cNvSpPr/>
-          <p:nvPr/>
-        </p:nvSpPr>
-        <p:spPr>
-          <a:xfrm>
-            <a:off x="548640" y="2084832"/>
-            <a:ext cx="6705295" cy="841248"/>
+      <p:sp>
+        <p:nvSpPr>
+          <p:cNvPr id="9" name="Shape 7"/>
+          <p:cNvSpPr/>
+          <p:nvPr/>
+        </p:nvSpPr>
+        <p:spPr>
+          <a:xfrm>
+            <a:off x="9180347" y="2468880"/>
+            <a:ext cx="2316404" cy="502920"/>
           </a:xfrm>
           <a:prstGeom prst="roundRect">
             <a:avLst>
-              <a:gd name="adj" fmla="val 9783"/>
+              <a:gd name="adj" fmla="val 10909"/>
+            </a:avLst>
+          </a:prstGeom>
+          <a:solidFill>
+            <a:srgbClr val="FDF3E3"/>
+          </a:solidFill>
+          <a:ln/>
+        </p:spPr>
+      </p:sp>
+      <p:sp>
+        <p:nvSpPr>
+          <p:cNvPr id="10" name="Text 8"/>
+          <p:cNvSpPr txBox="1"/>
+          <p:nvPr/>
+        </p:nvSpPr>
+        <p:spPr>
+          <a:xfrm>
+            <a:off x="9308363" y="2468880"/>
+            <a:ext cx="2060372" cy="502920"/>
+          </a:xfrm>
+          <a:prstGeom prst="rect">
+            <a:avLst/>
+          </a:prstGeom>
+          <a:noFill/>
+          <a:ln/>
+        </p:spPr>
+        <p:txBody>
+          <a:bodyPr wrap="square" lIns="0" tIns="0" rIns="0" bIns="0" rtlCol="0" anchor="ctr"/>
+          <a:lstStyle/>
+          <a:p>
+            <a:pPr rtl="1" algn="r" indent="0" marL="0">
+              <a:lnSpc>
+                <a:spcPts val="1200"/>
+              </a:lnSpc>
+              <a:buNone/>
+            </a:pPr>
+            <a:r>
+              <a:rPr lang="en-US" sz="1000" dirty="0">
+                <a:solidFill>
+                  <a:srgbClr val="16292E"/>
+                </a:solidFill>
+                <a:latin typeface="Arial" pitchFamily="34" charset="0"/>
+                <a:ea typeface="Arial" pitchFamily="34" charset="-122"/>
+                <a:cs typeface="Arial" pitchFamily="34" charset="-120"/>
+              </a:rPr>
+              <a:t>كم عدد السكان في مخيم السلام؟</a:t>
+            </a:r>
+            <a:endParaRPr lang="en-US" sz="1000" dirty="0"/>
+          </a:p>
+        </p:txBody>
+      </p:sp>
+      <p:sp>
+        <p:nvSpPr>
+          <p:cNvPr id="11" name="Shape 9"/>
+          <p:cNvSpPr/>
+          <p:nvPr/>
+        </p:nvSpPr>
+        <p:spPr>
+          <a:xfrm>
+            <a:off x="9180347" y="3035808"/>
+            <a:ext cx="2316404" cy="502920"/>
+          </a:xfrm>
+          <a:prstGeom prst="roundRect">
+            <a:avLst>
+              <a:gd name="adj" fmla="val 10909"/>
+            </a:avLst>
+          </a:prstGeom>
+          <a:solidFill>
+            <a:srgbClr val="ECF4F4"/>
+          </a:solidFill>
+          <a:ln/>
+        </p:spPr>
+      </p:sp>
+      <p:sp>
+        <p:nvSpPr>
+          <p:cNvPr id="12" name="Text 10"/>
+          <p:cNvSpPr txBox="1"/>
+          <p:nvPr/>
+        </p:nvSpPr>
+        <p:spPr>
+          <a:xfrm>
+            <a:off x="9308363" y="3035808"/>
+            <a:ext cx="2060372" cy="502920"/>
+          </a:xfrm>
+          <a:prstGeom prst="rect">
+            <a:avLst/>
+          </a:prstGeom>
+          <a:noFill/>
+          <a:ln/>
+        </p:spPr>
+        <p:txBody>
+          <a:bodyPr wrap="square" lIns="0" tIns="0" rIns="0" bIns="0" rtlCol="0" anchor="ctr"/>
+          <a:lstStyle/>
+          <a:p>
+            <a:pPr rtl="1" algn="r" indent="0" marL="0">
+              <a:lnSpc>
+                <a:spcPts val="1200"/>
+              </a:lnSpc>
+              <a:buNone/>
+            </a:pPr>
+            <a:r>
+              <a:rPr lang="en-US" sz="1000" dirty="0">
+                <a:solidFill>
+                  <a:srgbClr val="16292E"/>
+                </a:solidFill>
+                <a:latin typeface="Arial" pitchFamily="34" charset="0"/>
+                <a:ea typeface="Arial" pitchFamily="34" charset="-122"/>
+                <a:cs typeface="Arial" pitchFamily="34" charset="-120"/>
+              </a:rPr>
+              <a:t>كم لاجئًا بلا سكن؟</a:t>
+            </a:r>
+            <a:endParaRPr lang="en-US" sz="1000" dirty="0"/>
+          </a:p>
+        </p:txBody>
+      </p:sp>
+      <p:sp>
+        <p:nvSpPr>
+          <p:cNvPr id="13" name="Shape 11"/>
+          <p:cNvSpPr/>
+          <p:nvPr/>
+        </p:nvSpPr>
+        <p:spPr>
+          <a:xfrm>
+            <a:off x="9180347" y="3602736"/>
+            <a:ext cx="2316404" cy="502920"/>
+          </a:xfrm>
+          <a:prstGeom prst="roundRect">
+            <a:avLst>
+              <a:gd name="adj" fmla="val 10909"/>
+            </a:avLst>
+          </a:prstGeom>
+          <a:solidFill>
+            <a:srgbClr val="FDF3E3"/>
+          </a:solidFill>
+          <a:ln/>
+        </p:spPr>
+      </p:sp>
+      <p:sp>
+        <p:nvSpPr>
+          <p:cNvPr id="14" name="Text 12"/>
+          <p:cNvSpPr txBox="1"/>
+          <p:nvPr/>
+        </p:nvSpPr>
+        <p:spPr>
+          <a:xfrm>
+            <a:off x="9308363" y="3602736"/>
+            <a:ext cx="2060372" cy="502920"/>
+          </a:xfrm>
+          <a:prstGeom prst="rect">
+            <a:avLst/>
+          </a:prstGeom>
+          <a:noFill/>
+          <a:ln/>
+        </p:spPr>
+        <p:txBody>
+          <a:bodyPr wrap="square" lIns="0" tIns="0" rIns="0" bIns="0" rtlCol="0" anchor="ctr"/>
+          <a:lstStyle/>
+          <a:p>
+            <a:pPr rtl="1" algn="r" indent="0" marL="0">
+              <a:lnSpc>
+                <a:spcPts val="1200"/>
+              </a:lnSpc>
+              <a:buNone/>
+            </a:pPr>
+            <a:r>
+              <a:rPr lang="en-US" sz="1000" dirty="0">
+                <a:solidFill>
+                  <a:srgbClr val="16292E"/>
+                </a:solidFill>
+                <a:latin typeface="Arial" pitchFamily="34" charset="0"/>
+                <a:ea typeface="Arial" pitchFamily="34" charset="-122"/>
+                <a:cs typeface="Arial" pitchFamily="34" charset="-120"/>
+              </a:rPr>
+              <a:t>كم وحدة سكنية فارغة؟</a:t>
+            </a:r>
+            <a:endParaRPr lang="en-US" sz="1000" dirty="0"/>
+          </a:p>
+        </p:txBody>
+      </p:sp>
+      <p:sp>
+        <p:nvSpPr>
+          <p:cNvPr id="15" name="Shape 13"/>
+          <p:cNvSpPr/>
+          <p:nvPr/>
+        </p:nvSpPr>
+        <p:spPr>
+          <a:xfrm>
+            <a:off x="9180347" y="4169664"/>
+            <a:ext cx="2316404" cy="502920"/>
+          </a:xfrm>
+          <a:prstGeom prst="roundRect">
+            <a:avLst>
+              <a:gd name="adj" fmla="val 10909"/>
+            </a:avLst>
+          </a:prstGeom>
+          <a:solidFill>
+            <a:srgbClr val="ECF4F4"/>
+          </a:solidFill>
+          <a:ln/>
+        </p:spPr>
+      </p:sp>
+      <p:sp>
+        <p:nvSpPr>
+          <p:cNvPr id="16" name="Text 14"/>
+          <p:cNvSpPr txBox="1"/>
+          <p:nvPr/>
+        </p:nvSpPr>
+        <p:spPr>
+          <a:xfrm>
+            <a:off x="9308363" y="4169664"/>
+            <a:ext cx="2060372" cy="502920"/>
+          </a:xfrm>
+          <a:prstGeom prst="rect">
+            <a:avLst/>
+          </a:prstGeom>
+          <a:noFill/>
+          <a:ln/>
+        </p:spPr>
+        <p:txBody>
+          <a:bodyPr wrap="square" lIns="0" tIns="0" rIns="0" bIns="0" rtlCol="0" anchor="ctr"/>
+          <a:lstStyle/>
+          <a:p>
+            <a:pPr rtl="1" algn="r" indent="0" marL="0">
+              <a:lnSpc>
+                <a:spcPts val="1200"/>
+              </a:lnSpc>
+              <a:buNone/>
+            </a:pPr>
+            <a:r>
+              <a:rPr lang="en-US" sz="1000" dirty="0">
+                <a:solidFill>
+                  <a:srgbClr val="16292E"/>
+                </a:solidFill>
+                <a:latin typeface="Arial" pitchFamily="34" charset="0"/>
+                <a:ea typeface="Arial" pitchFamily="34" charset="-122"/>
+                <a:cs typeface="Arial" pitchFamily="34" charset="-120"/>
+              </a:rPr>
+              <a:t>أعطني ملخصًا عن وضع النظام</a:t>
+            </a:r>
+            <a:endParaRPr lang="en-US" sz="1000" dirty="0"/>
+          </a:p>
+        </p:txBody>
+      </p:sp>
+      <p:sp>
+        <p:nvSpPr>
+          <p:cNvPr id="17" name="Text 15"/>
+          <p:cNvSpPr txBox="1"/>
+          <p:nvPr/>
+        </p:nvSpPr>
+        <p:spPr>
+          <a:xfrm>
+            <a:off x="9235211" y="5303520"/>
+            <a:ext cx="2206676" cy="292608"/>
+          </a:xfrm>
+          <a:prstGeom prst="rect">
+            <a:avLst/>
+          </a:prstGeom>
+          <a:noFill/>
+          <a:ln/>
+        </p:spPr>
+        <p:txBody>
+          <a:bodyPr wrap="square" lIns="0" tIns="0" rIns="0" bIns="0" rtlCol="0" anchor="ctr"/>
+          <a:lstStyle/>
+          <a:p>
+            <a:pPr rtl="1" algn="r" indent="0" marL="0">
+              <a:lnSpc>
+                <a:spcPts val="1200"/>
+              </a:lnSpc>
+              <a:buNone/>
+            </a:pPr>
+            <a:r>
+              <a:rPr lang="en-US" sz="950" dirty="0">
+                <a:solidFill>
+                  <a:srgbClr val="5C7378"/>
+                </a:solidFill>
+                <a:latin typeface="Arial" pitchFamily="34" charset="0"/>
+                <a:ea typeface="Arial" pitchFamily="34" charset="-122"/>
+                <a:cs typeface="Arial" pitchFamily="34" charset="-120"/>
+              </a:rPr>
+              <a:t>الأرقام من الجداول، والمؤرشفون خارج الحساب</a:t>
+            </a:r>
+            <a:endParaRPr lang="en-US" sz="950" dirty="0"/>
+          </a:p>
+        </p:txBody>
+      </p:sp>
+      <p:sp>
+        <p:nvSpPr>
+          <p:cNvPr id="18" name="Shape 16"/>
+          <p:cNvSpPr/>
+          <p:nvPr/>
+        </p:nvSpPr>
+        <p:spPr>
+          <a:xfrm>
+            <a:off x="6205576" y="1536192"/>
+            <a:ext cx="2609012" cy="731520"/>
+          </a:xfrm>
+          <a:prstGeom prst="roundRect">
+            <a:avLst>
+              <a:gd name="adj" fmla="val 11250"/>
+            </a:avLst>
+          </a:prstGeom>
+          <a:solidFill>
+            <a:srgbClr val="0A2E36"/>
+          </a:solidFill>
+          <a:ln/>
+        </p:spPr>
+      </p:sp>
+      <p:sp>
+        <p:nvSpPr>
+          <p:cNvPr id="19" name="Shape 17"/>
+          <p:cNvSpPr/>
+          <p:nvPr/>
+        </p:nvSpPr>
+        <p:spPr>
+          <a:xfrm>
+            <a:off x="8339099" y="1792224"/>
+            <a:ext cx="219456" cy="219456"/>
+          </a:xfrm>
+          <a:prstGeom prst="ellipse">
+            <a:avLst/>
+          </a:prstGeom>
+          <a:solidFill>
+            <a:srgbClr val="00A896"/>
+          </a:solidFill>
+          <a:ln/>
+        </p:spPr>
+      </p:sp>
+      <p:sp>
+        <p:nvSpPr>
+          <p:cNvPr id="20" name="Text 18"/>
+          <p:cNvSpPr txBox="1"/>
+          <p:nvPr/>
+        </p:nvSpPr>
+        <p:spPr>
+          <a:xfrm>
+            <a:off x="6406744" y="1627632"/>
+            <a:ext cx="1831772" cy="292608"/>
+          </a:xfrm>
+          <a:prstGeom prst="rect">
+            <a:avLst/>
+          </a:prstGeom>
+          <a:noFill/>
+          <a:ln/>
+        </p:spPr>
+        <p:txBody>
+          <a:bodyPr wrap="square" lIns="0" tIns="0" rIns="0" bIns="0" rtlCol="0" anchor="ctr"/>
+          <a:lstStyle/>
+          <a:p>
+            <a:pPr rtl="1" algn="r" indent="0" marL="0">
+              <a:buNone/>
+            </a:pPr>
+            <a:r>
+              <a:rPr lang="en-US" sz="1300" b="1" dirty="0">
+                <a:solidFill>
+                  <a:srgbClr val="FFFFFF"/>
+                </a:solidFill>
+                <a:latin typeface="Arial" pitchFamily="34" charset="0"/>
+                <a:ea typeface="Arial" pitchFamily="34" charset="-122"/>
+                <a:cs typeface="Arial" pitchFamily="34" charset="-120"/>
+              </a:rPr>
+              <a:t>البحث والسكن</a:t>
+            </a:r>
+            <a:endParaRPr lang="en-US" sz="1300" dirty="0"/>
+          </a:p>
+        </p:txBody>
+      </p:sp>
+      <p:sp>
+        <p:nvSpPr>
+          <p:cNvPr id="21" name="Text 19"/>
+          <p:cNvSpPr txBox="1"/>
+          <p:nvPr/>
+        </p:nvSpPr>
+        <p:spPr>
+          <a:xfrm>
+            <a:off x="6406744" y="1938528"/>
+            <a:ext cx="1831772" cy="256032"/>
+          </a:xfrm>
+          <a:prstGeom prst="rect">
+            <a:avLst/>
+          </a:prstGeom>
+          <a:noFill/>
+          <a:ln/>
+        </p:spPr>
+        <p:txBody>
+          <a:bodyPr wrap="square" lIns="0" tIns="0" rIns="0" bIns="0" rtlCol="0" anchor="ctr"/>
+          <a:lstStyle/>
+          <a:p>
+            <a:pPr rtl="1" algn="r" indent="0" marL="0">
+              <a:buNone/>
+            </a:pPr>
+            <a:r>
+              <a:rPr lang="en-US" sz="1000" dirty="0">
+                <a:solidFill>
+                  <a:srgbClr val="BFD4D7"/>
+                </a:solidFill>
+                <a:latin typeface="Arial" pitchFamily="34" charset="0"/>
+                <a:ea typeface="Arial" pitchFamily="34" charset="-122"/>
+                <a:cs typeface="Arial" pitchFamily="34" charset="-120"/>
+              </a:rPr>
+              <a:t>أربع نوايا</a:t>
+            </a:r>
+            <a:endParaRPr lang="en-US" sz="1000" dirty="0"/>
+          </a:p>
+        </p:txBody>
+      </p:sp>
+      <p:sp>
+        <p:nvSpPr>
+          <p:cNvPr id="22" name="Shape 20"/>
+          <p:cNvSpPr/>
+          <p:nvPr/>
+        </p:nvSpPr>
+        <p:spPr>
+          <a:xfrm>
+            <a:off x="6205576" y="2340864"/>
+            <a:ext cx="2609012" cy="3310128"/>
+          </a:xfrm>
+          <a:prstGeom prst="roundRect">
+            <a:avLst>
+              <a:gd name="adj" fmla="val 3154"/>
             </a:avLst>
           </a:prstGeom>
           <a:solidFill>
@@ -12649,112 +13219,36 @@
       </p:sp>
       <p:sp>
         <p:nvSpPr>
-          <p:cNvPr id="8" name="Shape 5"/>
-          <p:cNvSpPr/>
-          <p:nvPr/>
-        </p:nvSpPr>
-        <p:spPr>
-          <a:xfrm>
-            <a:off x="6778447" y="2212848"/>
-            <a:ext cx="256032" cy="256032"/>
-          </a:xfrm>
-          <a:prstGeom prst="ellipse">
-            <a:avLst/>
-          </a:prstGeom>
-          <a:solidFill>
-            <a:srgbClr val="02717D"/>
-          </a:solidFill>
-          <a:ln/>
-        </p:spPr>
-      </p:sp>
-      <p:sp>
-        <p:nvSpPr>
-          <p:cNvPr id="9" name="Text 6"/>
-          <p:cNvSpPr txBox="1"/>
-          <p:nvPr/>
-        </p:nvSpPr>
-        <p:spPr>
-          <a:xfrm>
-            <a:off x="6778447" y="2212848"/>
-            <a:ext cx="256032" cy="256032"/>
-          </a:xfrm>
-          <a:prstGeom prst="rect">
-            <a:avLst/>
-          </a:prstGeom>
-          <a:noFill/>
-          <a:ln/>
-        </p:spPr>
-        <p:txBody>
-          <a:bodyPr wrap="square" lIns="0" tIns="0" rIns="0" bIns="0" rtlCol="0" anchor="ctr"/>
-          <a:lstStyle/>
-          <a:p>
-            <a:pPr rtl="1" algn="ctr" indent="0" marL="0">
-              <a:buNone/>
-            </a:pPr>
-            <a:r>
-              <a:rPr lang="en-US" sz="1100" b="1" dirty="0">
-                <a:solidFill>
-                  <a:srgbClr val="FFFFFF"/>
-                </a:solidFill>
-                <a:latin typeface="Arial" pitchFamily="34" charset="0"/>
-                <a:ea typeface="Arial" pitchFamily="34" charset="-122"/>
-                <a:cs typeface="Arial" pitchFamily="34" charset="-120"/>
-              </a:rPr>
-              <a:t>1</a:t>
-            </a:r>
-            <a:endParaRPr lang="en-US" sz="1100" dirty="0"/>
-          </a:p>
-        </p:txBody>
-      </p:sp>
-      <p:sp>
-        <p:nvSpPr>
-          <p:cNvPr id="10" name="Text 7"/>
-          <p:cNvSpPr txBox="1"/>
-          <p:nvPr/>
-        </p:nvSpPr>
-        <p:spPr>
-          <a:xfrm>
-            <a:off x="749808" y="2194560"/>
-            <a:ext cx="5928055" cy="256032"/>
-          </a:xfrm>
-          <a:prstGeom prst="rect">
-            <a:avLst/>
-          </a:prstGeom>
-          <a:noFill/>
-          <a:ln/>
-        </p:spPr>
-        <p:txBody>
-          <a:bodyPr wrap="square" lIns="0" tIns="0" rIns="0" bIns="0" rtlCol="0" anchor="ctr"/>
-          <a:lstStyle/>
-          <a:p>
-            <a:pPr rtl="1" algn="r" indent="0" marL="0">
-              <a:buNone/>
-            </a:pPr>
-            <a:r>
-              <a:rPr lang="en-US" sz="1300" b="1" dirty="0">
-                <a:solidFill>
-                  <a:srgbClr val="16292E"/>
-                </a:solidFill>
-                <a:latin typeface="Arial" pitchFamily="34" charset="0"/>
-                <a:ea typeface="Arial" pitchFamily="34" charset="-122"/>
-                <a:cs typeface="Arial" pitchFamily="34" charset="-120"/>
-              </a:rPr>
-              <a:t>السؤال كما كُتب</a:t>
-            </a:r>
-            <a:endParaRPr lang="en-US" sz="1300" dirty="0"/>
-          </a:p>
-        </p:txBody>
-      </p:sp>
-      <p:sp>
-        <p:nvSpPr>
-          <p:cNvPr id="11" name="Text 8"/>
-          <p:cNvSpPr txBox="1"/>
-          <p:nvPr/>
-        </p:nvSpPr>
-        <p:spPr>
-          <a:xfrm>
-            <a:off x="749808" y="2468880"/>
-            <a:ext cx="6302959" cy="402336"/>
+          <p:cNvPr id="23" name="Shape 21"/>
+          <p:cNvSpPr/>
+          <p:nvPr/>
+        </p:nvSpPr>
+        <p:spPr>
+          <a:xfrm>
+            <a:off x="6351880" y="2468880"/>
+            <a:ext cx="2316404" cy="502920"/>
+          </a:xfrm>
+          <a:prstGeom prst="roundRect">
+            <a:avLst>
+              <a:gd name="adj" fmla="val 10909"/>
+            </a:avLst>
+          </a:prstGeom>
+          <a:solidFill>
+            <a:srgbClr val="FDF3E3"/>
+          </a:solidFill>
+          <a:ln/>
+        </p:spPr>
+      </p:sp>
+      <p:sp>
+        <p:nvSpPr>
+          <p:cNvPr id="24" name="Text 22"/>
+          <p:cNvSpPr txBox="1"/>
+          <p:nvPr/>
+        </p:nvSpPr>
+        <p:spPr>
+          <a:xfrm>
+            <a:off x="6479896" y="2468880"/>
+            <a:ext cx="2060372" cy="502920"/>
           </a:xfrm>
           <a:prstGeom prst="rect">
             <a:avLst/>
@@ -12768,39 +13262,393 @@
           <a:p>
             <a:pPr rtl="1" algn="r" indent="0" marL="0">
               <a:lnSpc>
-                <a:spcPts val="1400"/>
+                <a:spcPts val="1200"/>
               </a:lnSpc>
               <a:buNone/>
             </a:pPr>
             <a:r>
-              <a:rPr lang="en-US" sz="1050" dirty="0">
-                <a:solidFill>
-                  <a:srgbClr val="5C7378"/>
-                </a:solidFill>
-                <a:latin typeface="Arial" pitchFamily="34" charset="0"/>
-                <a:ea typeface="Arial" pitchFamily="34" charset="-122"/>
-                <a:cs typeface="Arial" pitchFamily="34" charset="-120"/>
-              </a:rPr>
-              <a:t>«كم عدد السكان في مخيم السلام؟»: جملة عادية، لا صيغة ولا أمر</a:t>
-            </a:r>
-            <a:endParaRPr lang="en-US" sz="1050" dirty="0"/>
-          </a:p>
-        </p:txBody>
-      </p:sp>
-      <p:sp>
-        <p:nvSpPr>
-          <p:cNvPr id="12" name="Shape 9"/>
-          <p:cNvSpPr/>
-          <p:nvPr/>
-        </p:nvSpPr>
-        <p:spPr>
-          <a:xfrm>
-            <a:off x="548640" y="3044952"/>
-            <a:ext cx="6705295" cy="841248"/>
+              <a:rPr lang="en-US" sz="1000" dirty="0">
+                <a:solidFill>
+                  <a:srgbClr val="16292E"/>
+                </a:solidFill>
+                <a:latin typeface="Arial" pitchFamily="34" charset="0"/>
+                <a:ea typeface="Arial" pitchFamily="34" charset="-122"/>
+                <a:cs typeface="Arial" pitchFamily="34" charset="-120"/>
+              </a:rPr>
+              <a:t>أين يسكن أحمد الحسن؟</a:t>
+            </a:r>
+            <a:endParaRPr lang="en-US" sz="1000" dirty="0"/>
+          </a:p>
+        </p:txBody>
+      </p:sp>
+      <p:sp>
+        <p:nvSpPr>
+          <p:cNvPr id="25" name="Shape 23"/>
+          <p:cNvSpPr/>
+          <p:nvPr/>
+        </p:nvSpPr>
+        <p:spPr>
+          <a:xfrm>
+            <a:off x="6351880" y="3035808"/>
+            <a:ext cx="2316404" cy="502920"/>
           </a:xfrm>
           <a:prstGeom prst="roundRect">
             <a:avLst>
-              <a:gd name="adj" fmla="val 9783"/>
+              <a:gd name="adj" fmla="val 10909"/>
+            </a:avLst>
+          </a:prstGeom>
+          <a:solidFill>
+            <a:srgbClr val="ECF4F4"/>
+          </a:solidFill>
+          <a:ln/>
+        </p:spPr>
+      </p:sp>
+      <p:sp>
+        <p:nvSpPr>
+          <p:cNvPr id="26" name="Text 24"/>
+          <p:cNvSpPr txBox="1"/>
+          <p:nvPr/>
+        </p:nvSpPr>
+        <p:spPr>
+          <a:xfrm>
+            <a:off x="6479896" y="3035808"/>
+            <a:ext cx="2060372" cy="502920"/>
+          </a:xfrm>
+          <a:prstGeom prst="rect">
+            <a:avLst/>
+          </a:prstGeom>
+          <a:noFill/>
+          <a:ln/>
+        </p:spPr>
+        <p:txBody>
+          <a:bodyPr wrap="square" lIns="0" tIns="0" rIns="0" bIns="0" rtlCol="0" anchor="ctr"/>
+          <a:lstStyle/>
+          <a:p>
+            <a:pPr rtl="1" algn="r" indent="0" marL="0">
+              <a:lnSpc>
+                <a:spcPts val="1200"/>
+              </a:lnSpc>
+              <a:buNone/>
+            </a:pPr>
+            <a:r>
+              <a:rPr lang="en-US" sz="1000" dirty="0">
+                <a:solidFill>
+                  <a:srgbClr val="16292E"/>
+                </a:solidFill>
+                <a:latin typeface="Arial" pitchFamily="34" charset="0"/>
+                <a:ea typeface="Arial" pitchFamily="34" charset="-122"/>
+                <a:cs typeface="Arial" pitchFamily="34" charset="-120"/>
+              </a:rPr>
+              <a:t>من يسكن في الخيمة ⁦A-01⁩؟</a:t>
+            </a:r>
+            <a:endParaRPr lang="en-US" sz="1000" dirty="0"/>
+          </a:p>
+        </p:txBody>
+      </p:sp>
+      <p:sp>
+        <p:nvSpPr>
+          <p:cNvPr id="27" name="Shape 25"/>
+          <p:cNvSpPr/>
+          <p:nvPr/>
+        </p:nvSpPr>
+        <p:spPr>
+          <a:xfrm>
+            <a:off x="6351880" y="3602736"/>
+            <a:ext cx="2316404" cy="502920"/>
+          </a:xfrm>
+          <a:prstGeom prst="roundRect">
+            <a:avLst>
+              <a:gd name="adj" fmla="val 10909"/>
+            </a:avLst>
+          </a:prstGeom>
+          <a:solidFill>
+            <a:srgbClr val="FDF3E3"/>
+          </a:solidFill>
+          <a:ln/>
+        </p:spPr>
+      </p:sp>
+      <p:sp>
+        <p:nvSpPr>
+          <p:cNvPr id="28" name="Text 26"/>
+          <p:cNvSpPr txBox="1"/>
+          <p:nvPr/>
+        </p:nvSpPr>
+        <p:spPr>
+          <a:xfrm>
+            <a:off x="6479896" y="3602736"/>
+            <a:ext cx="2060372" cy="502920"/>
+          </a:xfrm>
+          <a:prstGeom prst="rect">
+            <a:avLst/>
+          </a:prstGeom>
+          <a:noFill/>
+          <a:ln/>
+        </p:spPr>
+        <p:txBody>
+          <a:bodyPr wrap="square" lIns="0" tIns="0" rIns="0" bIns="0" rtlCol="0" anchor="ctr"/>
+          <a:lstStyle/>
+          <a:p>
+            <a:pPr rtl="1" algn="r" indent="0" marL="0">
+              <a:lnSpc>
+                <a:spcPts val="1200"/>
+              </a:lnSpc>
+              <a:buNone/>
+            </a:pPr>
+            <a:r>
+              <a:rPr lang="en-US" sz="1000" dirty="0">
+                <a:solidFill>
+                  <a:srgbClr val="16292E"/>
+                </a:solidFill>
+                <a:latin typeface="Arial" pitchFamily="34" charset="0"/>
+                <a:ea typeface="Arial" pitchFamily="34" charset="-122"/>
+                <a:cs typeface="Arial" pitchFamily="34" charset="-120"/>
+              </a:rPr>
+              <a:t>ما حالة الوحدة ⁦A-01⁩؟</a:t>
+            </a:r>
+            <a:endParaRPr lang="en-US" sz="1000" dirty="0"/>
+          </a:p>
+        </p:txBody>
+      </p:sp>
+      <p:sp>
+        <p:nvSpPr>
+          <p:cNvPr id="29" name="Shape 27"/>
+          <p:cNvSpPr/>
+          <p:nvPr/>
+        </p:nvSpPr>
+        <p:spPr>
+          <a:xfrm>
+            <a:off x="6351880" y="4169664"/>
+            <a:ext cx="2316404" cy="502920"/>
+          </a:xfrm>
+          <a:prstGeom prst="roundRect">
+            <a:avLst>
+              <a:gd name="adj" fmla="val 10909"/>
+            </a:avLst>
+          </a:prstGeom>
+          <a:solidFill>
+            <a:srgbClr val="ECF4F4"/>
+          </a:solidFill>
+          <a:ln/>
+        </p:spPr>
+      </p:sp>
+      <p:sp>
+        <p:nvSpPr>
+          <p:cNvPr id="30" name="Text 28"/>
+          <p:cNvSpPr txBox="1"/>
+          <p:nvPr/>
+        </p:nvSpPr>
+        <p:spPr>
+          <a:xfrm>
+            <a:off x="6479896" y="4169664"/>
+            <a:ext cx="2060372" cy="502920"/>
+          </a:xfrm>
+          <a:prstGeom prst="rect">
+            <a:avLst/>
+          </a:prstGeom>
+          <a:noFill/>
+          <a:ln/>
+        </p:spPr>
+        <p:txBody>
+          <a:bodyPr wrap="square" lIns="0" tIns="0" rIns="0" bIns="0" rtlCol="0" anchor="ctr"/>
+          <a:lstStyle/>
+          <a:p>
+            <a:pPr rtl="1" algn="r" indent="0" marL="0">
+              <a:lnSpc>
+                <a:spcPts val="1200"/>
+              </a:lnSpc>
+              <a:buNone/>
+            </a:pPr>
+            <a:r>
+              <a:rPr lang="en-US" sz="1000" dirty="0">
+                <a:solidFill>
+                  <a:srgbClr val="16292E"/>
+                </a:solidFill>
+                <a:latin typeface="Arial" pitchFamily="34" charset="0"/>
+                <a:ea typeface="Arial" pitchFamily="34" charset="-122"/>
+                <a:cs typeface="Arial" pitchFamily="34" charset="-120"/>
+              </a:rPr>
+              <a:t>أفراد أسرة ⁦HH-0012⁩</a:t>
+            </a:r>
+            <a:endParaRPr lang="en-US" sz="1000" dirty="0"/>
+          </a:p>
+        </p:txBody>
+      </p:sp>
+      <p:sp>
+        <p:nvSpPr>
+          <p:cNvPr id="31" name="Text 29"/>
+          <p:cNvSpPr txBox="1"/>
+          <p:nvPr/>
+        </p:nvSpPr>
+        <p:spPr>
+          <a:xfrm>
+            <a:off x="6406744" y="5303520"/>
+            <a:ext cx="2206676" cy="292608"/>
+          </a:xfrm>
+          <a:prstGeom prst="rect">
+            <a:avLst/>
+          </a:prstGeom>
+          <a:noFill/>
+          <a:ln/>
+        </p:spPr>
+        <p:txBody>
+          <a:bodyPr wrap="square" lIns="0" tIns="0" rIns="0" bIns="0" rtlCol="0" anchor="ctr"/>
+          <a:lstStyle/>
+          <a:p>
+            <a:pPr rtl="1" algn="r" indent="0" marL="0">
+              <a:lnSpc>
+                <a:spcPts val="1200"/>
+              </a:lnSpc>
+              <a:buNone/>
+            </a:pPr>
+            <a:r>
+              <a:rPr lang="en-US" sz="950" dirty="0">
+                <a:solidFill>
+                  <a:srgbClr val="5C7378"/>
+                </a:solidFill>
+                <a:latin typeface="Arial" pitchFamily="34" charset="0"/>
+                <a:ea typeface="Arial" pitchFamily="34" charset="-122"/>
+                <a:cs typeface="Arial" pitchFamily="34" charset="-120"/>
+              </a:rPr>
+              <a:t>الاسم أو رقم الوثيقة أو رمز الوحدة، كلها مداخل صالحة</a:t>
+            </a:r>
+            <a:endParaRPr lang="en-US" sz="950" dirty="0"/>
+          </a:p>
+        </p:txBody>
+      </p:sp>
+      <p:sp>
+        <p:nvSpPr>
+          <p:cNvPr id="32" name="Shape 30"/>
+          <p:cNvSpPr/>
+          <p:nvPr/>
+        </p:nvSpPr>
+        <p:spPr>
+          <a:xfrm>
+            <a:off x="3377108" y="1536192"/>
+            <a:ext cx="2609012" cy="731520"/>
+          </a:xfrm>
+          <a:prstGeom prst="roundRect">
+            <a:avLst>
+              <a:gd name="adj" fmla="val 11250"/>
+            </a:avLst>
+          </a:prstGeom>
+          <a:solidFill>
+            <a:srgbClr val="0A2E36"/>
+          </a:solidFill>
+          <a:ln/>
+        </p:spPr>
+      </p:sp>
+      <p:sp>
+        <p:nvSpPr>
+          <p:cNvPr id="33" name="Shape 31"/>
+          <p:cNvSpPr/>
+          <p:nvPr/>
+        </p:nvSpPr>
+        <p:spPr>
+          <a:xfrm>
+            <a:off x="5510632" y="1792224"/>
+            <a:ext cx="219456" cy="219456"/>
+          </a:xfrm>
+          <a:prstGeom prst="ellipse">
+            <a:avLst/>
+          </a:prstGeom>
+          <a:solidFill>
+            <a:srgbClr val="E9A13B"/>
+          </a:solidFill>
+          <a:ln/>
+        </p:spPr>
+      </p:sp>
+      <p:sp>
+        <p:nvSpPr>
+          <p:cNvPr id="34" name="Text 32"/>
+          <p:cNvSpPr txBox="1"/>
+          <p:nvPr/>
+        </p:nvSpPr>
+        <p:spPr>
+          <a:xfrm>
+            <a:off x="3578276" y="1627632"/>
+            <a:ext cx="1831772" cy="292608"/>
+          </a:xfrm>
+          <a:prstGeom prst="rect">
+            <a:avLst/>
+          </a:prstGeom>
+          <a:noFill/>
+          <a:ln/>
+        </p:spPr>
+        <p:txBody>
+          <a:bodyPr wrap="square" lIns="0" tIns="0" rIns="0" bIns="0" rtlCol="0" anchor="ctr"/>
+          <a:lstStyle/>
+          <a:p>
+            <a:pPr rtl="1" algn="r" indent="0" marL="0">
+              <a:buNone/>
+            </a:pPr>
+            <a:r>
+              <a:rPr lang="en-US" sz="1300" b="1" dirty="0">
+                <a:solidFill>
+                  <a:srgbClr val="FFFFFF"/>
+                </a:solidFill>
+                <a:latin typeface="Arial" pitchFamily="34" charset="0"/>
+                <a:ea typeface="Arial" pitchFamily="34" charset="-122"/>
+                <a:cs typeface="Arial" pitchFamily="34" charset="-120"/>
+              </a:rPr>
+              <a:t>الأمن والحركة</a:t>
+            </a:r>
+            <a:endParaRPr lang="en-US" sz="1300" dirty="0"/>
+          </a:p>
+        </p:txBody>
+      </p:sp>
+      <p:sp>
+        <p:nvSpPr>
+          <p:cNvPr id="35" name="Text 33"/>
+          <p:cNvSpPr txBox="1"/>
+          <p:nvPr/>
+        </p:nvSpPr>
+        <p:spPr>
+          <a:xfrm>
+            <a:off x="3578276" y="1938528"/>
+            <a:ext cx="1831772" cy="256032"/>
+          </a:xfrm>
+          <a:prstGeom prst="rect">
+            <a:avLst/>
+          </a:prstGeom>
+          <a:noFill/>
+          <a:ln/>
+        </p:spPr>
+        <p:txBody>
+          <a:bodyPr wrap="square" lIns="0" tIns="0" rIns="0" bIns="0" rtlCol="0" anchor="ctr"/>
+          <a:lstStyle/>
+          <a:p>
+            <a:pPr rtl="1" algn="r" indent="0" marL="0">
+              <a:buNone/>
+            </a:pPr>
+            <a:r>
+              <a:rPr lang="en-US" sz="1000" dirty="0">
+                <a:solidFill>
+                  <a:srgbClr val="BFD4D7"/>
+                </a:solidFill>
+                <a:latin typeface="Arial" pitchFamily="34" charset="0"/>
+                <a:ea typeface="Arial" pitchFamily="34" charset="-122"/>
+                <a:cs typeface="Arial" pitchFamily="34" charset="-120"/>
+              </a:rPr>
+              <a:t>ثلاث نوايا</a:t>
+            </a:r>
+            <a:endParaRPr lang="en-US" sz="1000" dirty="0"/>
+          </a:p>
+        </p:txBody>
+      </p:sp>
+      <p:sp>
+        <p:nvSpPr>
+          <p:cNvPr id="36" name="Shape 34"/>
+          <p:cNvSpPr/>
+          <p:nvPr/>
+        </p:nvSpPr>
+        <p:spPr>
+          <a:xfrm>
+            <a:off x="3377108" y="2340864"/>
+            <a:ext cx="2609012" cy="3310128"/>
+          </a:xfrm>
+          <a:prstGeom prst="roundRect">
+            <a:avLst>
+              <a:gd name="adj" fmla="val 3154"/>
             </a:avLst>
           </a:prstGeom>
           <a:solidFill>
@@ -12818,112 +13666,36 @@
       </p:sp>
       <p:sp>
         <p:nvSpPr>
-          <p:cNvPr id="13" name="Shape 10"/>
-          <p:cNvSpPr/>
-          <p:nvPr/>
-        </p:nvSpPr>
-        <p:spPr>
-          <a:xfrm>
-            <a:off x="6778447" y="3172968"/>
-            <a:ext cx="256032" cy="256032"/>
-          </a:xfrm>
-          <a:prstGeom prst="ellipse">
-            <a:avLst/>
-          </a:prstGeom>
-          <a:solidFill>
-            <a:srgbClr val="E9A13B"/>
-          </a:solidFill>
-          <a:ln/>
-        </p:spPr>
-      </p:sp>
-      <p:sp>
-        <p:nvSpPr>
-          <p:cNvPr id="14" name="Text 11"/>
-          <p:cNvSpPr txBox="1"/>
-          <p:nvPr/>
-        </p:nvSpPr>
-        <p:spPr>
-          <a:xfrm>
-            <a:off x="6778447" y="3172968"/>
-            <a:ext cx="256032" cy="256032"/>
-          </a:xfrm>
-          <a:prstGeom prst="rect">
-            <a:avLst/>
-          </a:prstGeom>
-          <a:noFill/>
-          <a:ln/>
-        </p:spPr>
-        <p:txBody>
-          <a:bodyPr wrap="square" lIns="0" tIns="0" rIns="0" bIns="0" rtlCol="0" anchor="ctr"/>
-          <a:lstStyle/>
-          <a:p>
-            <a:pPr rtl="1" algn="ctr" indent="0" marL="0">
-              <a:buNone/>
-            </a:pPr>
-            <a:r>
-              <a:rPr lang="en-US" sz="1100" b="1" dirty="0">
-                <a:solidFill>
-                  <a:srgbClr val="FFFFFF"/>
-                </a:solidFill>
-                <a:latin typeface="Arial" pitchFamily="34" charset="0"/>
-                <a:ea typeface="Arial" pitchFamily="34" charset="-122"/>
-                <a:cs typeface="Arial" pitchFamily="34" charset="-120"/>
-              </a:rPr>
-              <a:t>2</a:t>
-            </a:r>
-            <a:endParaRPr lang="en-US" sz="1100" dirty="0"/>
-          </a:p>
-        </p:txBody>
-      </p:sp>
-      <p:sp>
-        <p:nvSpPr>
-          <p:cNvPr id="15" name="Text 12"/>
-          <p:cNvSpPr txBox="1"/>
-          <p:nvPr/>
-        </p:nvSpPr>
-        <p:spPr>
-          <a:xfrm>
-            <a:off x="749808" y="3154680"/>
-            <a:ext cx="5928055" cy="256032"/>
-          </a:xfrm>
-          <a:prstGeom prst="rect">
-            <a:avLst/>
-          </a:prstGeom>
-          <a:noFill/>
-          <a:ln/>
-        </p:spPr>
-        <p:txBody>
-          <a:bodyPr wrap="square" lIns="0" tIns="0" rIns="0" bIns="0" rtlCol="0" anchor="ctr"/>
-          <a:lstStyle/>
-          <a:p>
-            <a:pPr rtl="1" algn="r" indent="0" marL="0">
-              <a:buNone/>
-            </a:pPr>
-            <a:r>
-              <a:rPr lang="en-US" sz="1300" b="1" dirty="0">
-                <a:solidFill>
-                  <a:srgbClr val="16292E"/>
-                </a:solidFill>
-                <a:latin typeface="Arial" pitchFamily="34" charset="0"/>
-                <a:ea typeface="Arial" pitchFamily="34" charset="-122"/>
-                <a:cs typeface="Arial" pitchFamily="34" charset="-120"/>
-              </a:rPr>
-              <a:t>الإجابة جملة أولًا</a:t>
-            </a:r>
-            <a:endParaRPr lang="en-US" sz="1300" dirty="0"/>
-          </a:p>
-        </p:txBody>
-      </p:sp>
-      <p:sp>
-        <p:nvSpPr>
-          <p:cNvPr id="16" name="Text 13"/>
-          <p:cNvSpPr txBox="1"/>
-          <p:nvPr/>
-        </p:nvSpPr>
-        <p:spPr>
-          <a:xfrm>
-            <a:off x="749808" y="3429000"/>
-            <a:ext cx="6302959" cy="402336"/>
+          <p:cNvPr id="37" name="Shape 35"/>
+          <p:cNvSpPr/>
+          <p:nvPr/>
+        </p:nvSpPr>
+        <p:spPr>
+          <a:xfrm>
+            <a:off x="3523412" y="2468880"/>
+            <a:ext cx="2316404" cy="502920"/>
+          </a:xfrm>
+          <a:prstGeom prst="roundRect">
+            <a:avLst>
+              <a:gd name="adj" fmla="val 10909"/>
+            </a:avLst>
+          </a:prstGeom>
+          <a:solidFill>
+            <a:srgbClr val="FDF3E3"/>
+          </a:solidFill>
+          <a:ln/>
+        </p:spPr>
+      </p:sp>
+      <p:sp>
+        <p:nvSpPr>
+          <p:cNvPr id="38" name="Text 36"/>
+          <p:cNvSpPr txBox="1"/>
+          <p:nvPr/>
+        </p:nvSpPr>
+        <p:spPr>
+          <a:xfrm>
+            <a:off x="3651428" y="2468880"/>
+            <a:ext cx="2060372" cy="502920"/>
           </a:xfrm>
           <a:prstGeom prst="rect">
             <a:avLst/>
@@ -12937,39 +13709,329 @@
           <a:p>
             <a:pPr rtl="1" algn="r" indent="0" marL="0">
               <a:lnSpc>
-                <a:spcPts val="1400"/>
+                <a:spcPts val="1200"/>
               </a:lnSpc>
               <a:buNone/>
             </a:pPr>
             <a:r>
-              <a:rPr lang="en-US" sz="1050" dirty="0">
-                <a:solidFill>
-                  <a:srgbClr val="5C7378"/>
-                </a:solidFill>
-                <a:latin typeface="Arial" pitchFamily="34" charset="0"/>
-                <a:ea typeface="Arial" pitchFamily="34" charset="-122"/>
-                <a:cs typeface="Arial" pitchFamily="34" charset="-120"/>
-              </a:rPr>
-              <a:t>«عدد السكان الفعّالين في مخيم السلام هو 199 شخصًا»: رقم من الجدول لا تقدير</a:t>
-            </a:r>
-            <a:endParaRPr lang="en-US" sz="1050" dirty="0"/>
-          </a:p>
-        </p:txBody>
-      </p:sp>
-      <p:sp>
-        <p:nvSpPr>
-          <p:cNvPr id="17" name="Shape 14"/>
-          <p:cNvSpPr/>
-          <p:nvPr/>
-        </p:nvSpPr>
-        <p:spPr>
-          <a:xfrm>
-            <a:off x="548640" y="4005072"/>
-            <a:ext cx="6705295" cy="841248"/>
+              <a:rPr lang="en-US" sz="1000" dirty="0">
+                <a:solidFill>
+                  <a:srgbClr val="16292E"/>
+                </a:solidFill>
+                <a:latin typeface="Arial" pitchFamily="34" charset="0"/>
+                <a:ea typeface="Arial" pitchFamily="34" charset="-122"/>
+                <a:cs typeface="Arial" pitchFamily="34" charset="-120"/>
+              </a:rPr>
+              <a:t>هل أحمد الحسن داخل المخيم؟</a:t>
+            </a:r>
+            <a:endParaRPr lang="en-US" sz="1000" dirty="0"/>
+          </a:p>
+        </p:txBody>
+      </p:sp>
+      <p:sp>
+        <p:nvSpPr>
+          <p:cNvPr id="39" name="Shape 37"/>
+          <p:cNvSpPr/>
+          <p:nvPr/>
+        </p:nvSpPr>
+        <p:spPr>
+          <a:xfrm>
+            <a:off x="3523412" y="3035808"/>
+            <a:ext cx="2316404" cy="502920"/>
           </a:xfrm>
           <a:prstGeom prst="roundRect">
             <a:avLst>
-              <a:gd name="adj" fmla="val 9783"/>
+              <a:gd name="adj" fmla="val 10909"/>
+            </a:avLst>
+          </a:prstGeom>
+          <a:solidFill>
+            <a:srgbClr val="ECF4F4"/>
+          </a:solidFill>
+          <a:ln/>
+        </p:spPr>
+      </p:sp>
+      <p:sp>
+        <p:nvSpPr>
+          <p:cNvPr id="40" name="Text 38"/>
+          <p:cNvSpPr txBox="1"/>
+          <p:nvPr/>
+        </p:nvSpPr>
+        <p:spPr>
+          <a:xfrm>
+            <a:off x="3651428" y="3035808"/>
+            <a:ext cx="2060372" cy="502920"/>
+          </a:xfrm>
+          <a:prstGeom prst="rect">
+            <a:avLst/>
+          </a:prstGeom>
+          <a:noFill/>
+          <a:ln/>
+        </p:spPr>
+        <p:txBody>
+          <a:bodyPr wrap="square" lIns="0" tIns="0" rIns="0" bIns="0" rtlCol="0" anchor="ctr"/>
+          <a:lstStyle/>
+          <a:p>
+            <a:pPr rtl="1" algn="r" indent="0" marL="0">
+              <a:lnSpc>
+                <a:spcPts val="1200"/>
+              </a:lnSpc>
+              <a:buNone/>
+            </a:pPr>
+            <a:r>
+              <a:rPr lang="en-US" sz="1000" dirty="0">
+                <a:solidFill>
+                  <a:srgbClr val="16292E"/>
+                </a:solidFill>
+                <a:latin typeface="Arial" pitchFamily="34" charset="0"/>
+                <a:ea typeface="Arial" pitchFamily="34" charset="-122"/>
+                <a:cs typeface="Arial" pitchFamily="34" charset="-120"/>
+              </a:rPr>
+              <a:t>متى كانت آخر حركة لأحمد الحسن؟</a:t>
+            </a:r>
+            <a:endParaRPr lang="en-US" sz="1000" dirty="0"/>
+          </a:p>
+        </p:txBody>
+      </p:sp>
+      <p:sp>
+        <p:nvSpPr>
+          <p:cNvPr id="41" name="Shape 39"/>
+          <p:cNvSpPr/>
+          <p:nvPr/>
+        </p:nvSpPr>
+        <p:spPr>
+          <a:xfrm>
+            <a:off x="3523412" y="3602736"/>
+            <a:ext cx="2316404" cy="502920"/>
+          </a:xfrm>
+          <a:prstGeom prst="roundRect">
+            <a:avLst>
+              <a:gd name="adj" fmla="val 10909"/>
+            </a:avLst>
+          </a:prstGeom>
+          <a:solidFill>
+            <a:srgbClr val="FDF3E3"/>
+          </a:solidFill>
+          <a:ln/>
+        </p:spPr>
+      </p:sp>
+      <p:sp>
+        <p:nvSpPr>
+          <p:cNvPr id="42" name="Text 40"/>
+          <p:cNvSpPr txBox="1"/>
+          <p:nvPr/>
+        </p:nvSpPr>
+        <p:spPr>
+          <a:xfrm>
+            <a:off x="3651428" y="3602736"/>
+            <a:ext cx="2060372" cy="502920"/>
+          </a:xfrm>
+          <a:prstGeom prst="rect">
+            <a:avLst/>
+          </a:prstGeom>
+          <a:noFill/>
+          <a:ln/>
+        </p:spPr>
+        <p:txBody>
+          <a:bodyPr wrap="square" lIns="0" tIns="0" rIns="0" bIns="0" rtlCol="0" anchor="ctr"/>
+          <a:lstStyle/>
+          <a:p>
+            <a:pPr rtl="1" algn="r" indent="0" marL="0">
+              <a:lnSpc>
+                <a:spcPts val="1200"/>
+              </a:lnSpc>
+              <a:buNone/>
+            </a:pPr>
+            <a:r>
+              <a:rPr lang="en-US" sz="1000" dirty="0">
+                <a:solidFill>
+                  <a:srgbClr val="16292E"/>
+                </a:solidFill>
+                <a:latin typeface="Arial" pitchFamily="34" charset="0"/>
+                <a:ea typeface="Arial" pitchFamily="34" charset="-122"/>
+                <a:cs typeface="Arial" pitchFamily="34" charset="-120"/>
+              </a:rPr>
+              <a:t>كم حركة عبر البوابة الرئيسية اليوم؟</a:t>
+            </a:r>
+            <a:endParaRPr lang="en-US" sz="1000" dirty="0"/>
+          </a:p>
+        </p:txBody>
+      </p:sp>
+      <p:sp>
+        <p:nvSpPr>
+          <p:cNvPr id="43" name="Text 41"/>
+          <p:cNvSpPr txBox="1"/>
+          <p:nvPr/>
+        </p:nvSpPr>
+        <p:spPr>
+          <a:xfrm>
+            <a:off x="3578276" y="5303520"/>
+            <a:ext cx="2206676" cy="292608"/>
+          </a:xfrm>
+          <a:prstGeom prst="rect">
+            <a:avLst/>
+          </a:prstGeom>
+          <a:noFill/>
+          <a:ln/>
+        </p:spPr>
+        <p:txBody>
+          <a:bodyPr wrap="square" lIns="0" tIns="0" rIns="0" bIns="0" rtlCol="0" anchor="ctr"/>
+          <a:lstStyle/>
+          <a:p>
+            <a:pPr rtl="1" algn="r" indent="0" marL="0">
+              <a:lnSpc>
+                <a:spcPts val="1200"/>
+              </a:lnSpc>
+              <a:buNone/>
+            </a:pPr>
+            <a:r>
+              <a:rPr lang="en-US" sz="950" dirty="0">
+                <a:solidFill>
+                  <a:srgbClr val="5C7378"/>
+                </a:solidFill>
+                <a:latin typeface="Arial" pitchFamily="34" charset="0"/>
+                <a:ea typeface="Arial" pitchFamily="34" charset="-122"/>
+                <a:cs typeface="Arial" pitchFamily="34" charset="-120"/>
+              </a:rPr>
+              <a:t>مقصورة على الأدوار الأمنية، والباقي يُمنع بأدب</a:t>
+            </a:r>
+            <a:endParaRPr lang="en-US" sz="950" dirty="0"/>
+          </a:p>
+        </p:txBody>
+      </p:sp>
+      <p:sp>
+        <p:nvSpPr>
+          <p:cNvPr id="44" name="Shape 42"/>
+          <p:cNvSpPr/>
+          <p:nvPr/>
+        </p:nvSpPr>
+        <p:spPr>
+          <a:xfrm>
+            <a:off x="548640" y="1536192"/>
+            <a:ext cx="2609012" cy="731520"/>
+          </a:xfrm>
+          <a:prstGeom prst="roundRect">
+            <a:avLst>
+              <a:gd name="adj" fmla="val 11250"/>
+            </a:avLst>
+          </a:prstGeom>
+          <a:solidFill>
+            <a:srgbClr val="0A2E36"/>
+          </a:solidFill>
+          <a:ln/>
+        </p:spPr>
+      </p:sp>
+      <p:sp>
+        <p:nvSpPr>
+          <p:cNvPr id="45" name="Shape 43"/>
+          <p:cNvSpPr/>
+          <p:nvPr/>
+        </p:nvSpPr>
+        <p:spPr>
+          <a:xfrm>
+            <a:off x="2682164" y="1792224"/>
+            <a:ext cx="219456" cy="219456"/>
+          </a:xfrm>
+          <a:prstGeom prst="ellipse">
+            <a:avLst/>
+          </a:prstGeom>
+          <a:solidFill>
+            <a:srgbClr val="02717D"/>
+          </a:solidFill>
+          <a:ln/>
+        </p:spPr>
+      </p:sp>
+      <p:sp>
+        <p:nvSpPr>
+          <p:cNvPr id="46" name="Text 44"/>
+          <p:cNvSpPr txBox="1"/>
+          <p:nvPr/>
+        </p:nvSpPr>
+        <p:spPr>
+          <a:xfrm>
+            <a:off x="749808" y="1627632"/>
+            <a:ext cx="1831772" cy="292608"/>
+          </a:xfrm>
+          <a:prstGeom prst="rect">
+            <a:avLst/>
+          </a:prstGeom>
+          <a:noFill/>
+          <a:ln/>
+        </p:spPr>
+        <p:txBody>
+          <a:bodyPr wrap="square" lIns="0" tIns="0" rIns="0" bIns="0" rtlCol="0" anchor="ctr"/>
+          <a:lstStyle/>
+          <a:p>
+            <a:pPr rtl="1" algn="r" indent="0" marL="0">
+              <a:buNone/>
+            </a:pPr>
+            <a:r>
+              <a:rPr lang="en-US" sz="1300" b="1" dirty="0">
+                <a:solidFill>
+                  <a:srgbClr val="FFFFFF"/>
+                </a:solidFill>
+                <a:latin typeface="Arial" pitchFamily="34" charset="0"/>
+                <a:ea typeface="Arial" pitchFamily="34" charset="-122"/>
+                <a:cs typeface="Arial" pitchFamily="34" charset="-120"/>
+              </a:rPr>
+              <a:t>المساعدات والجهات الداعمة</a:t>
+            </a:r>
+            <a:endParaRPr lang="en-US" sz="1300" dirty="0"/>
+          </a:p>
+        </p:txBody>
+      </p:sp>
+      <p:sp>
+        <p:nvSpPr>
+          <p:cNvPr id="47" name="Text 45"/>
+          <p:cNvSpPr txBox="1"/>
+          <p:nvPr/>
+        </p:nvSpPr>
+        <p:spPr>
+          <a:xfrm>
+            <a:off x="749808" y="1938528"/>
+            <a:ext cx="1831772" cy="256032"/>
+          </a:xfrm>
+          <a:prstGeom prst="rect">
+            <a:avLst/>
+          </a:prstGeom>
+          <a:noFill/>
+          <a:ln/>
+        </p:spPr>
+        <p:txBody>
+          <a:bodyPr wrap="square" lIns="0" tIns="0" rIns="0" bIns="0" rtlCol="0" anchor="ctr"/>
+          <a:lstStyle/>
+          <a:p>
+            <a:pPr rtl="1" algn="r" indent="0" marL="0">
+              <a:buNone/>
+            </a:pPr>
+            <a:r>
+              <a:rPr lang="en-US" sz="1000" dirty="0">
+                <a:solidFill>
+                  <a:srgbClr val="BFD4D7"/>
+                </a:solidFill>
+                <a:latin typeface="Arial" pitchFamily="34" charset="0"/>
+                <a:ea typeface="Arial" pitchFamily="34" charset="-122"/>
+                <a:cs typeface="Arial" pitchFamily="34" charset="-120"/>
+              </a:rPr>
+              <a:t>خمس نوايا</a:t>
+            </a:r>
+            <a:endParaRPr lang="en-US" sz="1000" dirty="0"/>
+          </a:p>
+        </p:txBody>
+      </p:sp>
+      <p:sp>
+        <p:nvSpPr>
+          <p:cNvPr id="48" name="Shape 46"/>
+          <p:cNvSpPr/>
+          <p:nvPr/>
+        </p:nvSpPr>
+        <p:spPr>
+          <a:xfrm>
+            <a:off x="548640" y="2340864"/>
+            <a:ext cx="2609012" cy="3310128"/>
+          </a:xfrm>
+          <a:prstGeom prst="roundRect">
+            <a:avLst>
+              <a:gd name="adj" fmla="val 3154"/>
             </a:avLst>
           </a:prstGeom>
           <a:solidFill>
@@ -12987,112 +14049,36 @@
       </p:sp>
       <p:sp>
         <p:nvSpPr>
-          <p:cNvPr id="18" name="Shape 15"/>
-          <p:cNvSpPr/>
-          <p:nvPr/>
-        </p:nvSpPr>
-        <p:spPr>
-          <a:xfrm>
-            <a:off x="6778447" y="4133088"/>
-            <a:ext cx="256032" cy="256032"/>
-          </a:xfrm>
-          <a:prstGeom prst="ellipse">
-            <a:avLst/>
-          </a:prstGeom>
-          <a:solidFill>
-            <a:srgbClr val="02717D"/>
-          </a:solidFill>
-          <a:ln/>
-        </p:spPr>
-      </p:sp>
-      <p:sp>
-        <p:nvSpPr>
-          <p:cNvPr id="19" name="Text 16"/>
-          <p:cNvSpPr txBox="1"/>
-          <p:nvPr/>
-        </p:nvSpPr>
-        <p:spPr>
-          <a:xfrm>
-            <a:off x="6778447" y="4133088"/>
-            <a:ext cx="256032" cy="256032"/>
-          </a:xfrm>
-          <a:prstGeom prst="rect">
-            <a:avLst/>
-          </a:prstGeom>
-          <a:noFill/>
-          <a:ln/>
-        </p:spPr>
-        <p:txBody>
-          <a:bodyPr wrap="square" lIns="0" tIns="0" rIns="0" bIns="0" rtlCol="0" anchor="ctr"/>
-          <a:lstStyle/>
-          <a:p>
-            <a:pPr rtl="1" algn="ctr" indent="0" marL="0">
-              <a:buNone/>
-            </a:pPr>
-            <a:r>
-              <a:rPr lang="en-US" sz="1100" b="1" dirty="0">
-                <a:solidFill>
-                  <a:srgbClr val="FFFFFF"/>
-                </a:solidFill>
-                <a:latin typeface="Arial" pitchFamily="34" charset="0"/>
-                <a:ea typeface="Arial" pitchFamily="34" charset="-122"/>
-                <a:cs typeface="Arial" pitchFamily="34" charset="-120"/>
-              </a:rPr>
-              <a:t>3</a:t>
-            </a:r>
-            <a:endParaRPr lang="en-US" sz="1100" dirty="0"/>
-          </a:p>
-        </p:txBody>
-      </p:sp>
-      <p:sp>
-        <p:nvSpPr>
-          <p:cNvPr id="20" name="Text 17"/>
-          <p:cNvSpPr txBox="1"/>
-          <p:nvPr/>
-        </p:nvSpPr>
-        <p:spPr>
-          <a:xfrm>
-            <a:off x="749808" y="4114800"/>
-            <a:ext cx="5928055" cy="256032"/>
-          </a:xfrm>
-          <a:prstGeom prst="rect">
-            <a:avLst/>
-          </a:prstGeom>
-          <a:noFill/>
-          <a:ln/>
-        </p:spPr>
-        <p:txBody>
-          <a:bodyPr wrap="square" lIns="0" tIns="0" rIns="0" bIns="0" rtlCol="0" anchor="ctr"/>
-          <a:lstStyle/>
-          <a:p>
-            <a:pPr rtl="1" algn="r" indent="0" marL="0">
-              <a:buNone/>
-            </a:pPr>
-            <a:r>
-              <a:rPr lang="en-US" sz="1300" b="1" dirty="0">
-                <a:solidFill>
-                  <a:srgbClr val="16292E"/>
-                </a:solidFill>
-                <a:latin typeface="Arial" pitchFamily="34" charset="0"/>
-                <a:ea typeface="Arial" pitchFamily="34" charset="-122"/>
-                <a:cs typeface="Arial" pitchFamily="34" charset="-120"/>
-              </a:rPr>
-              <a:t>الأرقام المساندة</a:t>
-            </a:r>
-            <a:endParaRPr lang="en-US" sz="1300" dirty="0"/>
-          </a:p>
-        </p:txBody>
-      </p:sp>
-      <p:sp>
-        <p:nvSpPr>
-          <p:cNvPr id="21" name="Text 18"/>
-          <p:cNvSpPr txBox="1"/>
-          <p:nvPr/>
-        </p:nvSpPr>
-        <p:spPr>
-          <a:xfrm>
-            <a:off x="749808" y="4389120"/>
-            <a:ext cx="6302959" cy="402336"/>
+          <p:cNvPr id="49" name="Shape 47"/>
+          <p:cNvSpPr/>
+          <p:nvPr/>
+        </p:nvSpPr>
+        <p:spPr>
+          <a:xfrm>
+            <a:off x="694944" y="2468880"/>
+            <a:ext cx="2316404" cy="502920"/>
+          </a:xfrm>
+          <a:prstGeom prst="roundRect">
+            <a:avLst>
+              <a:gd name="adj" fmla="val 10909"/>
+            </a:avLst>
+          </a:prstGeom>
+          <a:solidFill>
+            <a:srgbClr val="FDF3E3"/>
+          </a:solidFill>
+          <a:ln/>
+        </p:spPr>
+      </p:sp>
+      <p:sp>
+        <p:nvSpPr>
+          <p:cNvPr id="50" name="Text 48"/>
+          <p:cNvSpPr txBox="1"/>
+          <p:nvPr/>
+        </p:nvSpPr>
+        <p:spPr>
+          <a:xfrm>
+            <a:off x="822960" y="2468880"/>
+            <a:ext cx="2060372" cy="502920"/>
           </a:xfrm>
           <a:prstGeom prst="rect">
             <a:avLst/>
@@ -13106,162 +14092,57 @@
           <a:p>
             <a:pPr rtl="1" algn="r" indent="0" marL="0">
               <a:lnSpc>
-                <a:spcPts val="1400"/>
+                <a:spcPts val="1200"/>
               </a:lnSpc>
               <a:buNone/>
             </a:pPr>
             <a:r>
-              <a:rPr lang="en-US" sz="1050" dirty="0">
-                <a:solidFill>
-                  <a:srgbClr val="5C7378"/>
-                </a:solidFill>
-                <a:latin typeface="Arial" pitchFamily="34" charset="0"/>
-                <a:ea typeface="Arial" pitchFamily="34" charset="-122"/>
-                <a:cs typeface="Arial" pitchFamily="34" charset="-120"/>
-              </a:rPr>
-              <a:t>إجمالي السكان، وداخل المخيم، وخارجه: تفصيل يجيب السؤال التالي قبل أن يُطرح</a:t>
-            </a:r>
-            <a:endParaRPr lang="en-US" sz="1050" dirty="0"/>
-          </a:p>
-        </p:txBody>
-      </p:sp>
-      <p:sp>
-        <p:nvSpPr>
-          <p:cNvPr id="22" name="Shape 19"/>
-          <p:cNvSpPr/>
-          <p:nvPr/>
-        </p:nvSpPr>
-        <p:spPr>
-          <a:xfrm>
-            <a:off x="548640" y="4965192"/>
-            <a:ext cx="6705295" cy="841248"/>
+              <a:rPr lang="en-US" sz="1000" dirty="0">
+                <a:solidFill>
+                  <a:srgbClr val="16292E"/>
+                </a:solidFill>
+                <a:latin typeface="Arial" pitchFamily="34" charset="0"/>
+                <a:ea typeface="Arial" pitchFamily="34" charset="-122"/>
+                <a:cs typeface="Arial" pitchFamily="34" charset="-120"/>
+              </a:rPr>
+              <a:t>ماذا استلم أحمد الحسن من مساعدات؟</a:t>
+            </a:r>
+            <a:endParaRPr lang="en-US" sz="1000" dirty="0"/>
+          </a:p>
+        </p:txBody>
+      </p:sp>
+      <p:sp>
+        <p:nvSpPr>
+          <p:cNvPr id="51" name="Shape 49"/>
+          <p:cNvSpPr/>
+          <p:nvPr/>
+        </p:nvSpPr>
+        <p:spPr>
+          <a:xfrm>
+            <a:off x="694944" y="3035808"/>
+            <a:ext cx="2316404" cy="502920"/>
           </a:xfrm>
           <a:prstGeom prst="roundRect">
             <a:avLst>
-              <a:gd name="adj" fmla="val 9783"/>
+              <a:gd name="adj" fmla="val 10909"/>
             </a:avLst>
           </a:prstGeom>
           <a:solidFill>
-            <a:srgbClr val="FFFFFF"/>
-          </a:solidFill>
-          <a:ln/>
-          <a:effectLst>
-            <a:outerShdw sx="100000" sy="100000" kx="0" ky="0" algn="bl" rotWithShape="0" blurRad="127000" dist="25400" dir="5400000">
-              <a:srgbClr val="0A2E36">
-                <a:alpha val="10000"/>
-              </a:srgbClr>
-            </a:outerShdw>
-          </a:effectLst>
-        </p:spPr>
-      </p:sp>
-      <p:sp>
-        <p:nvSpPr>
-          <p:cNvPr id="23" name="Shape 20"/>
-          <p:cNvSpPr/>
-          <p:nvPr/>
-        </p:nvSpPr>
-        <p:spPr>
-          <a:xfrm>
-            <a:off x="6778447" y="5093208"/>
-            <a:ext cx="256032" cy="256032"/>
-          </a:xfrm>
-          <a:prstGeom prst="ellipse">
-            <a:avLst/>
-          </a:prstGeom>
-          <a:solidFill>
-            <a:srgbClr val="02717D"/>
-          </a:solidFill>
-          <a:ln/>
-        </p:spPr>
-      </p:sp>
-      <p:sp>
-        <p:nvSpPr>
-          <p:cNvPr id="24" name="Text 21"/>
-          <p:cNvSpPr txBox="1"/>
-          <p:nvPr/>
-        </p:nvSpPr>
-        <p:spPr>
-          <a:xfrm>
-            <a:off x="6778447" y="5093208"/>
-            <a:ext cx="256032" cy="256032"/>
-          </a:xfrm>
-          <a:prstGeom prst="rect">
-            <a:avLst/>
-          </a:prstGeom>
-          <a:noFill/>
-          <a:ln/>
-        </p:spPr>
-        <p:txBody>
-          <a:bodyPr wrap="square" lIns="0" tIns="0" rIns="0" bIns="0" rtlCol="0" anchor="ctr"/>
-          <a:lstStyle/>
-          <a:p>
-            <a:pPr rtl="1" algn="ctr" indent="0" marL="0">
-              <a:buNone/>
-            </a:pPr>
-            <a:r>
-              <a:rPr lang="en-US" sz="1100" b="1" dirty="0">
-                <a:solidFill>
-                  <a:srgbClr val="FFFFFF"/>
-                </a:solidFill>
-                <a:latin typeface="Arial" pitchFamily="34" charset="0"/>
-                <a:ea typeface="Arial" pitchFamily="34" charset="-122"/>
-                <a:cs typeface="Arial" pitchFamily="34" charset="-120"/>
-              </a:rPr>
-              <a:t>4</a:t>
-            </a:r>
-            <a:endParaRPr lang="en-US" sz="1100" dirty="0"/>
-          </a:p>
-        </p:txBody>
-      </p:sp>
-      <p:sp>
-        <p:nvSpPr>
-          <p:cNvPr id="25" name="Text 22"/>
-          <p:cNvSpPr txBox="1"/>
-          <p:nvPr/>
-        </p:nvSpPr>
-        <p:spPr>
-          <a:xfrm>
-            <a:off x="749808" y="5074920"/>
-            <a:ext cx="5928055" cy="256032"/>
-          </a:xfrm>
-          <a:prstGeom prst="rect">
-            <a:avLst/>
-          </a:prstGeom>
-          <a:noFill/>
-          <a:ln/>
-        </p:spPr>
-        <p:txBody>
-          <a:bodyPr wrap="square" lIns="0" tIns="0" rIns="0" bIns="0" rtlCol="0" anchor="ctr"/>
-          <a:lstStyle/>
-          <a:p>
-            <a:pPr rtl="1" algn="r" indent="0" marL="0">
-              <a:buNone/>
-            </a:pPr>
-            <a:r>
-              <a:rPr lang="en-US" sz="1300" b="1" dirty="0">
-                <a:solidFill>
-                  <a:srgbClr val="16292E"/>
-                </a:solidFill>
-                <a:latin typeface="Arial" pitchFamily="34" charset="0"/>
-                <a:ea typeface="Arial" pitchFamily="34" charset="-122"/>
-                <a:cs typeface="Arial" pitchFamily="34" charset="-120"/>
-              </a:rPr>
-              <a:t>أمثلة مقترحة</a:t>
-            </a:r>
-            <a:endParaRPr lang="en-US" sz="1300" dirty="0"/>
-          </a:p>
-        </p:txBody>
-      </p:sp>
-      <p:sp>
-        <p:nvSpPr>
-          <p:cNvPr id="26" name="Text 23"/>
-          <p:cNvSpPr txBox="1"/>
-          <p:nvPr/>
-        </p:nvSpPr>
-        <p:spPr>
-          <a:xfrm>
-            <a:off x="749808" y="5349240"/>
-            <a:ext cx="6302959" cy="402336"/>
+            <a:srgbClr val="ECF4F4"/>
+          </a:solidFill>
+          <a:ln/>
+        </p:spPr>
+      </p:sp>
+      <p:sp>
+        <p:nvSpPr>
+          <p:cNvPr id="52" name="Text 50"/>
+          <p:cNvSpPr txBox="1"/>
+          <p:nvPr/>
+        </p:nvSpPr>
+        <p:spPr>
+          <a:xfrm>
+            <a:off x="822960" y="3035808"/>
+            <a:ext cx="2060372" cy="502920"/>
           </a:xfrm>
           <a:prstGeom prst="rect">
             <a:avLst/>
@@ -13275,12 +14156,246 @@
           <a:p>
             <a:pPr rtl="1" algn="r" indent="0" marL="0">
               <a:lnSpc>
-                <a:spcPts val="1400"/>
+                <a:spcPts val="1200"/>
               </a:lnSpc>
               <a:buNone/>
             </a:pPr>
             <a:r>
-              <a:rPr lang="en-US" sz="1050" dirty="0">
+              <a:rPr lang="en-US" sz="1000" dirty="0">
+                <a:solidFill>
+                  <a:srgbClr val="16292E"/>
+                </a:solidFill>
+                <a:latin typeface="Arial" pitchFamily="34" charset="0"/>
+                <a:ea typeface="Arial" pitchFamily="34" charset="-122"/>
+                <a:cs typeface="Arial" pitchFamily="34" charset="-120"/>
+              </a:rPr>
+              <a:t>ما المساعدات التي استلمتها الأسرة ⁦HH-0012⁩؟</a:t>
+            </a:r>
+            <a:endParaRPr lang="en-US" sz="1000" dirty="0"/>
+          </a:p>
+        </p:txBody>
+      </p:sp>
+      <p:sp>
+        <p:nvSpPr>
+          <p:cNvPr id="53" name="Shape 51"/>
+          <p:cNvSpPr/>
+          <p:nvPr/>
+        </p:nvSpPr>
+        <p:spPr>
+          <a:xfrm>
+            <a:off x="694944" y="3602736"/>
+            <a:ext cx="2316404" cy="502920"/>
+          </a:xfrm>
+          <a:prstGeom prst="roundRect">
+            <a:avLst>
+              <a:gd name="adj" fmla="val 10909"/>
+            </a:avLst>
+          </a:prstGeom>
+          <a:solidFill>
+            <a:srgbClr val="FDF3E3"/>
+          </a:solidFill>
+          <a:ln/>
+        </p:spPr>
+      </p:sp>
+      <p:sp>
+        <p:nvSpPr>
+          <p:cNvPr id="54" name="Text 52"/>
+          <p:cNvSpPr txBox="1"/>
+          <p:nvPr/>
+        </p:nvSpPr>
+        <p:spPr>
+          <a:xfrm>
+            <a:off x="822960" y="3602736"/>
+            <a:ext cx="2060372" cy="502920"/>
+          </a:xfrm>
+          <a:prstGeom prst="rect">
+            <a:avLst/>
+          </a:prstGeom>
+          <a:noFill/>
+          <a:ln/>
+        </p:spPr>
+        <p:txBody>
+          <a:bodyPr wrap="square" lIns="0" tIns="0" rIns="0" bIns="0" rtlCol="0" anchor="ctr"/>
+          <a:lstStyle/>
+          <a:p>
+            <a:pPr rtl="1" algn="r" indent="0" marL="0">
+              <a:lnSpc>
+                <a:spcPts val="1200"/>
+              </a:lnSpc>
+              <a:buNone/>
+            </a:pPr>
+            <a:r>
+              <a:rPr lang="en-US" sz="1000" dirty="0">
+                <a:solidFill>
+                  <a:srgbClr val="16292E"/>
+                </a:solidFill>
+                <a:latin typeface="Arial" pitchFamily="34" charset="0"/>
+                <a:ea typeface="Arial" pitchFamily="34" charset="-122"/>
+                <a:cs typeface="Arial" pitchFamily="34" charset="-120"/>
+              </a:rPr>
+              <a:t>ما المساعدات المقدمة من الهلال المحلي؟</a:t>
+            </a:r>
+            <a:endParaRPr lang="en-US" sz="1000" dirty="0"/>
+          </a:p>
+        </p:txBody>
+      </p:sp>
+      <p:sp>
+        <p:nvSpPr>
+          <p:cNvPr id="55" name="Shape 53"/>
+          <p:cNvSpPr/>
+          <p:nvPr/>
+        </p:nvSpPr>
+        <p:spPr>
+          <a:xfrm>
+            <a:off x="694944" y="4169664"/>
+            <a:ext cx="2316404" cy="502920"/>
+          </a:xfrm>
+          <a:prstGeom prst="roundRect">
+            <a:avLst>
+              <a:gd name="adj" fmla="val 10909"/>
+            </a:avLst>
+          </a:prstGeom>
+          <a:solidFill>
+            <a:srgbClr val="ECF4F4"/>
+          </a:solidFill>
+          <a:ln/>
+        </p:spPr>
+      </p:sp>
+      <p:sp>
+        <p:nvSpPr>
+          <p:cNvPr id="56" name="Text 54"/>
+          <p:cNvSpPr txBox="1"/>
+          <p:nvPr/>
+        </p:nvSpPr>
+        <p:spPr>
+          <a:xfrm>
+            <a:off x="822960" y="4169664"/>
+            <a:ext cx="2060372" cy="502920"/>
+          </a:xfrm>
+          <a:prstGeom prst="rect">
+            <a:avLst/>
+          </a:prstGeom>
+          <a:noFill/>
+          <a:ln/>
+        </p:spPr>
+        <p:txBody>
+          <a:bodyPr wrap="square" lIns="0" tIns="0" rIns="0" bIns="0" rtlCol="0" anchor="ctr"/>
+          <a:lstStyle/>
+          <a:p>
+            <a:pPr rtl="1" algn="r" indent="0" marL="0">
+              <a:lnSpc>
+                <a:spcPts val="1200"/>
+              </a:lnSpc>
+              <a:buNone/>
+            </a:pPr>
+            <a:r>
+              <a:rPr lang="en-US" sz="1000" dirty="0">
+                <a:solidFill>
+                  <a:srgbClr val="16292E"/>
+                </a:solidFill>
+                <a:latin typeface="Arial" pitchFamily="34" charset="0"/>
+                <a:ea typeface="Arial" pitchFamily="34" charset="-122"/>
+                <a:cs typeface="Arial" pitchFamily="34" charset="-120"/>
+              </a:rPr>
+              <a:t>كم مساعدة وُزّعت هذا الشهر؟</a:t>
+            </a:r>
+            <a:endParaRPr lang="en-US" sz="1000" dirty="0"/>
+          </a:p>
+        </p:txBody>
+      </p:sp>
+      <p:sp>
+        <p:nvSpPr>
+          <p:cNvPr id="57" name="Shape 55"/>
+          <p:cNvSpPr/>
+          <p:nvPr/>
+        </p:nvSpPr>
+        <p:spPr>
+          <a:xfrm>
+            <a:off x="694944" y="4736592"/>
+            <a:ext cx="2316404" cy="502920"/>
+          </a:xfrm>
+          <a:prstGeom prst="roundRect">
+            <a:avLst>
+              <a:gd name="adj" fmla="val 10909"/>
+            </a:avLst>
+          </a:prstGeom>
+          <a:solidFill>
+            <a:srgbClr val="FDF3E3"/>
+          </a:solidFill>
+          <a:ln/>
+        </p:spPr>
+      </p:sp>
+      <p:sp>
+        <p:nvSpPr>
+          <p:cNvPr id="58" name="Text 56"/>
+          <p:cNvSpPr txBox="1"/>
+          <p:nvPr/>
+        </p:nvSpPr>
+        <p:spPr>
+          <a:xfrm>
+            <a:off x="822960" y="4736592"/>
+            <a:ext cx="2060372" cy="502920"/>
+          </a:xfrm>
+          <a:prstGeom prst="rect">
+            <a:avLst/>
+          </a:prstGeom>
+          <a:noFill/>
+          <a:ln/>
+        </p:spPr>
+        <p:txBody>
+          <a:bodyPr wrap="square" lIns="0" tIns="0" rIns="0" bIns="0" rtlCol="0" anchor="ctr"/>
+          <a:lstStyle/>
+          <a:p>
+            <a:pPr rtl="1" algn="r" indent="0" marL="0">
+              <a:lnSpc>
+                <a:spcPts val="1200"/>
+              </a:lnSpc>
+              <a:buNone/>
+            </a:pPr>
+            <a:r>
+              <a:rPr lang="en-US" sz="1000" dirty="0">
+                <a:solidFill>
+                  <a:srgbClr val="16292E"/>
+                </a:solidFill>
+                <a:latin typeface="Arial" pitchFamily="34" charset="0"/>
+                <a:ea typeface="Arial" pitchFamily="34" charset="-122"/>
+                <a:cs typeface="Arial" pitchFamily="34" charset="-120"/>
+              </a:rPr>
+              <a:t>كم عدد الجهات الداعمة المسجلة؟</a:t>
+            </a:r>
+            <a:endParaRPr lang="en-US" sz="1000" dirty="0"/>
+          </a:p>
+        </p:txBody>
+      </p:sp>
+      <p:sp>
+        <p:nvSpPr>
+          <p:cNvPr id="59" name="Text 57"/>
+          <p:cNvSpPr txBox="1"/>
+          <p:nvPr/>
+        </p:nvSpPr>
+        <p:spPr>
+          <a:xfrm>
+            <a:off x="749808" y="5303520"/>
+            <a:ext cx="2206676" cy="292608"/>
+          </a:xfrm>
+          <a:prstGeom prst="rect">
+            <a:avLst/>
+          </a:prstGeom>
+          <a:noFill/>
+          <a:ln/>
+        </p:spPr>
+        <p:txBody>
+          <a:bodyPr wrap="square" lIns="0" tIns="0" rIns="0" bIns="0" rtlCol="0" anchor="ctr"/>
+          <a:lstStyle/>
+          <a:p>
+            <a:pPr rtl="1" algn="r" indent="0" marL="0">
+              <a:lnSpc>
+                <a:spcPts val="1200"/>
+              </a:lnSpc>
+              <a:buNone/>
+            </a:pPr>
+            <a:r>
+              <a:rPr lang="en-US" sz="950" dirty="0">
                 <a:solidFill>
                   <a:srgbClr val="5C7378"/>
                 </a:solidFill>
@@ -13288,9 +14403,70 @@
                 <a:ea typeface="Arial" pitchFamily="34" charset="-122"/>
                 <a:cs typeface="Arial" pitchFamily="34" charset="-120"/>
               </a:rPr>
-              <a:t>الشرائح أعلى المحادثة أسئلة يفهمها النظام، مفلترة بدور المستخدم</a:t>
-            </a:r>
-            <a:endParaRPr lang="en-US" sz="1050" dirty="0"/>
+              <a:t>من الفرد إلى الأسرة إلى الجهة المانحة</a:t>
+            </a:r>
+            <a:endParaRPr lang="en-US" sz="950" dirty="0"/>
+          </a:p>
+        </p:txBody>
+      </p:sp>
+      <p:sp>
+        <p:nvSpPr>
+          <p:cNvPr id="60" name="Shape 58"/>
+          <p:cNvSpPr/>
+          <p:nvPr/>
+        </p:nvSpPr>
+        <p:spPr>
+          <a:xfrm>
+            <a:off x="548640" y="5833872"/>
+            <a:ext cx="11094415" cy="694944"/>
+          </a:xfrm>
+          <a:prstGeom prst="roundRect">
+            <a:avLst>
+              <a:gd name="adj" fmla="val 11842"/>
+            </a:avLst>
+          </a:prstGeom>
+          <a:solidFill>
+            <a:srgbClr val="0A2E36"/>
+          </a:solidFill>
+          <a:ln/>
+        </p:spPr>
+      </p:sp>
+      <p:sp>
+        <p:nvSpPr>
+          <p:cNvPr id="61" name="Text 59"/>
+          <p:cNvSpPr txBox="1"/>
+          <p:nvPr/>
+        </p:nvSpPr>
+        <p:spPr>
+          <a:xfrm>
+            <a:off x="822960" y="5833872"/>
+            <a:ext cx="10545775" cy="694944"/>
+          </a:xfrm>
+          <a:prstGeom prst="rect">
+            <a:avLst/>
+          </a:prstGeom>
+          <a:noFill/>
+          <a:ln/>
+        </p:spPr>
+        <p:txBody>
+          <a:bodyPr wrap="square" lIns="0" tIns="0" rIns="0" bIns="0" rtlCol="0" anchor="ctr"/>
+          <a:lstStyle/>
+          <a:p>
+            <a:pPr rtl="1" algn="ctr" indent="0" marL="0">
+              <a:buNone/>
+            </a:pPr>
+            <a:r>
+              <a:rPr lang="en-US" sz="1100" dirty="0">
+                <a:solidFill>
+                  <a:srgbClr val="BFD4D7"/>
+                </a:solidFill>
+                <a:latin typeface="Arial" pitchFamily="34" charset="0"/>
+                <a:ea typeface="Arial" pitchFamily="34" charset="-122"/>
+                <a:cs typeface="Arial" pitchFamily="34" charset="-120"/>
+              </a:rPr>
+              <a:t>وما خرج عن المحاور الأربعة لا يُقابَل بصمت: يُمرَّر إلى البحث الشامل في اللاجئين والأسر والوحدات والجهات، ثم تُعرض أمثلة يفهمها النظام</a:t>
+            </a:r>
+            <a:endParaRPr lang="en-US" sz="1100" dirty="0"/>
           </a:p>
         </p:txBody>
       </p:sp>
@@ -13359,7 +14535,7 @@
                 <a:ea typeface="Arial" pitchFamily="34" charset="-122"/>
                 <a:cs typeface="Arial" pitchFamily="34" charset="-120"/>
               </a:rPr>
-              <a:t>المحور الخامس · المتانة</a:t>
+              <a:t>المحور الرابع · لقطة حقيقية</a:t>
             </a:r>
             <a:endParaRPr lang="en-US" sz="1300" dirty="0"/>
           </a:p>
@@ -13398,7 +14574,7 @@
                 <a:ea typeface="Arial" pitchFamily="34" charset="-122"/>
                 <a:cs typeface="Arial" pitchFamily="34" charset="-120"/>
               </a:rPr>
-              <a:t>التدهور الآمن — حين لا توجد إجابة واحدة</a:t>
+              <a:t>المساعد داخل النظام</a:t>
             </a:r>
             <a:endParaRPr lang="en-US" sz="3300" dirty="0"/>
           </a:p>
@@ -13406,57 +14582,18 @@
       </p:sp>
       <p:sp>
         <p:nvSpPr>
-          <p:cNvPr id="4" name="Text 2"/>
-          <p:cNvSpPr txBox="1"/>
-          <p:nvPr/>
-        </p:nvSpPr>
-        <p:spPr>
-          <a:xfrm>
-            <a:off x="4693615" y="1572768"/>
-            <a:ext cx="2697480" cy="274320"/>
-          </a:xfrm>
-          <a:prstGeom prst="rect">
-            <a:avLst/>
-          </a:prstGeom>
-          <a:noFill/>
-          <a:ln/>
-        </p:spPr>
-        <p:txBody>
-          <a:bodyPr wrap="square" lIns="0" tIns="0" rIns="0" bIns="0" rtlCol="0" anchor="ctr"/>
-          <a:lstStyle/>
-          <a:p>
-            <a:pPr rtl="1" algn="ctr" indent="0" marL="0">
-              <a:buNone/>
-            </a:pPr>
-            <a:r>
-              <a:rPr lang="en-US" sz="1150" b="1" dirty="0">
-                <a:solidFill>
-                  <a:srgbClr val="B4761C"/>
-                </a:solidFill>
-                <a:latin typeface="Arial" pitchFamily="34" charset="0"/>
-                <a:ea typeface="Arial" pitchFamily="34" charset="-122"/>
-                <a:cs typeface="Arial" pitchFamily="34" charset="-120"/>
-              </a:rPr>
-              <a:t>الحالة ١ · اسم ملتبس</a:t>
-            </a:r>
-            <a:endParaRPr lang="en-US" sz="1150" dirty="0"/>
-          </a:p>
-        </p:txBody>
-      </p:sp>
-      <p:sp>
-        <p:nvSpPr>
-          <p:cNvPr id="5" name="Shape 3"/>
-          <p:cNvSpPr/>
-          <p:nvPr/>
-        </p:nvSpPr>
-        <p:spPr>
-          <a:xfrm>
-            <a:off x="4638751" y="1847088"/>
-            <a:ext cx="2807208" cy="4128973"/>
+          <p:cNvPr id="4" name="Shape 2"/>
+          <p:cNvSpPr/>
+          <p:nvPr/>
+        </p:nvSpPr>
+        <p:spPr>
+          <a:xfrm>
+            <a:off x="7701991" y="1517904"/>
+            <a:ext cx="3172968" cy="4673956"/>
           </a:xfrm>
           <a:prstGeom prst="roundRect">
             <a:avLst>
-              <a:gd name="adj" fmla="val 2932"/>
+              <a:gd name="adj" fmla="val 2594"/>
             </a:avLst>
           </a:prstGeom>
           <a:solidFill>
@@ -13474,7 +14611,7 @@
       </p:sp>
       <p:pic>
         <p:nvPicPr>
-          <p:cNvPr id="6" name="Image 0" descr="/home/user/Camp_management/docs/screenshots/assistant_panel.png">    </p:cNvPr>
+          <p:cNvPr id="5" name="Image 0" descr="/home/user/Camp_management/docs/screenshots/assistant_ok.png">    </p:cNvPr>
           <p:cNvPicPr>
             <a:picLocks noChangeAspect="1"/>
           </p:cNvPicPr>
@@ -13488,8 +14625,8 @@
         </p:blipFill>
         <p:spPr>
           <a:xfrm>
-            <a:off x="4693615" y="1901952"/>
-            <a:ext cx="2697480" cy="4019245"/>
+            <a:off x="7756855" y="1572768"/>
+            <a:ext cx="3063240" cy="4564228"/>
           </a:xfrm>
           <a:prstGeom prst="rect">
             <a:avLst/>
@@ -13498,57 +14635,57 @@
       </p:pic>
       <p:sp>
         <p:nvSpPr>
-          <p:cNvPr id="7" name="Text 4"/>
-          <p:cNvSpPr txBox="1"/>
-          <p:nvPr/>
-        </p:nvSpPr>
-        <p:spPr>
-          <a:xfrm>
-            <a:off x="1676095" y="1572768"/>
-            <a:ext cx="2697480" cy="274320"/>
-          </a:xfrm>
-          <a:prstGeom prst="rect">
-            <a:avLst/>
-          </a:prstGeom>
-          <a:noFill/>
-          <a:ln/>
-        </p:spPr>
-        <p:txBody>
-          <a:bodyPr wrap="square" lIns="0" tIns="0" rIns="0" bIns="0" rtlCol="0" anchor="ctr"/>
-          <a:lstStyle/>
-          <a:p>
-            <a:pPr rtl="1" algn="ctr" indent="0" marL="0">
-              <a:buNone/>
-            </a:pPr>
-            <a:r>
-              <a:rPr lang="en-US" sz="1150" b="1" dirty="0">
-                <a:solidFill>
-                  <a:srgbClr val="B4761C"/>
-                </a:solidFill>
-                <a:latin typeface="Arial" pitchFamily="34" charset="0"/>
-                <a:ea typeface="Arial" pitchFamily="34" charset="-122"/>
-                <a:cs typeface="Arial" pitchFamily="34" charset="-120"/>
-              </a:rPr>
-              <a:t>الحالة ٢ · مخيم غير موجود</a:t>
-            </a:r>
-            <a:endParaRPr lang="en-US" sz="1150" dirty="0"/>
-          </a:p>
-        </p:txBody>
-      </p:sp>
-      <p:sp>
-        <p:nvSpPr>
-          <p:cNvPr id="8" name="Shape 5"/>
-          <p:cNvSpPr/>
-          <p:nvPr/>
-        </p:nvSpPr>
-        <p:spPr>
-          <a:xfrm>
-            <a:off x="1621231" y="1847088"/>
-            <a:ext cx="2807208" cy="4128973"/>
+          <p:cNvPr id="6" name="Text 3"/>
+          <p:cNvSpPr txBox="1"/>
+          <p:nvPr/>
+        </p:nvSpPr>
+        <p:spPr>
+          <a:xfrm>
+            <a:off x="548640" y="1627632"/>
+            <a:ext cx="6705295" cy="310896"/>
+          </a:xfrm>
+          <a:prstGeom prst="rect">
+            <a:avLst/>
+          </a:prstGeom>
+          <a:noFill/>
+          <a:ln/>
+        </p:spPr>
+        <p:txBody>
+          <a:bodyPr wrap="square" lIns="0" tIns="0" rIns="0" bIns="0" rtlCol="0" anchor="ctr"/>
+          <a:lstStyle/>
+          <a:p>
+            <a:pPr rtl="1" algn="r" indent="0" marL="0">
+              <a:buNone/>
+            </a:pPr>
+            <a:r>
+              <a:rPr lang="en-US" sz="1400" b="1" dirty="0">
+                <a:solidFill>
+                  <a:srgbClr val="02717D"/>
+                </a:solidFill>
+                <a:latin typeface="Arial" pitchFamily="34" charset="0"/>
+                <a:ea typeface="Arial" pitchFamily="34" charset="-122"/>
+                <a:cs typeface="Arial" pitchFamily="34" charset="-120"/>
+              </a:rPr>
+              <a:t>سؤال واحد بالعربية، وإجابة من قاعدة البيانات</a:t>
+            </a:r>
+            <a:endParaRPr lang="en-US" sz="1400" dirty="0"/>
+          </a:p>
+        </p:txBody>
+      </p:sp>
+      <p:sp>
+        <p:nvSpPr>
+          <p:cNvPr id="7" name="Shape 4"/>
+          <p:cNvSpPr/>
+          <p:nvPr/>
+        </p:nvSpPr>
+        <p:spPr>
+          <a:xfrm>
+            <a:off x="548640" y="2084832"/>
+            <a:ext cx="6705295" cy="841248"/>
           </a:xfrm>
           <a:prstGeom prst="roundRect">
             <a:avLst>
-              <a:gd name="adj" fmla="val 2932"/>
+              <a:gd name="adj" fmla="val 9783"/>
             </a:avLst>
           </a:prstGeom>
           <a:solidFill>
@@ -13564,40 +14701,75 @@
           </a:effectLst>
         </p:spPr>
       </p:sp>
-      <p:pic>
-        <p:nvPicPr>
-          <p:cNvPr id="9" name="Image 1" descr="/home/user/Camp_management/docs/screenshots/assistant_unknown_camp.png">    </p:cNvPr>
-          <p:cNvPicPr>
-            <a:picLocks noChangeAspect="1"/>
-          </p:cNvPicPr>
-          <p:nvPr/>
-        </p:nvPicPr>
-        <p:blipFill>
-          <a:blip r:embed="rId2"/>
-          <a:stretch>
-            <a:fillRect/>
-          </a:stretch>
-        </p:blipFill>
-        <p:spPr>
-          <a:xfrm>
-            <a:off x="1676095" y="1901952"/>
-            <a:ext cx="2697480" cy="4019245"/>
-          </a:xfrm>
-          <a:prstGeom prst="rect">
-            <a:avLst/>
-          </a:prstGeom>
-        </p:spPr>
-      </p:pic>
-      <p:sp>
-        <p:nvSpPr>
-          <p:cNvPr id="10" name="Text 6"/>
-          <p:cNvSpPr txBox="1"/>
-          <p:nvPr/>
-        </p:nvSpPr>
-        <p:spPr>
-          <a:xfrm>
-            <a:off x="7848295" y="1627632"/>
-            <a:ext cx="3794760" cy="310896"/>
+      <p:sp>
+        <p:nvSpPr>
+          <p:cNvPr id="8" name="Shape 5"/>
+          <p:cNvSpPr/>
+          <p:nvPr/>
+        </p:nvSpPr>
+        <p:spPr>
+          <a:xfrm>
+            <a:off x="6778447" y="2212848"/>
+            <a:ext cx="256032" cy="256032"/>
+          </a:xfrm>
+          <a:prstGeom prst="ellipse">
+            <a:avLst/>
+          </a:prstGeom>
+          <a:solidFill>
+            <a:srgbClr val="02717D"/>
+          </a:solidFill>
+          <a:ln/>
+        </p:spPr>
+      </p:sp>
+      <p:sp>
+        <p:nvSpPr>
+          <p:cNvPr id="9" name="Text 6"/>
+          <p:cNvSpPr txBox="1"/>
+          <p:nvPr/>
+        </p:nvSpPr>
+        <p:spPr>
+          <a:xfrm>
+            <a:off x="6778447" y="2212848"/>
+            <a:ext cx="256032" cy="256032"/>
+          </a:xfrm>
+          <a:prstGeom prst="rect">
+            <a:avLst/>
+          </a:prstGeom>
+          <a:noFill/>
+          <a:ln/>
+        </p:spPr>
+        <p:txBody>
+          <a:bodyPr wrap="square" lIns="0" tIns="0" rIns="0" bIns="0" rtlCol="0" anchor="ctr"/>
+          <a:lstStyle/>
+          <a:p>
+            <a:pPr rtl="1" algn="ctr" indent="0" marL="0">
+              <a:buNone/>
+            </a:pPr>
+            <a:r>
+              <a:rPr lang="en-US" sz="1100" b="1" dirty="0">
+                <a:solidFill>
+                  <a:srgbClr val="FFFFFF"/>
+                </a:solidFill>
+                <a:latin typeface="Arial" pitchFamily="34" charset="0"/>
+                <a:ea typeface="Arial" pitchFamily="34" charset="-122"/>
+                <a:cs typeface="Arial" pitchFamily="34" charset="-120"/>
+              </a:rPr>
+              <a:t>1</a:t>
+            </a:r>
+            <a:endParaRPr lang="en-US" sz="1100" dirty="0"/>
+          </a:p>
+        </p:txBody>
+      </p:sp>
+      <p:sp>
+        <p:nvSpPr>
+          <p:cNvPr id="10" name="Text 7"/>
+          <p:cNvSpPr txBox="1"/>
+          <p:nvPr/>
+        </p:nvSpPr>
+        <p:spPr>
+          <a:xfrm>
+            <a:off x="749808" y="2194560"/>
+            <a:ext cx="5928055" cy="256032"/>
           </a:xfrm>
           <a:prstGeom prst="rect">
             <a:avLst/>
@@ -13613,30 +14785,72 @@
               <a:buNone/>
             </a:pPr>
             <a:r>
-              <a:rPr lang="en-US" sz="1400" b="1" dirty="0">
-                <a:solidFill>
-                  <a:srgbClr val="02717D"/>
-                </a:solidFill>
-                <a:latin typeface="Arial" pitchFamily="34" charset="0"/>
-                <a:ea typeface="Arial" pitchFamily="34" charset="-122"/>
-                <a:cs typeface="Arial" pitchFamily="34" charset="-120"/>
-              </a:rPr>
-              <a:t>لا يخمّن، ولا يصمت</a:t>
-            </a:r>
-            <a:endParaRPr lang="en-US" sz="1400" dirty="0"/>
-          </a:p>
-        </p:txBody>
-      </p:sp>
-      <p:sp>
-        <p:nvSpPr>
-          <p:cNvPr id="11" name="Shape 7"/>
-          <p:cNvSpPr/>
-          <p:nvPr/>
-        </p:nvSpPr>
-        <p:spPr>
-          <a:xfrm>
-            <a:off x="7848295" y="2084832"/>
-            <a:ext cx="3794760" cy="841248"/>
+              <a:rPr lang="en-US" sz="1300" b="1" dirty="0">
+                <a:solidFill>
+                  <a:srgbClr val="16292E"/>
+                </a:solidFill>
+                <a:latin typeface="Arial" pitchFamily="34" charset="0"/>
+                <a:ea typeface="Arial" pitchFamily="34" charset="-122"/>
+                <a:cs typeface="Arial" pitchFamily="34" charset="-120"/>
+              </a:rPr>
+              <a:t>السؤال كما كُتب</a:t>
+            </a:r>
+            <a:endParaRPr lang="en-US" sz="1300" dirty="0"/>
+          </a:p>
+        </p:txBody>
+      </p:sp>
+      <p:sp>
+        <p:nvSpPr>
+          <p:cNvPr id="11" name="Text 8"/>
+          <p:cNvSpPr txBox="1"/>
+          <p:nvPr/>
+        </p:nvSpPr>
+        <p:spPr>
+          <a:xfrm>
+            <a:off x="749808" y="2468880"/>
+            <a:ext cx="6302959" cy="402336"/>
+          </a:xfrm>
+          <a:prstGeom prst="rect">
+            <a:avLst/>
+          </a:prstGeom>
+          <a:noFill/>
+          <a:ln/>
+        </p:spPr>
+        <p:txBody>
+          <a:bodyPr wrap="square" lIns="0" tIns="0" rIns="0" bIns="0" rtlCol="0" anchor="ctr"/>
+          <a:lstStyle/>
+          <a:p>
+            <a:pPr rtl="1" algn="r" indent="0" marL="0">
+              <a:lnSpc>
+                <a:spcPts val="1400"/>
+              </a:lnSpc>
+              <a:buNone/>
+            </a:pPr>
+            <a:r>
+              <a:rPr lang="en-US" sz="1050" dirty="0">
+                <a:solidFill>
+                  <a:srgbClr val="5C7378"/>
+                </a:solidFill>
+                <a:latin typeface="Arial" pitchFamily="34" charset="0"/>
+                <a:ea typeface="Arial" pitchFamily="34" charset="-122"/>
+                <a:cs typeface="Arial" pitchFamily="34" charset="-120"/>
+              </a:rPr>
+              <a:t>«كم عدد السكان في مخيم السلام؟»: جملة عادية، لا صيغة ولا أمر</a:t>
+            </a:r>
+            <a:endParaRPr lang="en-US" sz="1050" dirty="0"/>
+          </a:p>
+        </p:txBody>
+      </p:sp>
+      <p:sp>
+        <p:nvSpPr>
+          <p:cNvPr id="12" name="Shape 9"/>
+          <p:cNvSpPr/>
+          <p:nvPr/>
+        </p:nvSpPr>
+        <p:spPr>
+          <a:xfrm>
+            <a:off x="548640" y="3044952"/>
+            <a:ext cx="6705295" cy="841248"/>
           </a:xfrm>
           <a:prstGeom prst="roundRect">
             <a:avLst>
@@ -13658,13 +14872,13 @@
       </p:sp>
       <p:sp>
         <p:nvSpPr>
-          <p:cNvPr id="12" name="Shape 8"/>
-          <p:cNvSpPr/>
-          <p:nvPr/>
-        </p:nvSpPr>
-        <p:spPr>
-          <a:xfrm>
-            <a:off x="11167567" y="2212848"/>
+          <p:cNvPr id="13" name="Shape 10"/>
+          <p:cNvSpPr/>
+          <p:nvPr/>
+        </p:nvSpPr>
+        <p:spPr>
+          <a:xfrm>
+            <a:off x="6778447" y="3172968"/>
             <a:ext cx="256032" cy="256032"/>
           </a:xfrm>
           <a:prstGeom prst="ellipse">
@@ -13678,13 +14892,13 @@
       </p:sp>
       <p:sp>
         <p:nvSpPr>
-          <p:cNvPr id="13" name="Text 9"/>
-          <p:cNvSpPr txBox="1"/>
-          <p:nvPr/>
-        </p:nvSpPr>
-        <p:spPr>
-          <a:xfrm>
-            <a:off x="11167567" y="2212848"/>
+          <p:cNvPr id="14" name="Text 11"/>
+          <p:cNvSpPr txBox="1"/>
+          <p:nvPr/>
+        </p:nvSpPr>
+        <p:spPr>
+          <a:xfrm>
+            <a:off x="6778447" y="3172968"/>
             <a:ext cx="256032" cy="256032"/>
           </a:xfrm>
           <a:prstGeom prst="rect">
@@ -13709,7 +14923,7 @@
                 <a:ea typeface="Arial" pitchFamily="34" charset="-122"/>
                 <a:cs typeface="Arial" pitchFamily="34" charset="-120"/>
               </a:rPr>
-              <a:t>1</a:t>
+              <a:t>2</a:t>
             </a:r>
             <a:endParaRPr lang="en-US" sz="1100" dirty="0"/>
           </a:p>
@@ -13717,14 +14931,14 @@
       </p:sp>
       <p:sp>
         <p:nvSpPr>
-          <p:cNvPr id="14" name="Text 10"/>
-          <p:cNvSpPr txBox="1"/>
-          <p:nvPr/>
-        </p:nvSpPr>
-        <p:spPr>
-          <a:xfrm>
-            <a:off x="8049463" y="2194560"/>
-            <a:ext cx="3017520" cy="256032"/>
+          <p:cNvPr id="15" name="Text 12"/>
+          <p:cNvSpPr txBox="1"/>
+          <p:nvPr/>
+        </p:nvSpPr>
+        <p:spPr>
+          <a:xfrm>
+            <a:off x="749808" y="3154680"/>
+            <a:ext cx="5928055" cy="256032"/>
           </a:xfrm>
           <a:prstGeom prst="rect">
             <a:avLst/>
@@ -13748,7 +14962,7 @@
                 <a:ea typeface="Arial" pitchFamily="34" charset="-122"/>
                 <a:cs typeface="Arial" pitchFamily="34" charset="-120"/>
               </a:rPr>
-              <a:t>يعلن العدد</a:t>
+              <a:t>الإجابة جملة أولًا</a:t>
             </a:r>
             <a:endParaRPr lang="en-US" sz="1300" dirty="0"/>
           </a:p>
@@ -13756,14 +14970,14 @@
       </p:sp>
       <p:sp>
         <p:nvSpPr>
-          <p:cNvPr id="15" name="Text 11"/>
-          <p:cNvSpPr txBox="1"/>
-          <p:nvPr/>
-        </p:nvSpPr>
-        <p:spPr>
-          <a:xfrm>
-            <a:off x="8049463" y="2468880"/>
-            <a:ext cx="3392424" cy="402336"/>
+          <p:cNvPr id="16" name="Text 13"/>
+          <p:cNvSpPr txBox="1"/>
+          <p:nvPr/>
+        </p:nvSpPr>
+        <p:spPr>
+          <a:xfrm>
+            <a:off x="749808" y="3429000"/>
+            <a:ext cx="6302959" cy="402336"/>
           </a:xfrm>
           <a:prstGeom prst="rect">
             <a:avLst/>
@@ -13790,7 +15004,7 @@
                 <a:ea typeface="Arial" pitchFamily="34" charset="-122"/>
                 <a:cs typeface="Arial" pitchFamily="34" charset="-120"/>
               </a:rPr>
-              <a:t>أربعة أشخاص يطابقون الاسم، ولا يختار الأول ويجيب بثقة</a:t>
+              <a:t>«عدد السكان الفعّالين في مخيم السلام هو 199 شخصًا»: رقم من الجدول لا تقدير</a:t>
             </a:r>
             <a:endParaRPr lang="en-US" sz="1050" dirty="0"/>
           </a:p>
@@ -13798,14 +15012,14 @@
       </p:sp>
       <p:sp>
         <p:nvSpPr>
-          <p:cNvPr id="16" name="Shape 12"/>
-          <p:cNvSpPr/>
-          <p:nvPr/>
-        </p:nvSpPr>
-        <p:spPr>
-          <a:xfrm>
-            <a:off x="7848295" y="3044952"/>
-            <a:ext cx="3794760" cy="841248"/>
+          <p:cNvPr id="17" name="Shape 14"/>
+          <p:cNvSpPr/>
+          <p:nvPr/>
+        </p:nvSpPr>
+        <p:spPr>
+          <a:xfrm>
+            <a:off x="548640" y="4005072"/>
+            <a:ext cx="6705295" cy="841248"/>
           </a:xfrm>
           <a:prstGeom prst="roundRect">
             <a:avLst>
@@ -13827,33 +15041,33 @@
       </p:sp>
       <p:sp>
         <p:nvSpPr>
-          <p:cNvPr id="17" name="Shape 13"/>
-          <p:cNvSpPr/>
-          <p:nvPr/>
-        </p:nvSpPr>
-        <p:spPr>
-          <a:xfrm>
-            <a:off x="11167567" y="3172968"/>
+          <p:cNvPr id="18" name="Shape 15"/>
+          <p:cNvSpPr/>
+          <p:nvPr/>
+        </p:nvSpPr>
+        <p:spPr>
+          <a:xfrm>
+            <a:off x="6778447" y="4133088"/>
             <a:ext cx="256032" cy="256032"/>
           </a:xfrm>
           <a:prstGeom prst="ellipse">
             <a:avLst/>
           </a:prstGeom>
           <a:solidFill>
-            <a:srgbClr val="E9A13B"/>
-          </a:solidFill>
-          <a:ln/>
-        </p:spPr>
-      </p:sp>
-      <p:sp>
-        <p:nvSpPr>
-          <p:cNvPr id="18" name="Text 14"/>
-          <p:cNvSpPr txBox="1"/>
-          <p:nvPr/>
-        </p:nvSpPr>
-        <p:spPr>
-          <a:xfrm>
-            <a:off x="11167567" y="3172968"/>
+            <a:srgbClr val="02717D"/>
+          </a:solidFill>
+          <a:ln/>
+        </p:spPr>
+      </p:sp>
+      <p:sp>
+        <p:nvSpPr>
+          <p:cNvPr id="19" name="Text 16"/>
+          <p:cNvSpPr txBox="1"/>
+          <p:nvPr/>
+        </p:nvSpPr>
+        <p:spPr>
+          <a:xfrm>
+            <a:off x="6778447" y="4133088"/>
             <a:ext cx="256032" cy="256032"/>
           </a:xfrm>
           <a:prstGeom prst="rect">
@@ -13878,7 +15092,7 @@
                 <a:ea typeface="Arial" pitchFamily="34" charset="-122"/>
                 <a:cs typeface="Arial" pitchFamily="34" charset="-120"/>
               </a:rPr>
-              <a:t>2</a:t>
+              <a:t>3</a:t>
             </a:r>
             <a:endParaRPr lang="en-US" sz="1100" dirty="0"/>
           </a:p>
@@ -13886,14 +15100,14 @@
       </p:sp>
       <p:sp>
         <p:nvSpPr>
-          <p:cNvPr id="19" name="Text 15"/>
-          <p:cNvSpPr txBox="1"/>
-          <p:nvPr/>
-        </p:nvSpPr>
-        <p:spPr>
-          <a:xfrm>
-            <a:off x="8049463" y="3154680"/>
-            <a:ext cx="3017520" cy="256032"/>
+          <p:cNvPr id="20" name="Text 17"/>
+          <p:cNvSpPr txBox="1"/>
+          <p:nvPr/>
+        </p:nvSpPr>
+        <p:spPr>
+          <a:xfrm>
+            <a:off x="749808" y="4114800"/>
+            <a:ext cx="5928055" cy="256032"/>
           </a:xfrm>
           <a:prstGeom prst="rect">
             <a:avLst/>
@@ -13917,7 +15131,7 @@
                 <a:ea typeface="Arial" pitchFamily="34" charset="-122"/>
                 <a:cs typeface="Arial" pitchFamily="34" charset="-120"/>
               </a:rPr>
-              <a:t>يشرح كيف تُضيَّق</a:t>
+              <a:t>الأرقام المساندة</a:t>
             </a:r>
             <a:endParaRPr lang="en-US" sz="1300" dirty="0"/>
           </a:p>
@@ -13925,14 +15139,14 @@
       </p:sp>
       <p:sp>
         <p:nvSpPr>
-          <p:cNvPr id="20" name="Text 16"/>
-          <p:cNvSpPr txBox="1"/>
-          <p:nvPr/>
-        </p:nvSpPr>
-        <p:spPr>
-          <a:xfrm>
-            <a:off x="8049463" y="3429000"/>
-            <a:ext cx="3392424" cy="402336"/>
+          <p:cNvPr id="21" name="Text 18"/>
+          <p:cNvSpPr txBox="1"/>
+          <p:nvPr/>
+        </p:nvSpPr>
+        <p:spPr>
+          <a:xfrm>
+            <a:off x="749808" y="4389120"/>
+            <a:ext cx="6302959" cy="402336"/>
           </a:xfrm>
           <a:prstGeom prst="rect">
             <a:avLst/>
@@ -13959,7 +15173,7 @@
                 <a:ea typeface="Arial" pitchFamily="34" charset="-122"/>
                 <a:cs typeface="Arial" pitchFamily="34" charset="-120"/>
               </a:rPr>
-              <a:t>«اكتب الاسم الثلاثي كاملًا أو رقم الوثيقة»: نصيحة قابلة للتنفيذ ومُختبَرة</a:t>
+              <a:t>إجمالي السكان، وداخل المخيم، وخارجه: تفصيل يجيب السؤال التالي قبل أن يُطرح</a:t>
             </a:r>
             <a:endParaRPr lang="en-US" sz="1050" dirty="0"/>
           </a:p>
@@ -13967,14 +15181,14 @@
       </p:sp>
       <p:sp>
         <p:nvSpPr>
-          <p:cNvPr id="21" name="Shape 17"/>
-          <p:cNvSpPr/>
-          <p:nvPr/>
-        </p:nvSpPr>
-        <p:spPr>
-          <a:xfrm>
-            <a:off x="7848295" y="4005072"/>
-            <a:ext cx="3794760" cy="841248"/>
+          <p:cNvPr id="22" name="Shape 19"/>
+          <p:cNvSpPr/>
+          <p:nvPr/>
+        </p:nvSpPr>
+        <p:spPr>
+          <a:xfrm>
+            <a:off x="548640" y="4965192"/>
+            <a:ext cx="6705295" cy="841248"/>
           </a:xfrm>
           <a:prstGeom prst="roundRect">
             <a:avLst>
@@ -13996,13 +15210,13 @@
       </p:sp>
       <p:sp>
         <p:nvSpPr>
-          <p:cNvPr id="22" name="Shape 18"/>
-          <p:cNvSpPr/>
-          <p:nvPr/>
-        </p:nvSpPr>
-        <p:spPr>
-          <a:xfrm>
-            <a:off x="11167567" y="4133088"/>
+          <p:cNvPr id="23" name="Shape 20"/>
+          <p:cNvSpPr/>
+          <p:nvPr/>
+        </p:nvSpPr>
+        <p:spPr>
+          <a:xfrm>
+            <a:off x="6778447" y="5093208"/>
             <a:ext cx="256032" cy="256032"/>
           </a:xfrm>
           <a:prstGeom prst="ellipse">
@@ -14016,13 +15230,13 @@
       </p:sp>
       <p:sp>
         <p:nvSpPr>
-          <p:cNvPr id="23" name="Text 19"/>
-          <p:cNvSpPr txBox="1"/>
-          <p:nvPr/>
-        </p:nvSpPr>
-        <p:spPr>
-          <a:xfrm>
-            <a:off x="11167567" y="4133088"/>
+          <p:cNvPr id="24" name="Text 21"/>
+          <p:cNvSpPr txBox="1"/>
+          <p:nvPr/>
+        </p:nvSpPr>
+        <p:spPr>
+          <a:xfrm>
+            <a:off x="6778447" y="5093208"/>
             <a:ext cx="256032" cy="256032"/>
           </a:xfrm>
           <a:prstGeom prst="rect">
@@ -14047,7 +15261,7 @@
                 <a:ea typeface="Arial" pitchFamily="34" charset="-122"/>
                 <a:cs typeface="Arial" pitchFamily="34" charset="-120"/>
               </a:rPr>
-              <a:t>3</a:t>
+              <a:t>4</a:t>
             </a:r>
             <a:endParaRPr lang="en-US" sz="1100" dirty="0"/>
           </a:p>
@@ -14055,14 +15269,14 @@
       </p:sp>
       <p:sp>
         <p:nvSpPr>
-          <p:cNvPr id="24" name="Text 20"/>
-          <p:cNvSpPr txBox="1"/>
-          <p:nvPr/>
-        </p:nvSpPr>
-        <p:spPr>
-          <a:xfrm>
-            <a:off x="8049463" y="4114800"/>
-            <a:ext cx="3017520" cy="256032"/>
+          <p:cNvPr id="25" name="Text 22"/>
+          <p:cNvSpPr txBox="1"/>
+          <p:nvPr/>
+        </p:nvSpPr>
+        <p:spPr>
+          <a:xfrm>
+            <a:off x="749808" y="5074920"/>
+            <a:ext cx="5928055" cy="256032"/>
           </a:xfrm>
           <a:prstGeom prst="rect">
             <a:avLst/>
@@ -14086,7 +15300,7 @@
                 <a:ea typeface="Arial" pitchFamily="34" charset="-122"/>
                 <a:cs typeface="Arial" pitchFamily="34" charset="-120"/>
               </a:rPr>
-              <a:t>يصرّح بالمفقود</a:t>
+              <a:t>أمثلة مقترحة</a:t>
             </a:r>
             <a:endParaRPr lang="en-US" sz="1300" dirty="0"/>
           </a:p>
@@ -14094,14 +15308,14 @@
       </p:sp>
       <p:sp>
         <p:nvSpPr>
-          <p:cNvPr id="25" name="Text 21"/>
-          <p:cNvSpPr txBox="1"/>
-          <p:nvPr/>
-        </p:nvSpPr>
-        <p:spPr>
-          <a:xfrm>
-            <a:off x="8049463" y="4389120"/>
-            <a:ext cx="3392424" cy="402336"/>
+          <p:cNvPr id="26" name="Text 23"/>
+          <p:cNvSpPr txBox="1"/>
+          <p:nvPr/>
+        </p:nvSpPr>
+        <p:spPr>
+          <a:xfrm>
+            <a:off x="749808" y="5349240"/>
+            <a:ext cx="6302959" cy="402336"/>
           </a:xfrm>
           <a:prstGeom prst="rect">
             <a:avLst/>
@@ -14128,239 +15342,9 @@
                 <a:ea typeface="Arial" pitchFamily="34" charset="-122"/>
                 <a:cs typeface="Arial" pitchFamily="34" charset="-120"/>
               </a:rPr>
-              <a:t>مخيم غير مسجّل يُقال صراحةً، ولا يُستبدل بإجمالي المخيمات</a:t>
+              <a:t>الشرائح أعلى المحادثة أسئلة يفهمها النظام، مفلترة بدور المستخدم</a:t>
             </a:r>
             <a:endParaRPr lang="en-US" sz="1050" dirty="0"/>
-          </a:p>
-        </p:txBody>
-      </p:sp>
-      <p:sp>
-        <p:nvSpPr>
-          <p:cNvPr id="26" name="Shape 22"/>
-          <p:cNvSpPr/>
-          <p:nvPr/>
-        </p:nvSpPr>
-        <p:spPr>
-          <a:xfrm>
-            <a:off x="7848295" y="4965192"/>
-            <a:ext cx="3794760" cy="841248"/>
-          </a:xfrm>
-          <a:prstGeom prst="roundRect">
-            <a:avLst>
-              <a:gd name="adj" fmla="val 9783"/>
-            </a:avLst>
-          </a:prstGeom>
-          <a:solidFill>
-            <a:srgbClr val="FFFFFF"/>
-          </a:solidFill>
-          <a:ln/>
-          <a:effectLst>
-            <a:outerShdw sx="100000" sy="100000" kx="0" ky="0" algn="bl" rotWithShape="0" blurRad="127000" dist="25400" dir="5400000">
-              <a:srgbClr val="0A2E36">
-                <a:alpha val="10000"/>
-              </a:srgbClr>
-            </a:outerShdw>
-          </a:effectLst>
-        </p:spPr>
-      </p:sp>
-      <p:sp>
-        <p:nvSpPr>
-          <p:cNvPr id="27" name="Shape 23"/>
-          <p:cNvSpPr/>
-          <p:nvPr/>
-        </p:nvSpPr>
-        <p:spPr>
-          <a:xfrm>
-            <a:off x="11167567" y="5093208"/>
-            <a:ext cx="256032" cy="256032"/>
-          </a:xfrm>
-          <a:prstGeom prst="ellipse">
-            <a:avLst/>
-          </a:prstGeom>
-          <a:solidFill>
-            <a:srgbClr val="02717D"/>
-          </a:solidFill>
-          <a:ln/>
-        </p:spPr>
-      </p:sp>
-      <p:sp>
-        <p:nvSpPr>
-          <p:cNvPr id="28" name="Text 24"/>
-          <p:cNvSpPr txBox="1"/>
-          <p:nvPr/>
-        </p:nvSpPr>
-        <p:spPr>
-          <a:xfrm>
-            <a:off x="11167567" y="5093208"/>
-            <a:ext cx="256032" cy="256032"/>
-          </a:xfrm>
-          <a:prstGeom prst="rect">
-            <a:avLst/>
-          </a:prstGeom>
-          <a:noFill/>
-          <a:ln/>
-        </p:spPr>
-        <p:txBody>
-          <a:bodyPr wrap="square" lIns="0" tIns="0" rIns="0" bIns="0" rtlCol="0" anchor="ctr"/>
-          <a:lstStyle/>
-          <a:p>
-            <a:pPr rtl="1" algn="ctr" indent="0" marL="0">
-              <a:buNone/>
-            </a:pPr>
-            <a:r>
-              <a:rPr lang="en-US" sz="1100" b="1" dirty="0">
-                <a:solidFill>
-                  <a:srgbClr val="FFFFFF"/>
-                </a:solidFill>
-                <a:latin typeface="Arial" pitchFamily="34" charset="0"/>
-                <a:ea typeface="Arial" pitchFamily="34" charset="-122"/>
-                <a:cs typeface="Arial" pitchFamily="34" charset="-120"/>
-              </a:rPr>
-              <a:t>4</a:t>
-            </a:r>
-            <a:endParaRPr lang="en-US" sz="1100" dirty="0"/>
-          </a:p>
-        </p:txBody>
-      </p:sp>
-      <p:sp>
-        <p:nvSpPr>
-          <p:cNvPr id="29" name="Text 25"/>
-          <p:cNvSpPr txBox="1"/>
-          <p:nvPr/>
-        </p:nvSpPr>
-        <p:spPr>
-          <a:xfrm>
-            <a:off x="8049463" y="5074920"/>
-            <a:ext cx="3017520" cy="256032"/>
-          </a:xfrm>
-          <a:prstGeom prst="rect">
-            <a:avLst/>
-          </a:prstGeom>
-          <a:noFill/>
-          <a:ln/>
-        </p:spPr>
-        <p:txBody>
-          <a:bodyPr wrap="square" lIns="0" tIns="0" rIns="0" bIns="0" rtlCol="0" anchor="ctr"/>
-          <a:lstStyle/>
-          <a:p>
-            <a:pPr rtl="1" algn="r" indent="0" marL="0">
-              <a:buNone/>
-            </a:pPr>
-            <a:r>
-              <a:rPr lang="en-US" sz="1300" b="1" dirty="0">
-                <a:solidFill>
-                  <a:srgbClr val="16292E"/>
-                </a:solidFill>
-                <a:latin typeface="Arial" pitchFamily="34" charset="0"/>
-                <a:ea typeface="Arial" pitchFamily="34" charset="-122"/>
-                <a:cs typeface="Arial" pitchFamily="34" charset="-120"/>
-              </a:rPr>
-              <a:t>يعرض البدائل</a:t>
-            </a:r>
-            <a:endParaRPr lang="en-US" sz="1300" dirty="0"/>
-          </a:p>
-        </p:txBody>
-      </p:sp>
-      <p:sp>
-        <p:nvSpPr>
-          <p:cNvPr id="30" name="Text 26"/>
-          <p:cNvSpPr txBox="1"/>
-          <p:nvPr/>
-        </p:nvSpPr>
-        <p:spPr>
-          <a:xfrm>
-            <a:off x="8049463" y="5349240"/>
-            <a:ext cx="3392424" cy="402336"/>
-          </a:xfrm>
-          <a:prstGeom prst="rect">
-            <a:avLst/>
-          </a:prstGeom>
-          <a:noFill/>
-          <a:ln/>
-        </p:spPr>
-        <p:txBody>
-          <a:bodyPr wrap="square" lIns="0" tIns="0" rIns="0" bIns="0" rtlCol="0" anchor="ctr"/>
-          <a:lstStyle/>
-          <a:p>
-            <a:pPr rtl="1" algn="r" indent="0" marL="0">
-              <a:lnSpc>
-                <a:spcPts val="1400"/>
-              </a:lnSpc>
-              <a:buNone/>
-            </a:pPr>
-            <a:r>
-              <a:rPr lang="en-US" sz="1050" dirty="0">
-                <a:solidFill>
-                  <a:srgbClr val="5C7378"/>
-                </a:solidFill>
-                <a:latin typeface="Arial" pitchFamily="34" charset="0"/>
-                <a:ea typeface="Arial" pitchFamily="34" charset="-122"/>
-                <a:cs typeface="Arial" pitchFamily="34" charset="-120"/>
-              </a:rPr>
-              <a:t>المخيمات المسجّلة فعلًا، لأن السبب الأغلب اختلاف في التسمية</a:t>
-            </a:r>
-            <a:endParaRPr lang="en-US" sz="1050" dirty="0"/>
-          </a:p>
-        </p:txBody>
-      </p:sp>
-      <p:sp>
-        <p:nvSpPr>
-          <p:cNvPr id="31" name="Shape 27"/>
-          <p:cNvSpPr/>
-          <p:nvPr/>
-        </p:nvSpPr>
-        <p:spPr>
-          <a:xfrm>
-            <a:off x="548640" y="6053328"/>
-            <a:ext cx="11094415" cy="658368"/>
-          </a:xfrm>
-          <a:prstGeom prst="roundRect">
-            <a:avLst>
-              <a:gd name="adj" fmla="val 12500"/>
-            </a:avLst>
-          </a:prstGeom>
-          <a:solidFill>
-            <a:srgbClr val="0A2E36"/>
-          </a:solidFill>
-          <a:ln/>
-        </p:spPr>
-      </p:sp>
-      <p:sp>
-        <p:nvSpPr>
-          <p:cNvPr id="32" name="Text 28"/>
-          <p:cNvSpPr txBox="1"/>
-          <p:nvPr/>
-        </p:nvSpPr>
-        <p:spPr>
-          <a:xfrm>
-            <a:off x="822960" y="6053328"/>
-            <a:ext cx="10545775" cy="658368"/>
-          </a:xfrm>
-          <a:prstGeom prst="rect">
-            <a:avLst/>
-          </a:prstGeom>
-          <a:noFill/>
-          <a:ln/>
-        </p:spPr>
-        <p:txBody>
-          <a:bodyPr wrap="square" lIns="0" tIns="0" rIns="0" bIns="0" rtlCol="0" anchor="ctr"/>
-          <a:lstStyle/>
-          <a:p>
-            <a:pPr rtl="1" algn="ctr" indent="0" marL="0">
-              <a:buNone/>
-            </a:pPr>
-            <a:r>
-              <a:rPr lang="en-US" sz="1100" dirty="0">
-                <a:solidFill>
-                  <a:srgbClr val="BFD4D7"/>
-                </a:solidFill>
-                <a:latin typeface="Arial" pitchFamily="34" charset="0"/>
-                <a:ea typeface="Arial" pitchFamily="34" charset="-122"/>
-                <a:cs typeface="Arial" pitchFamily="34" charset="-120"/>
-              </a:rPr>
-              <a:t>وحالتان أخريان: «لم أجد» تُقال بنبرة تختلف عن «صفر»، والسؤال غير المفهوم يُمرَّر إلى البحث الشامل ثم تُعرض أمثلة يفهمها النظام</a:t>
-            </a:r>
-            <a:endParaRPr lang="en-US" sz="1100" dirty="0"/>
           </a:p>
         </p:txBody>
       </p:sp>
@@ -14468,7 +15452,7 @@
                 <a:ea typeface="Arial" pitchFamily="34" charset="-122"/>
                 <a:cs typeface="Arial" pitchFamily="34" charset="-120"/>
               </a:rPr>
-              <a:t>معالجة الاستثناءات — شبكة الأمان الأخيرة</a:t>
+              <a:t>التدهور الآمن — حين لا توجد إجابة واحدة</a:t>
             </a:r>
             <a:endParaRPr lang="en-US" sz="3300" dirty="0"/>
           </a:p>
@@ -14476,614 +15460,57 @@
       </p:sp>
       <p:sp>
         <p:nvSpPr>
-          <p:cNvPr id="4" name="Shape 2"/>
-          <p:cNvSpPr/>
-          <p:nvPr/>
-        </p:nvSpPr>
-        <p:spPr>
-          <a:xfrm>
-            <a:off x="548640" y="1572768"/>
-            <a:ext cx="5943600" cy="3310128"/>
+          <p:cNvPr id="4" name="Text 2"/>
+          <p:cNvSpPr txBox="1"/>
+          <p:nvPr/>
+        </p:nvSpPr>
+        <p:spPr>
+          <a:xfrm>
+            <a:off x="4693615" y="1572768"/>
+            <a:ext cx="2697480" cy="274320"/>
+          </a:xfrm>
+          <a:prstGeom prst="rect">
+            <a:avLst/>
+          </a:prstGeom>
+          <a:noFill/>
+          <a:ln/>
+        </p:spPr>
+        <p:txBody>
+          <a:bodyPr wrap="square" lIns="0" tIns="0" rIns="0" bIns="0" rtlCol="0" anchor="ctr"/>
+          <a:lstStyle/>
+          <a:p>
+            <a:pPr rtl="1" algn="ctr" indent="0" marL="0">
+              <a:buNone/>
+            </a:pPr>
+            <a:r>
+              <a:rPr lang="en-US" sz="1150" b="1" dirty="0">
+                <a:solidFill>
+                  <a:srgbClr val="B4761C"/>
+                </a:solidFill>
+                <a:latin typeface="Arial" pitchFamily="34" charset="0"/>
+                <a:ea typeface="Arial" pitchFamily="34" charset="-122"/>
+                <a:cs typeface="Arial" pitchFamily="34" charset="-120"/>
+              </a:rPr>
+              <a:t>الحالة ١ · اسم ملتبس</a:t>
+            </a:r>
+            <a:endParaRPr lang="en-US" sz="1150" dirty="0"/>
+          </a:p>
+        </p:txBody>
+      </p:sp>
+      <p:sp>
+        <p:nvSpPr>
+          <p:cNvPr id="5" name="Shape 3"/>
+          <p:cNvSpPr/>
+          <p:nvPr/>
+        </p:nvSpPr>
+        <p:spPr>
+          <a:xfrm>
+            <a:off x="4638751" y="1847088"/>
+            <a:ext cx="2807208" cy="4128973"/>
           </a:xfrm>
           <a:prstGeom prst="roundRect">
             <a:avLst>
-              <a:gd name="adj" fmla="val 2762"/>
-            </a:avLst>
-          </a:prstGeom>
-          <a:solidFill>
-            <a:srgbClr val="0A2E36"/>
-          </a:solidFill>
-          <a:ln/>
-        </p:spPr>
-      </p:sp>
-      <p:sp>
-        <p:nvSpPr>
-          <p:cNvPr id="5" name="Text 3"/>
-          <p:cNvSpPr txBox="1"/>
-          <p:nvPr/>
-        </p:nvSpPr>
-        <p:spPr>
-          <a:xfrm>
-            <a:off x="822960" y="1719072"/>
-            <a:ext cx="5394960" cy="237744"/>
-          </a:xfrm>
-          <a:prstGeom prst="rect">
-            <a:avLst/>
-          </a:prstGeom>
-          <a:noFill/>
-          <a:ln/>
-        </p:spPr>
-        <p:txBody>
-          <a:bodyPr wrap="square" lIns="0" tIns="0" rIns="0" bIns="0" rtlCol="0" anchor="ctr"/>
-          <a:lstStyle/>
-          <a:p>
-            <a:pPr algn="l" indent="0" marL="0">
-              <a:buNone/>
-            </a:pPr>
-            <a:r>
-              <a:rPr lang="en-US" sz="1000" b="1" dirty="0">
-                <a:solidFill>
-                  <a:srgbClr val="00A896"/>
-                </a:solidFill>
-                <a:latin typeface="Arial" pitchFamily="34" charset="0"/>
-                <a:ea typeface="Arial" pitchFamily="34" charset="-122"/>
-                <a:cs typeface="Arial" pitchFamily="34" charset="-120"/>
-              </a:rPr>
-              <a:t>AssistantController::ask()</a:t>
-            </a:r>
-            <a:endParaRPr lang="en-US" sz="1000" dirty="0"/>
-          </a:p>
-        </p:txBody>
-      </p:sp>
-      <p:sp>
-        <p:nvSpPr>
-          <p:cNvPr id="6" name="Text 4"/>
-          <p:cNvSpPr txBox="1"/>
-          <p:nvPr/>
-        </p:nvSpPr>
-        <p:spPr>
-          <a:xfrm>
-            <a:off x="822960" y="2048256"/>
-            <a:ext cx="5394960" cy="201168"/>
-          </a:xfrm>
-          <a:prstGeom prst="rect">
-            <a:avLst/>
-          </a:prstGeom>
-          <a:noFill/>
-          <a:ln/>
-        </p:spPr>
-        <p:txBody>
-          <a:bodyPr wrap="square" lIns="0" tIns="0" rIns="0" bIns="0" rtlCol="0" anchor="ctr"/>
-          <a:lstStyle/>
-          <a:p>
-            <a:pPr algn="l" indent="0" marL="0">
-              <a:buNone/>
-            </a:pPr>
-            <a:r>
-              <a:rPr lang="en-US" sz="950" dirty="0">
-                <a:solidFill>
-                  <a:srgbClr val="BFD4D7"/>
-                </a:solidFill>
-                <a:latin typeface="Courier New" pitchFamily="34" charset="0"/>
-                <a:ea typeface="Courier New" pitchFamily="34" charset="-122"/>
-                <a:cs typeface="Courier New" pitchFamily="34" charset="-120"/>
-              </a:rPr>
-              <a:t>try {</a:t>
-            </a:r>
-            <a:endParaRPr lang="en-US" sz="950" dirty="0"/>
-          </a:p>
-        </p:txBody>
-      </p:sp>
-      <p:sp>
-        <p:nvSpPr>
-          <p:cNvPr id="7" name="Text 5"/>
-          <p:cNvSpPr txBox="1"/>
-          <p:nvPr/>
-        </p:nvSpPr>
-        <p:spPr>
-          <a:xfrm>
-            <a:off x="822960" y="2251253"/>
-            <a:ext cx="5394960" cy="201168"/>
-          </a:xfrm>
-          <a:prstGeom prst="rect">
-            <a:avLst/>
-          </a:prstGeom>
-          <a:noFill/>
-          <a:ln/>
-        </p:spPr>
-        <p:txBody>
-          <a:bodyPr wrap="square" lIns="0" tIns="0" rIns="0" bIns="0" rtlCol="0" anchor="ctr"/>
-          <a:lstStyle/>
-          <a:p>
-            <a:pPr algn="l" indent="0" marL="0">
-              <a:buNone/>
-            </a:pPr>
-            <a:r>
-              <a:rPr lang="en-US" sz="950" dirty="0">
-                <a:solidFill>
-                  <a:srgbClr val="FFFFFF"/>
-                </a:solidFill>
-                <a:latin typeface="Courier New" pitchFamily="34" charset="0"/>
-                <a:ea typeface="Courier New" pitchFamily="34" charset="-122"/>
-                <a:cs typeface="Courier New" pitchFamily="34" charset="-120"/>
-              </a:rPr>
-              <a:t>    $answer = $this-&gt;assistant</a:t>
-            </a:r>
-            <a:endParaRPr lang="en-US" sz="950" dirty="0"/>
-          </a:p>
-        </p:txBody>
-      </p:sp>
-      <p:sp>
-        <p:nvSpPr>
-          <p:cNvPr id="8" name="Text 6"/>
-          <p:cNvSpPr txBox="1"/>
-          <p:nvPr/>
-        </p:nvSpPr>
-        <p:spPr>
-          <a:xfrm>
-            <a:off x="822960" y="2454250"/>
-            <a:ext cx="5394960" cy="201168"/>
-          </a:xfrm>
-          <a:prstGeom prst="rect">
-            <a:avLst/>
-          </a:prstGeom>
-          <a:noFill/>
-          <a:ln/>
-        </p:spPr>
-        <p:txBody>
-          <a:bodyPr wrap="square" lIns="0" tIns="0" rIns="0" bIns="0" rtlCol="0" anchor="ctr"/>
-          <a:lstStyle/>
-          <a:p>
-            <a:pPr algn="l" indent="0" marL="0">
-              <a:buNone/>
-            </a:pPr>
-            <a:r>
-              <a:rPr lang="en-US" sz="950" dirty="0">
-                <a:solidFill>
-                  <a:srgbClr val="FFFFFF"/>
-                </a:solidFill>
-                <a:latin typeface="Courier New" pitchFamily="34" charset="0"/>
-                <a:ea typeface="Courier New" pitchFamily="34" charset="-122"/>
-                <a:cs typeface="Courier New" pitchFamily="34" charset="-120"/>
-              </a:rPr>
-              <a:t>        -&gt;ask($question, $request-&gt;user())</a:t>
-            </a:r>
-            <a:endParaRPr lang="en-US" sz="950" dirty="0"/>
-          </a:p>
-        </p:txBody>
-      </p:sp>
-      <p:sp>
-        <p:nvSpPr>
-          <p:cNvPr id="9" name="Text 7"/>
-          <p:cNvSpPr txBox="1"/>
-          <p:nvPr/>
-        </p:nvSpPr>
-        <p:spPr>
-          <a:xfrm>
-            <a:off x="822960" y="2657246"/>
-            <a:ext cx="5394960" cy="201168"/>
-          </a:xfrm>
-          <a:prstGeom prst="rect">
-            <a:avLst/>
-          </a:prstGeom>
-          <a:noFill/>
-          <a:ln/>
-        </p:spPr>
-        <p:txBody>
-          <a:bodyPr wrap="square" lIns="0" tIns="0" rIns="0" bIns="0" rtlCol="0" anchor="ctr"/>
-          <a:lstStyle/>
-          <a:p>
-            <a:pPr algn="l" indent="0" marL="0">
-              <a:buNone/>
-            </a:pPr>
-            <a:r>
-              <a:rPr lang="en-US" sz="950" dirty="0">
-                <a:solidFill>
-                  <a:srgbClr val="FFFFFF"/>
-                </a:solidFill>
-                <a:latin typeface="Courier New" pitchFamily="34" charset="0"/>
-                <a:ea typeface="Courier New" pitchFamily="34" charset="-122"/>
-                <a:cs typeface="Courier New" pitchFamily="34" charset="-120"/>
-              </a:rPr>
-              <a:t>        -&gt;toArray();</a:t>
-            </a:r>
-            <a:endParaRPr lang="en-US" sz="950" dirty="0"/>
-          </a:p>
-        </p:txBody>
-      </p:sp>
-      <p:sp>
-        <p:nvSpPr>
-          <p:cNvPr id="10" name="Text 8"/>
-          <p:cNvSpPr txBox="1"/>
-          <p:nvPr/>
-        </p:nvSpPr>
-        <p:spPr>
-          <a:xfrm>
-            <a:off x="822960" y="2860243"/>
-            <a:ext cx="5394960" cy="201168"/>
-          </a:xfrm>
-          <a:prstGeom prst="rect">
-            <a:avLst/>
-          </a:prstGeom>
-          <a:noFill/>
-          <a:ln/>
-        </p:spPr>
-        <p:txBody>
-          <a:bodyPr wrap="square" lIns="0" tIns="0" rIns="0" bIns="0" rtlCol="0" anchor="ctr"/>
-          <a:lstStyle/>
-          <a:p>
-            <a:pPr algn="l" indent="0" marL="0">
-              <a:buNone/>
-            </a:pPr>
-            <a:r>
-              <a:rPr lang="en-US" sz="950" dirty="0">
-                <a:solidFill>
-                  <a:srgbClr val="E9A13B"/>
-                </a:solidFill>
-                <a:latin typeface="Courier New" pitchFamily="34" charset="0"/>
-                <a:ea typeface="Courier New" pitchFamily="34" charset="-122"/>
-                <a:cs typeface="Courier New" pitchFamily="34" charset="-120"/>
-              </a:rPr>
-              <a:t>} catch (Throwable $e) {</a:t>
-            </a:r>
-            <a:endParaRPr lang="en-US" sz="950" dirty="0"/>
-          </a:p>
-        </p:txBody>
-      </p:sp>
-      <p:sp>
-        <p:nvSpPr>
-          <p:cNvPr id="11" name="Text 9"/>
-          <p:cNvSpPr txBox="1"/>
-          <p:nvPr/>
-        </p:nvSpPr>
-        <p:spPr>
-          <a:xfrm>
-            <a:off x="822960" y="3063240"/>
-            <a:ext cx="5394960" cy="201168"/>
-          </a:xfrm>
-          <a:prstGeom prst="rect">
-            <a:avLst/>
-          </a:prstGeom>
-          <a:noFill/>
-          <a:ln/>
-        </p:spPr>
-        <p:txBody>
-          <a:bodyPr wrap="square" lIns="0" tIns="0" rIns="0" bIns="0" rtlCol="0" anchor="ctr"/>
-          <a:lstStyle/>
-          <a:p>
-            <a:pPr algn="l" indent="0" marL="0">
-              <a:buNone/>
-            </a:pPr>
-            <a:r>
-              <a:rPr lang="en-US" sz="950" dirty="0">
-                <a:solidFill>
-                  <a:srgbClr val="FFFFFF"/>
-                </a:solidFill>
-                <a:latin typeface="Courier New" pitchFamily="34" charset="0"/>
-                <a:ea typeface="Courier New" pitchFamily="34" charset="-122"/>
-                <a:cs typeface="Courier New" pitchFamily="34" charset="-120"/>
-              </a:rPr>
-              <a:t>    Log::error('Assistant failed to answer', [</a:t>
-            </a:r>
-            <a:endParaRPr lang="en-US" sz="950" dirty="0"/>
-          </a:p>
-        </p:txBody>
-      </p:sp>
-      <p:sp>
-        <p:nvSpPr>
-          <p:cNvPr id="12" name="Text 10"/>
-          <p:cNvSpPr txBox="1"/>
-          <p:nvPr/>
-        </p:nvSpPr>
-        <p:spPr>
-          <a:xfrm>
-            <a:off x="822960" y="3266237"/>
-            <a:ext cx="5394960" cy="201168"/>
-          </a:xfrm>
-          <a:prstGeom prst="rect">
-            <a:avLst/>
-          </a:prstGeom>
-          <a:noFill/>
-          <a:ln/>
-        </p:spPr>
-        <p:txBody>
-          <a:bodyPr wrap="square" lIns="0" tIns="0" rIns="0" bIns="0" rtlCol="0" anchor="ctr"/>
-          <a:lstStyle/>
-          <a:p>
-            <a:pPr algn="l" indent="0" marL="0">
-              <a:buNone/>
-            </a:pPr>
-            <a:r>
-              <a:rPr lang="en-US" sz="950" dirty="0">
-                <a:solidFill>
-                  <a:srgbClr val="FFFFFF"/>
-                </a:solidFill>
-                <a:latin typeface="Courier New" pitchFamily="34" charset="0"/>
-                <a:ea typeface="Courier New" pitchFamily="34" charset="-122"/>
-                <a:cs typeface="Courier New" pitchFamily="34" charset="-120"/>
-              </a:rPr>
-              <a:t>        'question'  =&gt; $question,</a:t>
-            </a:r>
-            <a:endParaRPr lang="en-US" sz="950" dirty="0"/>
-          </a:p>
-        </p:txBody>
-      </p:sp>
-      <p:sp>
-        <p:nvSpPr>
-          <p:cNvPr id="13" name="Text 11"/>
-          <p:cNvSpPr txBox="1"/>
-          <p:nvPr/>
-        </p:nvSpPr>
-        <p:spPr>
-          <a:xfrm>
-            <a:off x="822960" y="3469234"/>
-            <a:ext cx="5394960" cy="201168"/>
-          </a:xfrm>
-          <a:prstGeom prst="rect">
-            <a:avLst/>
-          </a:prstGeom>
-          <a:noFill/>
-          <a:ln/>
-        </p:spPr>
-        <p:txBody>
-          <a:bodyPr wrap="square" lIns="0" tIns="0" rIns="0" bIns="0" rtlCol="0" anchor="ctr"/>
-          <a:lstStyle/>
-          <a:p>
-            <a:pPr algn="l" indent="0" marL="0">
-              <a:buNone/>
-            </a:pPr>
-            <a:r>
-              <a:rPr lang="en-US" sz="950" dirty="0">
-                <a:solidFill>
-                  <a:srgbClr val="FFFFFF"/>
-                </a:solidFill>
-                <a:latin typeface="Courier New" pitchFamily="34" charset="0"/>
-                <a:ea typeface="Courier New" pitchFamily="34" charset="-122"/>
-                <a:cs typeface="Courier New" pitchFamily="34" charset="-120"/>
-              </a:rPr>
-              <a:t>        'user_id'   =&gt; $request-&gt;user()?-&gt;id,</a:t>
-            </a:r>
-            <a:endParaRPr lang="en-US" sz="950" dirty="0"/>
-          </a:p>
-        </p:txBody>
-      </p:sp>
-      <p:sp>
-        <p:nvSpPr>
-          <p:cNvPr id="14" name="Text 12"/>
-          <p:cNvSpPr txBox="1"/>
-          <p:nvPr/>
-        </p:nvSpPr>
-        <p:spPr>
-          <a:xfrm>
-            <a:off x="822960" y="3672230"/>
-            <a:ext cx="5394960" cy="201168"/>
-          </a:xfrm>
-          <a:prstGeom prst="rect">
-            <a:avLst/>
-          </a:prstGeom>
-          <a:noFill/>
-          <a:ln/>
-        </p:spPr>
-        <p:txBody>
-          <a:bodyPr wrap="square" lIns="0" tIns="0" rIns="0" bIns="0" rtlCol="0" anchor="ctr"/>
-          <a:lstStyle/>
-          <a:p>
-            <a:pPr algn="l" indent="0" marL="0">
-              <a:buNone/>
-            </a:pPr>
-            <a:r>
-              <a:rPr lang="en-US" sz="950" dirty="0">
-                <a:solidFill>
-                  <a:srgbClr val="FFFFFF"/>
-                </a:solidFill>
-                <a:latin typeface="Courier New" pitchFamily="34" charset="0"/>
-                <a:ea typeface="Courier New" pitchFamily="34" charset="-122"/>
-                <a:cs typeface="Courier New" pitchFamily="34" charset="-120"/>
-              </a:rPr>
-              <a:t>        'exception' =&gt; $e,</a:t>
-            </a:r>
-            <a:endParaRPr lang="en-US" sz="950" dirty="0"/>
-          </a:p>
-        </p:txBody>
-      </p:sp>
-      <p:sp>
-        <p:nvSpPr>
-          <p:cNvPr id="15" name="Text 13"/>
-          <p:cNvSpPr txBox="1"/>
-          <p:nvPr/>
-        </p:nvSpPr>
-        <p:spPr>
-          <a:xfrm>
-            <a:off x="822960" y="3875227"/>
-            <a:ext cx="5394960" cy="201168"/>
-          </a:xfrm>
-          <a:prstGeom prst="rect">
-            <a:avLst/>
-          </a:prstGeom>
-          <a:noFill/>
-          <a:ln/>
-        </p:spPr>
-        <p:txBody>
-          <a:bodyPr wrap="square" lIns="0" tIns="0" rIns="0" bIns="0" rtlCol="0" anchor="ctr"/>
-          <a:lstStyle/>
-          <a:p>
-            <a:pPr algn="l" indent="0" marL="0">
-              <a:buNone/>
-            </a:pPr>
-            <a:r>
-              <a:rPr lang="en-US" sz="950" dirty="0">
-                <a:solidFill>
-                  <a:srgbClr val="FFFFFF"/>
-                </a:solidFill>
-                <a:latin typeface="Courier New" pitchFamily="34" charset="0"/>
-                <a:ea typeface="Courier New" pitchFamily="34" charset="-122"/>
-                <a:cs typeface="Courier New" pitchFamily="34" charset="-120"/>
-              </a:rPr>
-              <a:t>    ]);</a:t>
-            </a:r>
-            <a:endParaRPr lang="en-US" sz="950" dirty="0"/>
-          </a:p>
-        </p:txBody>
-      </p:sp>
-      <p:sp>
-        <p:nvSpPr>
-          <p:cNvPr id="16" name="Text 14"/>
-          <p:cNvSpPr txBox="1"/>
-          <p:nvPr/>
-        </p:nvSpPr>
-        <p:spPr>
-          <a:xfrm>
-            <a:off x="822960" y="4078224"/>
-            <a:ext cx="5394960" cy="201168"/>
-          </a:xfrm>
-          <a:prstGeom prst="rect">
-            <a:avLst/>
-          </a:prstGeom>
-          <a:noFill/>
-          <a:ln/>
-        </p:spPr>
-        <p:txBody>
-          <a:bodyPr wrap="square" lIns="0" tIns="0" rIns="0" bIns="0" rtlCol="0" anchor="ctr"/>
-          <a:lstStyle/>
-          <a:p>
-            <a:pPr algn="l" indent="0" marL="0">
-              <a:buNone/>
-            </a:pPr>
-            <a:endParaRPr lang="en-US" sz="950" dirty="0"/>
-          </a:p>
-        </p:txBody>
-      </p:sp>
-      <p:sp>
-        <p:nvSpPr>
-          <p:cNvPr id="17" name="Text 15"/>
-          <p:cNvSpPr txBox="1"/>
-          <p:nvPr/>
-        </p:nvSpPr>
-        <p:spPr>
-          <a:xfrm>
-            <a:off x="822960" y="4281221"/>
-            <a:ext cx="5394960" cy="201168"/>
-          </a:xfrm>
-          <a:prstGeom prst="rect">
-            <a:avLst/>
-          </a:prstGeom>
-          <a:noFill/>
-          <a:ln/>
-        </p:spPr>
-        <p:txBody>
-          <a:bodyPr wrap="square" lIns="0" tIns="0" rIns="0" bIns="0" rtlCol="0" anchor="ctr"/>
-          <a:lstStyle/>
-          <a:p>
-            <a:pPr algn="l" indent="0" marL="0">
-              <a:buNone/>
-            </a:pPr>
-            <a:r>
-              <a:rPr lang="en-US" sz="950" dirty="0">
-                <a:solidFill>
-                  <a:srgbClr val="00A896"/>
-                </a:solidFill>
-                <a:latin typeface="Courier New" pitchFamily="34" charset="0"/>
-                <a:ea typeface="Courier New" pitchFamily="34" charset="-122"/>
-                <a:cs typeface="Courier New" pitchFamily="34" charset="-120"/>
-              </a:rPr>
-              <a:t>    $answer = Answer::failed(/* ... */)</a:t>
-            </a:r>
-            <a:endParaRPr lang="en-US" sz="950" dirty="0"/>
-          </a:p>
-        </p:txBody>
-      </p:sp>
-      <p:sp>
-        <p:nvSpPr>
-          <p:cNvPr id="18" name="Text 16"/>
-          <p:cNvSpPr txBox="1"/>
-          <p:nvPr/>
-        </p:nvSpPr>
-        <p:spPr>
-          <a:xfrm>
-            <a:off x="822960" y="4484218"/>
-            <a:ext cx="5394960" cy="201168"/>
-          </a:xfrm>
-          <a:prstGeom prst="rect">
-            <a:avLst/>
-          </a:prstGeom>
-          <a:noFill/>
-          <a:ln/>
-        </p:spPr>
-        <p:txBody>
-          <a:bodyPr wrap="square" lIns="0" tIns="0" rIns="0" bIns="0" rtlCol="0" anchor="ctr"/>
-          <a:lstStyle/>
-          <a:p>
-            <a:pPr algn="l" indent="0" marL="0">
-              <a:buNone/>
-            </a:pPr>
-            <a:r>
-              <a:rPr lang="en-US" sz="950" dirty="0">
-                <a:solidFill>
-                  <a:srgbClr val="00A896"/>
-                </a:solidFill>
-                <a:latin typeface="Courier New" pitchFamily="34" charset="0"/>
-                <a:ea typeface="Courier New" pitchFamily="34" charset="-122"/>
-                <a:cs typeface="Courier New" pitchFamily="34" charset="-120"/>
-              </a:rPr>
-              <a:t>        -&gt;toArray();</a:t>
-            </a:r>
-            <a:endParaRPr lang="en-US" sz="950" dirty="0"/>
-          </a:p>
-        </p:txBody>
-      </p:sp>
-      <p:sp>
-        <p:nvSpPr>
-          <p:cNvPr id="19" name="Text 17"/>
-          <p:cNvSpPr txBox="1"/>
-          <p:nvPr/>
-        </p:nvSpPr>
-        <p:spPr>
-          <a:xfrm>
-            <a:off x="822960" y="4687214"/>
-            <a:ext cx="5394960" cy="201168"/>
-          </a:xfrm>
-          <a:prstGeom prst="rect">
-            <a:avLst/>
-          </a:prstGeom>
-          <a:noFill/>
-          <a:ln/>
-        </p:spPr>
-        <p:txBody>
-          <a:bodyPr wrap="square" lIns="0" tIns="0" rIns="0" bIns="0" rtlCol="0" anchor="ctr"/>
-          <a:lstStyle/>
-          <a:p>
-            <a:pPr algn="l" indent="0" marL="0">
-              <a:buNone/>
-            </a:pPr>
-            <a:r>
-              <a:rPr lang="en-US" sz="950" dirty="0">
-                <a:solidFill>
-                  <a:srgbClr val="BFD4D7"/>
-                </a:solidFill>
-                <a:latin typeface="Courier New" pitchFamily="34" charset="0"/>
-                <a:ea typeface="Courier New" pitchFamily="34" charset="-122"/>
-                <a:cs typeface="Courier New" pitchFamily="34" charset="-120"/>
-              </a:rPr>
-              <a:t>}</a:t>
-            </a:r>
-            <a:endParaRPr lang="en-US" sz="950" dirty="0"/>
-          </a:p>
-        </p:txBody>
-      </p:sp>
-      <p:sp>
-        <p:nvSpPr>
-          <p:cNvPr id="20" name="Shape 18"/>
-          <p:cNvSpPr/>
-          <p:nvPr/>
-        </p:nvSpPr>
-        <p:spPr>
-          <a:xfrm>
-            <a:off x="6796735" y="1572768"/>
-            <a:ext cx="4846320" cy="914400"/>
-          </a:xfrm>
-          <a:prstGeom prst="roundRect">
-            <a:avLst>
-              <a:gd name="adj" fmla="val 9000"/>
+              <a:gd name="adj" fmla="val 2932"/>
             </a:avLst>
           </a:prstGeom>
           <a:solidFill>
@@ -15099,29 +15526,9 @@
           </a:effectLst>
         </p:spPr>
       </p:sp>
-      <p:sp>
-        <p:nvSpPr>
-          <p:cNvPr id="21" name="Shape 19"/>
-          <p:cNvSpPr/>
-          <p:nvPr/>
-        </p:nvSpPr>
-        <p:spPr>
-          <a:xfrm>
-            <a:off x="11112703" y="1719072"/>
-            <a:ext cx="292608" cy="292608"/>
-          </a:xfrm>
-          <a:prstGeom prst="ellipse">
-            <a:avLst/>
-          </a:prstGeom>
-          <a:solidFill>
-            <a:srgbClr val="00A896"/>
-          </a:solidFill>
-          <a:ln/>
-        </p:spPr>
-      </p:sp>
       <p:pic>
         <p:nvPicPr>
-          <p:cNvPr id="22" name="Image 0" descr="preencoded.png">    </p:cNvPr>
+          <p:cNvPr id="6" name="Image 0" descr="/home/user/Camp_management/docs/screenshots/assistant_panel.png">    </p:cNvPr>
           <p:cNvPicPr>
             <a:picLocks noChangeAspect="1"/>
           </p:cNvPicPr>
@@ -15135,8 +15542,8 @@
         </p:blipFill>
         <p:spPr>
           <a:xfrm>
-            <a:off x="11185855" y="1792224"/>
-            <a:ext cx="146304" cy="146304"/>
+            <a:off x="4693615" y="1901952"/>
+            <a:ext cx="2697480" cy="4019245"/>
           </a:xfrm>
           <a:prstGeom prst="rect">
             <a:avLst/>
@@ -15145,99 +15552,57 @@
       </p:pic>
       <p:sp>
         <p:nvSpPr>
-          <p:cNvPr id="23" name="Text 20"/>
-          <p:cNvSpPr txBox="1"/>
-          <p:nvPr/>
-        </p:nvSpPr>
-        <p:spPr>
-          <a:xfrm>
-            <a:off x="7016191" y="1700784"/>
-            <a:ext cx="3977640" cy="256032"/>
-          </a:xfrm>
-          <a:prstGeom prst="rect">
-            <a:avLst/>
-          </a:prstGeom>
-          <a:noFill/>
-          <a:ln/>
-        </p:spPr>
-        <p:txBody>
-          <a:bodyPr wrap="square" lIns="0" tIns="0" rIns="0" bIns="0" rtlCol="0" anchor="ctr"/>
-          <a:lstStyle/>
-          <a:p>
-            <a:pPr rtl="1" algn="r" indent="0" marL="0">
-              <a:buNone/>
-            </a:pPr>
-            <a:r>
-              <a:rPr lang="en-US" sz="1350" b="1" dirty="0">
-                <a:solidFill>
-                  <a:srgbClr val="16292E"/>
-                </a:solidFill>
-                <a:latin typeface="Arial" pitchFamily="34" charset="0"/>
-                <a:ea typeface="Arial" pitchFamily="34" charset="-122"/>
-                <a:cs typeface="Arial" pitchFamily="34" charset="-120"/>
-              </a:rPr>
-              <a:t>للمستخدم</a:t>
-            </a:r>
-            <a:endParaRPr lang="en-US" sz="1350" dirty="0"/>
-          </a:p>
-        </p:txBody>
-      </p:sp>
-      <p:sp>
-        <p:nvSpPr>
-          <p:cNvPr id="24" name="Text 21"/>
-          <p:cNvSpPr txBox="1"/>
-          <p:nvPr/>
-        </p:nvSpPr>
-        <p:spPr>
-          <a:xfrm>
-            <a:off x="7016191" y="1984248"/>
-            <a:ext cx="4389120" cy="411480"/>
-          </a:xfrm>
-          <a:prstGeom prst="rect">
-            <a:avLst/>
-          </a:prstGeom>
-          <a:noFill/>
-          <a:ln/>
-        </p:spPr>
-        <p:txBody>
-          <a:bodyPr wrap="square" lIns="0" tIns="0" rIns="0" bIns="0" rtlCol="0" anchor="ctr"/>
-          <a:lstStyle/>
-          <a:p>
-            <a:pPr rtl="1" algn="r" indent="0" marL="0">
-              <a:lnSpc>
-                <a:spcPts val="1400"/>
-              </a:lnSpc>
-              <a:buNone/>
-            </a:pPr>
-            <a:r>
-              <a:rPr lang="en-US" sz="1100" dirty="0">
-                <a:solidFill>
-                  <a:srgbClr val="5C7378"/>
-                </a:solidFill>
-                <a:latin typeface="Arial" pitchFamily="34" charset="0"/>
-                <a:ea typeface="Arial" pitchFamily="34" charset="-122"/>
-                <a:cs typeface="Arial" pitchFamily="34" charset="-120"/>
-              </a:rPr>
-              <a:t>جملة عربية لبقة تقترح خطوة بديلة، بحالة ⁦HTTP 200⁩، ودون أي تفصيل تقني</a:t>
-            </a:r>
-            <a:endParaRPr lang="en-US" sz="1100" dirty="0"/>
-          </a:p>
-        </p:txBody>
-      </p:sp>
-      <p:sp>
-        <p:nvSpPr>
-          <p:cNvPr id="25" name="Shape 22"/>
-          <p:cNvSpPr/>
-          <p:nvPr/>
-        </p:nvSpPr>
-        <p:spPr>
-          <a:xfrm>
-            <a:off x="6796735" y="2596896"/>
-            <a:ext cx="4846320" cy="914400"/>
+          <p:cNvPr id="7" name="Text 4"/>
+          <p:cNvSpPr txBox="1"/>
+          <p:nvPr/>
+        </p:nvSpPr>
+        <p:spPr>
+          <a:xfrm>
+            <a:off x="1676095" y="1572768"/>
+            <a:ext cx="2697480" cy="274320"/>
+          </a:xfrm>
+          <a:prstGeom prst="rect">
+            <a:avLst/>
+          </a:prstGeom>
+          <a:noFill/>
+          <a:ln/>
+        </p:spPr>
+        <p:txBody>
+          <a:bodyPr wrap="square" lIns="0" tIns="0" rIns="0" bIns="0" rtlCol="0" anchor="ctr"/>
+          <a:lstStyle/>
+          <a:p>
+            <a:pPr rtl="1" algn="ctr" indent="0" marL="0">
+              <a:buNone/>
+            </a:pPr>
+            <a:r>
+              <a:rPr lang="en-US" sz="1150" b="1" dirty="0">
+                <a:solidFill>
+                  <a:srgbClr val="B4761C"/>
+                </a:solidFill>
+                <a:latin typeface="Arial" pitchFamily="34" charset="0"/>
+                <a:ea typeface="Arial" pitchFamily="34" charset="-122"/>
+                <a:cs typeface="Arial" pitchFamily="34" charset="-120"/>
+              </a:rPr>
+              <a:t>الحالة ٢ · مخيم غير موجود</a:t>
+            </a:r>
+            <a:endParaRPr lang="en-US" sz="1150" dirty="0"/>
+          </a:p>
+        </p:txBody>
+      </p:sp>
+      <p:sp>
+        <p:nvSpPr>
+          <p:cNvPr id="8" name="Shape 5"/>
+          <p:cNvSpPr/>
+          <p:nvPr/>
+        </p:nvSpPr>
+        <p:spPr>
+          <a:xfrm>
+            <a:off x="1621231" y="1847088"/>
+            <a:ext cx="2807208" cy="4128973"/>
           </a:xfrm>
           <a:prstGeom prst="roundRect">
             <a:avLst>
-              <a:gd name="adj" fmla="val 9000"/>
+              <a:gd name="adj" fmla="val 2932"/>
             </a:avLst>
           </a:prstGeom>
           <a:solidFill>
@@ -15253,29 +15618,9 @@
           </a:effectLst>
         </p:spPr>
       </p:sp>
-      <p:sp>
-        <p:nvSpPr>
-          <p:cNvPr id="26" name="Shape 23"/>
-          <p:cNvSpPr/>
-          <p:nvPr/>
-        </p:nvSpPr>
-        <p:spPr>
-          <a:xfrm>
-            <a:off x="11112703" y="2743200"/>
-            <a:ext cx="292608" cy="292608"/>
-          </a:xfrm>
-          <a:prstGeom prst="ellipse">
-            <a:avLst/>
-          </a:prstGeom>
-          <a:solidFill>
-            <a:srgbClr val="E9A13B"/>
-          </a:solidFill>
-          <a:ln/>
-        </p:spPr>
-      </p:sp>
       <p:pic>
         <p:nvPicPr>
-          <p:cNvPr id="27" name="Image 1" descr="preencoded.png">    </p:cNvPr>
+          <p:cNvPr id="9" name="Image 1" descr="/home/user/Camp_management/docs/screenshots/assistant_unknown_camp.png">    </p:cNvPr>
           <p:cNvPicPr>
             <a:picLocks noChangeAspect="1"/>
           </p:cNvPicPr>
@@ -15289,8 +15634,8 @@
         </p:blipFill>
         <p:spPr>
           <a:xfrm>
-            <a:off x="11185855" y="2816352"/>
-            <a:ext cx="146304" cy="146304"/>
+            <a:off x="1676095" y="1901952"/>
+            <a:ext cx="2697480" cy="4019245"/>
           </a:xfrm>
           <a:prstGeom prst="rect">
             <a:avLst/>
@@ -15299,14 +15644,14 @@
       </p:pic>
       <p:sp>
         <p:nvSpPr>
-          <p:cNvPr id="28" name="Text 24"/>
-          <p:cNvSpPr txBox="1"/>
-          <p:nvPr/>
-        </p:nvSpPr>
-        <p:spPr>
-          <a:xfrm>
-            <a:off x="7016191" y="2724912"/>
-            <a:ext cx="3977640" cy="256032"/>
+          <p:cNvPr id="10" name="Text 6"/>
+          <p:cNvSpPr txBox="1"/>
+          <p:nvPr/>
+        </p:nvSpPr>
+        <p:spPr>
+          <a:xfrm>
+            <a:off x="7848295" y="1627632"/>
+            <a:ext cx="3794760" cy="310896"/>
           </a:xfrm>
           <a:prstGeom prst="rect">
             <a:avLst/>
@@ -15322,76 +15667,34 @@
               <a:buNone/>
             </a:pPr>
             <a:r>
-              <a:rPr lang="en-US" sz="1350" b="1" dirty="0">
-                <a:solidFill>
-                  <a:srgbClr val="16292E"/>
-                </a:solidFill>
-                <a:latin typeface="Arial" pitchFamily="34" charset="0"/>
-                <a:ea typeface="Arial" pitchFamily="34" charset="-122"/>
-                <a:cs typeface="Arial" pitchFamily="34" charset="-120"/>
-              </a:rPr>
-              <a:t>للمطوّر</a:t>
-            </a:r>
-            <a:endParaRPr lang="en-US" sz="1350" dirty="0"/>
-          </a:p>
-        </p:txBody>
-      </p:sp>
-      <p:sp>
-        <p:nvSpPr>
-          <p:cNvPr id="29" name="Text 25"/>
-          <p:cNvSpPr txBox="1"/>
-          <p:nvPr/>
-        </p:nvSpPr>
-        <p:spPr>
-          <a:xfrm>
-            <a:off x="7016191" y="3008376"/>
-            <a:ext cx="4389120" cy="411480"/>
-          </a:xfrm>
-          <a:prstGeom prst="rect">
-            <a:avLst/>
-          </a:prstGeom>
-          <a:noFill/>
-          <a:ln/>
-        </p:spPr>
-        <p:txBody>
-          <a:bodyPr wrap="square" lIns="0" tIns="0" rIns="0" bIns="0" rtlCol="0" anchor="ctr"/>
-          <a:lstStyle/>
-          <a:p>
-            <a:pPr rtl="1" algn="r" indent="0" marL="0">
-              <a:lnSpc>
-                <a:spcPts val="1400"/>
-              </a:lnSpc>
-              <a:buNone/>
-            </a:pPr>
-            <a:r>
-              <a:rPr lang="en-US" sz="1100" dirty="0">
-                <a:solidFill>
-                  <a:srgbClr val="5C7378"/>
-                </a:solidFill>
-                <a:latin typeface="Arial" pitchFamily="34" charset="0"/>
-                <a:ea typeface="Arial" pitchFamily="34" charset="-122"/>
-                <a:cs typeface="Arial" pitchFamily="34" charset="-120"/>
-              </a:rPr>
-              <a:t>الاستثناء كاملًا في السجل، ومعه نص السؤال الذي سبّبه ومُعرِّف المستخدم</a:t>
-            </a:r>
-            <a:endParaRPr lang="en-US" sz="1100" dirty="0"/>
-          </a:p>
-        </p:txBody>
-      </p:sp>
-      <p:sp>
-        <p:nvSpPr>
-          <p:cNvPr id="30" name="Shape 26"/>
-          <p:cNvSpPr/>
-          <p:nvPr/>
-        </p:nvSpPr>
-        <p:spPr>
-          <a:xfrm>
-            <a:off x="6796735" y="3621024"/>
-            <a:ext cx="4846320" cy="1261872"/>
+              <a:rPr lang="en-US" sz="1400" b="1" dirty="0">
+                <a:solidFill>
+                  <a:srgbClr val="02717D"/>
+                </a:solidFill>
+                <a:latin typeface="Arial" pitchFamily="34" charset="0"/>
+                <a:ea typeface="Arial" pitchFamily="34" charset="-122"/>
+                <a:cs typeface="Arial" pitchFamily="34" charset="-120"/>
+              </a:rPr>
+              <a:t>لا يخمّن، ولا يصمت</a:t>
+            </a:r>
+            <a:endParaRPr lang="en-US" sz="1400" dirty="0"/>
+          </a:p>
+        </p:txBody>
+      </p:sp>
+      <p:sp>
+        <p:nvSpPr>
+          <p:cNvPr id="11" name="Shape 7"/>
+          <p:cNvSpPr/>
+          <p:nvPr/>
+        </p:nvSpPr>
+        <p:spPr>
+          <a:xfrm>
+            <a:off x="7848295" y="2084832"/>
+            <a:ext cx="3794760" cy="841248"/>
           </a:xfrm>
           <a:prstGeom prst="roundRect">
             <a:avLst>
-              <a:gd name="adj" fmla="val 6522"/>
+              <a:gd name="adj" fmla="val 9783"/>
             </a:avLst>
           </a:prstGeom>
           <a:solidFill>
@@ -15409,14 +15712,73 @@
       </p:sp>
       <p:sp>
         <p:nvSpPr>
-          <p:cNvPr id="31" name="Text 27"/>
-          <p:cNvSpPr txBox="1"/>
-          <p:nvPr/>
-        </p:nvSpPr>
-        <p:spPr>
-          <a:xfrm>
-            <a:off x="7016191" y="3749040"/>
-            <a:ext cx="4407408" cy="237744"/>
+          <p:cNvPr id="12" name="Shape 8"/>
+          <p:cNvSpPr/>
+          <p:nvPr/>
+        </p:nvSpPr>
+        <p:spPr>
+          <a:xfrm>
+            <a:off x="11167567" y="2212848"/>
+            <a:ext cx="256032" cy="256032"/>
+          </a:xfrm>
+          <a:prstGeom prst="ellipse">
+            <a:avLst/>
+          </a:prstGeom>
+          <a:solidFill>
+            <a:srgbClr val="E9A13B"/>
+          </a:solidFill>
+          <a:ln/>
+        </p:spPr>
+      </p:sp>
+      <p:sp>
+        <p:nvSpPr>
+          <p:cNvPr id="13" name="Text 9"/>
+          <p:cNvSpPr txBox="1"/>
+          <p:nvPr/>
+        </p:nvSpPr>
+        <p:spPr>
+          <a:xfrm>
+            <a:off x="11167567" y="2212848"/>
+            <a:ext cx="256032" cy="256032"/>
+          </a:xfrm>
+          <a:prstGeom prst="rect">
+            <a:avLst/>
+          </a:prstGeom>
+          <a:noFill/>
+          <a:ln/>
+        </p:spPr>
+        <p:txBody>
+          <a:bodyPr wrap="square" lIns="0" tIns="0" rIns="0" bIns="0" rtlCol="0" anchor="ctr"/>
+          <a:lstStyle/>
+          <a:p>
+            <a:pPr rtl="1" algn="ctr" indent="0" marL="0">
+              <a:buNone/>
+            </a:pPr>
+            <a:r>
+              <a:rPr lang="en-US" sz="1100" b="1" dirty="0">
+                <a:solidFill>
+                  <a:srgbClr val="FFFFFF"/>
+                </a:solidFill>
+                <a:latin typeface="Arial" pitchFamily="34" charset="0"/>
+                <a:ea typeface="Arial" pitchFamily="34" charset="-122"/>
+                <a:cs typeface="Arial" pitchFamily="34" charset="-120"/>
+              </a:rPr>
+              <a:t>1</a:t>
+            </a:r>
+            <a:endParaRPr lang="en-US" sz="1100" dirty="0"/>
+          </a:p>
+        </p:txBody>
+      </p:sp>
+      <p:sp>
+        <p:nvSpPr>
+          <p:cNvPr id="14" name="Text 10"/>
+          <p:cNvSpPr txBox="1"/>
+          <p:nvPr/>
+        </p:nvSpPr>
+        <p:spPr>
+          <a:xfrm>
+            <a:off x="8049463" y="2194560"/>
+            <a:ext cx="3017520" cy="256032"/>
           </a:xfrm>
           <a:prstGeom prst="rect">
             <a:avLst/>
@@ -15432,52 +15794,30 @@
               <a:buNone/>
             </a:pPr>
             <a:r>
-              <a:rPr lang="en-US" sz="1050" b="1" dirty="0">
-                <a:solidFill>
-                  <a:srgbClr val="02717D"/>
-                </a:solidFill>
-                <a:latin typeface="Arial" pitchFamily="34" charset="0"/>
-                <a:ea typeface="Arial" pitchFamily="34" charset="-122"/>
-                <a:cs typeface="Arial" pitchFamily="34" charset="-120"/>
-              </a:rPr>
-              <a:t>ما يراه المستخدم</a:t>
-            </a:r>
-            <a:endParaRPr lang="en-US" sz="1050" dirty="0"/>
-          </a:p>
-        </p:txBody>
-      </p:sp>
-      <p:sp>
-        <p:nvSpPr>
-          <p:cNvPr id="32" name="Shape 28"/>
-          <p:cNvSpPr/>
-          <p:nvPr/>
-        </p:nvSpPr>
-        <p:spPr>
-          <a:xfrm>
-            <a:off x="7016191" y="4041648"/>
-            <a:ext cx="4407408" cy="694944"/>
-          </a:xfrm>
-          <a:prstGeom prst="roundRect">
-            <a:avLst>
-              <a:gd name="adj" fmla="val 15789"/>
-            </a:avLst>
-          </a:prstGeom>
-          <a:solidFill>
-            <a:srgbClr val="FBEDE8"/>
-          </a:solidFill>
-          <a:ln/>
-        </p:spPr>
-      </p:sp>
-      <p:sp>
-        <p:nvSpPr>
-          <p:cNvPr id="33" name="Text 29"/>
-          <p:cNvSpPr txBox="1"/>
-          <p:nvPr/>
-        </p:nvSpPr>
-        <p:spPr>
-          <a:xfrm>
-            <a:off x="7180783" y="4041648"/>
-            <a:ext cx="4078224" cy="694944"/>
+              <a:rPr lang="en-US" sz="1300" b="1" dirty="0">
+                <a:solidFill>
+                  <a:srgbClr val="16292E"/>
+                </a:solidFill>
+                <a:latin typeface="Arial" pitchFamily="34" charset="0"/>
+                <a:ea typeface="Arial" pitchFamily="34" charset="-122"/>
+                <a:cs typeface="Arial" pitchFamily="34" charset="-120"/>
+              </a:rPr>
+              <a:t>يعلن العدد</a:t>
+            </a:r>
+            <a:endParaRPr lang="en-US" sz="1300" dirty="0"/>
+          </a:p>
+        </p:txBody>
+      </p:sp>
+      <p:sp>
+        <p:nvSpPr>
+          <p:cNvPr id="15" name="Text 11"/>
+          <p:cNvSpPr txBox="1"/>
+          <p:nvPr/>
+        </p:nvSpPr>
+        <p:spPr>
+          <a:xfrm>
+            <a:off x="8049463" y="2468880"/>
+            <a:ext cx="3392424" cy="402336"/>
           </a:xfrm>
           <a:prstGeom prst="rect">
             <a:avLst/>
@@ -15498,13 +15838,13 @@
             <a:r>
               <a:rPr lang="en-US" sz="1050" dirty="0">
                 <a:solidFill>
-                  <a:srgbClr val="8C3A1E"/>
-                </a:solidFill>
-                <a:latin typeface="Arial" pitchFamily="34" charset="0"/>
-                <a:ea typeface="Arial" pitchFamily="34" charset="-122"/>
-                <a:cs typeface="Arial" pitchFamily="34" charset="-120"/>
-              </a:rPr>
-              <a:t>تعذّر إعداد الإجابة على هذا السؤال. جرّب صياغة أبسط، أو استخدم البحث من الشريط العلوي.</a:t>
+                  <a:srgbClr val="5C7378"/>
+                </a:solidFill>
+                <a:latin typeface="Arial" pitchFamily="34" charset="0"/>
+                <a:ea typeface="Arial" pitchFamily="34" charset="-122"/>
+                <a:cs typeface="Arial" pitchFamily="34" charset="-120"/>
+              </a:rPr>
+              <a:t>أربعة أشخاص يطابقون الاسم، ولا يختار الأول ويجيب بثقة</a:t>
             </a:r>
             <a:endParaRPr lang="en-US" sz="1050" dirty="0"/>
           </a:p>
@@ -15512,36 +15852,63 @@
       </p:sp>
       <p:sp>
         <p:nvSpPr>
-          <p:cNvPr id="34" name="Shape 30"/>
-          <p:cNvSpPr/>
-          <p:nvPr/>
-        </p:nvSpPr>
-        <p:spPr>
-          <a:xfrm>
-            <a:off x="548640" y="5084064"/>
-            <a:ext cx="11094415" cy="1188720"/>
+          <p:cNvPr id="16" name="Shape 12"/>
+          <p:cNvSpPr/>
+          <p:nvPr/>
+        </p:nvSpPr>
+        <p:spPr>
+          <a:xfrm>
+            <a:off x="7848295" y="3044952"/>
+            <a:ext cx="3794760" cy="841248"/>
           </a:xfrm>
           <a:prstGeom prst="roundRect">
             <a:avLst>
-              <a:gd name="adj" fmla="val 7692"/>
+              <a:gd name="adj" fmla="val 9783"/>
             </a:avLst>
           </a:prstGeom>
           <a:solidFill>
-            <a:srgbClr val="0A2E36"/>
-          </a:solidFill>
-          <a:ln/>
-        </p:spPr>
-      </p:sp>
-      <p:sp>
-        <p:nvSpPr>
-          <p:cNvPr id="35" name="Text 31"/>
-          <p:cNvSpPr txBox="1"/>
-          <p:nvPr/>
-        </p:nvSpPr>
-        <p:spPr>
-          <a:xfrm>
-            <a:off x="822960" y="5230368"/>
-            <a:ext cx="10545775" cy="274320"/>
+            <a:srgbClr val="FFFFFF"/>
+          </a:solidFill>
+          <a:ln/>
+          <a:effectLst>
+            <a:outerShdw sx="100000" sy="100000" kx="0" ky="0" algn="bl" rotWithShape="0" blurRad="127000" dist="25400" dir="5400000">
+              <a:srgbClr val="0A2E36">
+                <a:alpha val="10000"/>
+              </a:srgbClr>
+            </a:outerShdw>
+          </a:effectLst>
+        </p:spPr>
+      </p:sp>
+      <p:sp>
+        <p:nvSpPr>
+          <p:cNvPr id="17" name="Shape 13"/>
+          <p:cNvSpPr/>
+          <p:nvPr/>
+        </p:nvSpPr>
+        <p:spPr>
+          <a:xfrm>
+            <a:off x="11167567" y="3172968"/>
+            <a:ext cx="256032" cy="256032"/>
+          </a:xfrm>
+          <a:prstGeom prst="ellipse">
+            <a:avLst/>
+          </a:prstGeom>
+          <a:solidFill>
+            <a:srgbClr val="E9A13B"/>
+          </a:solidFill>
+          <a:ln/>
+        </p:spPr>
+      </p:sp>
+      <p:sp>
+        <p:nvSpPr>
+          <p:cNvPr id="18" name="Text 14"/>
+          <p:cNvSpPr txBox="1"/>
+          <p:nvPr/>
+        </p:nvSpPr>
+        <p:spPr>
+          <a:xfrm>
+            <a:off x="11167567" y="3172968"/>
+            <a:ext cx="256032" cy="256032"/>
           </a:xfrm>
           <a:prstGeom prst="rect">
             <a:avLst/>
@@ -15557,15 +15924,54 @@
               <a:buNone/>
             </a:pPr>
             <a:r>
+              <a:rPr lang="en-US" sz="1100" b="1" dirty="0">
+                <a:solidFill>
+                  <a:srgbClr val="FFFFFF"/>
+                </a:solidFill>
+                <a:latin typeface="Arial" pitchFamily="34" charset="0"/>
+                <a:ea typeface="Arial" pitchFamily="34" charset="-122"/>
+                <a:cs typeface="Arial" pitchFamily="34" charset="-120"/>
+              </a:rPr>
+              <a:t>2</a:t>
+            </a:r>
+            <a:endParaRPr lang="en-US" sz="1100" dirty="0"/>
+          </a:p>
+        </p:txBody>
+      </p:sp>
+      <p:sp>
+        <p:nvSpPr>
+          <p:cNvPr id="19" name="Text 15"/>
+          <p:cNvSpPr txBox="1"/>
+          <p:nvPr/>
+        </p:nvSpPr>
+        <p:spPr>
+          <a:xfrm>
+            <a:off x="8049463" y="3154680"/>
+            <a:ext cx="3017520" cy="256032"/>
+          </a:xfrm>
+          <a:prstGeom prst="rect">
+            <a:avLst/>
+          </a:prstGeom>
+          <a:noFill/>
+          <a:ln/>
+        </p:spPr>
+        <p:txBody>
+          <a:bodyPr wrap="square" lIns="0" tIns="0" rIns="0" bIns="0" rtlCol="0" anchor="ctr"/>
+          <a:lstStyle/>
+          <a:p>
+            <a:pPr rtl="1" algn="r" indent="0" marL="0">
+              <a:buNone/>
+            </a:pPr>
+            <a:r>
               <a:rPr lang="en-US" sz="1300" b="1" dirty="0">
                 <a:solidFill>
-                  <a:srgbClr val="00A896"/>
-                </a:solidFill>
-                <a:latin typeface="Arial" pitchFamily="34" charset="0"/>
-                <a:ea typeface="Arial" pitchFamily="34" charset="-122"/>
-                <a:cs typeface="Arial" pitchFamily="34" charset="-120"/>
-              </a:rPr>
-              <a:t>والسلوك نفسه مُثبَت باختبارين، لا بالكلام</a:t>
+                  <a:srgbClr val="16292E"/>
+                </a:solidFill>
+                <a:latin typeface="Arial" pitchFamily="34" charset="0"/>
+                <a:ea typeface="Arial" pitchFamily="34" charset="-122"/>
+                <a:cs typeface="Arial" pitchFamily="34" charset="-120"/>
+              </a:rPr>
+              <a:t>يشرح كيف تُضيَّق</a:t>
             </a:r>
             <a:endParaRPr lang="en-US" sz="1300" dirty="0"/>
           </a:p>
@@ -15573,14 +15979,14 @@
       </p:sp>
       <p:sp>
         <p:nvSpPr>
-          <p:cNvPr id="36" name="Text 32"/>
-          <p:cNvSpPr txBox="1"/>
-          <p:nvPr/>
-        </p:nvSpPr>
-        <p:spPr>
-          <a:xfrm>
-            <a:off x="6233008" y="5577840"/>
-            <a:ext cx="5135728" cy="548640"/>
+          <p:cNvPr id="20" name="Text 16"/>
+          <p:cNvSpPr txBox="1"/>
+          <p:nvPr/>
+        </p:nvSpPr>
+        <p:spPr>
+          <a:xfrm>
+            <a:off x="8049463" y="3429000"/>
+            <a:ext cx="3392424" cy="402336"/>
           </a:xfrm>
           <a:prstGeom prst="rect">
             <a:avLst/>
@@ -15601,13 +16007,13 @@
             <a:r>
               <a:rPr lang="en-US" sz="1050" dirty="0">
                 <a:solidFill>
-                  <a:srgbClr val="BFD4D7"/>
-                </a:solidFill>
-                <a:latin typeface="Arial" pitchFamily="34" charset="0"/>
-                <a:ea typeface="Arial" pitchFamily="34" charset="-122"/>
-                <a:cs typeface="Arial" pitchFamily="34" charset="-120"/>
-              </a:rPr>
-              <a:t>• يفتعل عطلًا داخل المساعد، ويتحقق أن الاستجابة 200 لا 500، وأن كلمة الخطأ التقنية لم تصل إلى المتصفح</a:t>
+                  <a:srgbClr val="5C7378"/>
+                </a:solidFill>
+                <a:latin typeface="Arial" pitchFamily="34" charset="0"/>
+                <a:ea typeface="Arial" pitchFamily="34" charset="-122"/>
+                <a:cs typeface="Arial" pitchFamily="34" charset="-120"/>
+              </a:rPr>
+              <a:t>«اكتب الاسم الثلاثي كاملًا أو رقم الوثيقة»: نصيحة قابلة للتنفيذ ومُختبَرة</a:t>
             </a:r>
             <a:endParaRPr lang="en-US" sz="1050" dirty="0"/>
           </a:p>
@@ -15615,14 +16021,141 @@
       </p:sp>
       <p:sp>
         <p:nvSpPr>
-          <p:cNvPr id="37" name="Text 33"/>
-          <p:cNvSpPr txBox="1"/>
-          <p:nvPr/>
-        </p:nvSpPr>
-        <p:spPr>
-          <a:xfrm>
-            <a:off x="822960" y="5577840"/>
-            <a:ext cx="5135728" cy="548640"/>
+          <p:cNvPr id="21" name="Shape 17"/>
+          <p:cNvSpPr/>
+          <p:nvPr/>
+        </p:nvSpPr>
+        <p:spPr>
+          <a:xfrm>
+            <a:off x="7848295" y="4005072"/>
+            <a:ext cx="3794760" cy="841248"/>
+          </a:xfrm>
+          <a:prstGeom prst="roundRect">
+            <a:avLst>
+              <a:gd name="adj" fmla="val 9783"/>
+            </a:avLst>
+          </a:prstGeom>
+          <a:solidFill>
+            <a:srgbClr val="FFFFFF"/>
+          </a:solidFill>
+          <a:ln/>
+          <a:effectLst>
+            <a:outerShdw sx="100000" sy="100000" kx="0" ky="0" algn="bl" rotWithShape="0" blurRad="127000" dist="25400" dir="5400000">
+              <a:srgbClr val="0A2E36">
+                <a:alpha val="10000"/>
+              </a:srgbClr>
+            </a:outerShdw>
+          </a:effectLst>
+        </p:spPr>
+      </p:sp>
+      <p:sp>
+        <p:nvSpPr>
+          <p:cNvPr id="22" name="Shape 18"/>
+          <p:cNvSpPr/>
+          <p:nvPr/>
+        </p:nvSpPr>
+        <p:spPr>
+          <a:xfrm>
+            <a:off x="11167567" y="4133088"/>
+            <a:ext cx="256032" cy="256032"/>
+          </a:xfrm>
+          <a:prstGeom prst="ellipse">
+            <a:avLst/>
+          </a:prstGeom>
+          <a:solidFill>
+            <a:srgbClr val="02717D"/>
+          </a:solidFill>
+          <a:ln/>
+        </p:spPr>
+      </p:sp>
+      <p:sp>
+        <p:nvSpPr>
+          <p:cNvPr id="23" name="Text 19"/>
+          <p:cNvSpPr txBox="1"/>
+          <p:nvPr/>
+        </p:nvSpPr>
+        <p:spPr>
+          <a:xfrm>
+            <a:off x="11167567" y="4133088"/>
+            <a:ext cx="256032" cy="256032"/>
+          </a:xfrm>
+          <a:prstGeom prst="rect">
+            <a:avLst/>
+          </a:prstGeom>
+          <a:noFill/>
+          <a:ln/>
+        </p:spPr>
+        <p:txBody>
+          <a:bodyPr wrap="square" lIns="0" tIns="0" rIns="0" bIns="0" rtlCol="0" anchor="ctr"/>
+          <a:lstStyle/>
+          <a:p>
+            <a:pPr rtl="1" algn="ctr" indent="0" marL="0">
+              <a:buNone/>
+            </a:pPr>
+            <a:r>
+              <a:rPr lang="en-US" sz="1100" b="1" dirty="0">
+                <a:solidFill>
+                  <a:srgbClr val="FFFFFF"/>
+                </a:solidFill>
+                <a:latin typeface="Arial" pitchFamily="34" charset="0"/>
+                <a:ea typeface="Arial" pitchFamily="34" charset="-122"/>
+                <a:cs typeface="Arial" pitchFamily="34" charset="-120"/>
+              </a:rPr>
+              <a:t>3</a:t>
+            </a:r>
+            <a:endParaRPr lang="en-US" sz="1100" dirty="0"/>
+          </a:p>
+        </p:txBody>
+      </p:sp>
+      <p:sp>
+        <p:nvSpPr>
+          <p:cNvPr id="24" name="Text 20"/>
+          <p:cNvSpPr txBox="1"/>
+          <p:nvPr/>
+        </p:nvSpPr>
+        <p:spPr>
+          <a:xfrm>
+            <a:off x="8049463" y="4114800"/>
+            <a:ext cx="3017520" cy="256032"/>
+          </a:xfrm>
+          <a:prstGeom prst="rect">
+            <a:avLst/>
+          </a:prstGeom>
+          <a:noFill/>
+          <a:ln/>
+        </p:spPr>
+        <p:txBody>
+          <a:bodyPr wrap="square" lIns="0" tIns="0" rIns="0" bIns="0" rtlCol="0" anchor="ctr"/>
+          <a:lstStyle/>
+          <a:p>
+            <a:pPr rtl="1" algn="r" indent="0" marL="0">
+              <a:buNone/>
+            </a:pPr>
+            <a:r>
+              <a:rPr lang="en-US" sz="1300" b="1" dirty="0">
+                <a:solidFill>
+                  <a:srgbClr val="16292E"/>
+                </a:solidFill>
+                <a:latin typeface="Arial" pitchFamily="34" charset="0"/>
+                <a:ea typeface="Arial" pitchFamily="34" charset="-122"/>
+                <a:cs typeface="Arial" pitchFamily="34" charset="-120"/>
+              </a:rPr>
+              <a:t>يصرّح بالمفقود</a:t>
+            </a:r>
+            <a:endParaRPr lang="en-US" sz="1300" dirty="0"/>
+          </a:p>
+        </p:txBody>
+      </p:sp>
+      <p:sp>
+        <p:nvSpPr>
+          <p:cNvPr id="25" name="Text 21"/>
+          <p:cNvSpPr txBox="1"/>
+          <p:nvPr/>
+        </p:nvSpPr>
+        <p:spPr>
+          <a:xfrm>
+            <a:off x="8049463" y="4389120"/>
+            <a:ext cx="3392424" cy="402336"/>
           </a:xfrm>
           <a:prstGeom prst="rect">
             <a:avLst/>
@@ -15643,15 +16176,245 @@
             <a:r>
               <a:rPr lang="en-US" sz="1050" dirty="0">
                 <a:solidFill>
+                  <a:srgbClr val="5C7378"/>
+                </a:solidFill>
+                <a:latin typeface="Arial" pitchFamily="34" charset="0"/>
+                <a:ea typeface="Arial" pitchFamily="34" charset="-122"/>
+                <a:cs typeface="Arial" pitchFamily="34" charset="-120"/>
+              </a:rPr>
+              <a:t>مخيم غير مسجّل يُقال صراحةً، ولا يُستبدل بإجمالي المخيمات</a:t>
+            </a:r>
+            <a:endParaRPr lang="en-US" sz="1050" dirty="0"/>
+          </a:p>
+        </p:txBody>
+      </p:sp>
+      <p:sp>
+        <p:nvSpPr>
+          <p:cNvPr id="26" name="Shape 22"/>
+          <p:cNvSpPr/>
+          <p:nvPr/>
+        </p:nvSpPr>
+        <p:spPr>
+          <a:xfrm>
+            <a:off x="7848295" y="4965192"/>
+            <a:ext cx="3794760" cy="841248"/>
+          </a:xfrm>
+          <a:prstGeom prst="roundRect">
+            <a:avLst>
+              <a:gd name="adj" fmla="val 9783"/>
+            </a:avLst>
+          </a:prstGeom>
+          <a:solidFill>
+            <a:srgbClr val="FFFFFF"/>
+          </a:solidFill>
+          <a:ln/>
+          <a:effectLst>
+            <a:outerShdw sx="100000" sy="100000" kx="0" ky="0" algn="bl" rotWithShape="0" blurRad="127000" dist="25400" dir="5400000">
+              <a:srgbClr val="0A2E36">
+                <a:alpha val="10000"/>
+              </a:srgbClr>
+            </a:outerShdw>
+          </a:effectLst>
+        </p:spPr>
+      </p:sp>
+      <p:sp>
+        <p:nvSpPr>
+          <p:cNvPr id="27" name="Shape 23"/>
+          <p:cNvSpPr/>
+          <p:nvPr/>
+        </p:nvSpPr>
+        <p:spPr>
+          <a:xfrm>
+            <a:off x="11167567" y="5093208"/>
+            <a:ext cx="256032" cy="256032"/>
+          </a:xfrm>
+          <a:prstGeom prst="ellipse">
+            <a:avLst/>
+          </a:prstGeom>
+          <a:solidFill>
+            <a:srgbClr val="02717D"/>
+          </a:solidFill>
+          <a:ln/>
+        </p:spPr>
+      </p:sp>
+      <p:sp>
+        <p:nvSpPr>
+          <p:cNvPr id="28" name="Text 24"/>
+          <p:cNvSpPr txBox="1"/>
+          <p:nvPr/>
+        </p:nvSpPr>
+        <p:spPr>
+          <a:xfrm>
+            <a:off x="11167567" y="5093208"/>
+            <a:ext cx="256032" cy="256032"/>
+          </a:xfrm>
+          <a:prstGeom prst="rect">
+            <a:avLst/>
+          </a:prstGeom>
+          <a:noFill/>
+          <a:ln/>
+        </p:spPr>
+        <p:txBody>
+          <a:bodyPr wrap="square" lIns="0" tIns="0" rIns="0" bIns="0" rtlCol="0" anchor="ctr"/>
+          <a:lstStyle/>
+          <a:p>
+            <a:pPr rtl="1" algn="ctr" indent="0" marL="0">
+              <a:buNone/>
+            </a:pPr>
+            <a:r>
+              <a:rPr lang="en-US" sz="1100" b="1" dirty="0">
+                <a:solidFill>
+                  <a:srgbClr val="FFFFFF"/>
+                </a:solidFill>
+                <a:latin typeface="Arial" pitchFamily="34" charset="0"/>
+                <a:ea typeface="Arial" pitchFamily="34" charset="-122"/>
+                <a:cs typeface="Arial" pitchFamily="34" charset="-120"/>
+              </a:rPr>
+              <a:t>4</a:t>
+            </a:r>
+            <a:endParaRPr lang="en-US" sz="1100" dirty="0"/>
+          </a:p>
+        </p:txBody>
+      </p:sp>
+      <p:sp>
+        <p:nvSpPr>
+          <p:cNvPr id="29" name="Text 25"/>
+          <p:cNvSpPr txBox="1"/>
+          <p:nvPr/>
+        </p:nvSpPr>
+        <p:spPr>
+          <a:xfrm>
+            <a:off x="8049463" y="5074920"/>
+            <a:ext cx="3017520" cy="256032"/>
+          </a:xfrm>
+          <a:prstGeom prst="rect">
+            <a:avLst/>
+          </a:prstGeom>
+          <a:noFill/>
+          <a:ln/>
+        </p:spPr>
+        <p:txBody>
+          <a:bodyPr wrap="square" lIns="0" tIns="0" rIns="0" bIns="0" rtlCol="0" anchor="ctr"/>
+          <a:lstStyle/>
+          <a:p>
+            <a:pPr rtl="1" algn="r" indent="0" marL="0">
+              <a:buNone/>
+            </a:pPr>
+            <a:r>
+              <a:rPr lang="en-US" sz="1300" b="1" dirty="0">
+                <a:solidFill>
+                  <a:srgbClr val="16292E"/>
+                </a:solidFill>
+                <a:latin typeface="Arial" pitchFamily="34" charset="0"/>
+                <a:ea typeface="Arial" pitchFamily="34" charset="-122"/>
+                <a:cs typeface="Arial" pitchFamily="34" charset="-120"/>
+              </a:rPr>
+              <a:t>يعرض البدائل</a:t>
+            </a:r>
+            <a:endParaRPr lang="en-US" sz="1300" dirty="0"/>
+          </a:p>
+        </p:txBody>
+      </p:sp>
+      <p:sp>
+        <p:nvSpPr>
+          <p:cNvPr id="30" name="Text 26"/>
+          <p:cNvSpPr txBox="1"/>
+          <p:nvPr/>
+        </p:nvSpPr>
+        <p:spPr>
+          <a:xfrm>
+            <a:off x="8049463" y="5349240"/>
+            <a:ext cx="3392424" cy="402336"/>
+          </a:xfrm>
+          <a:prstGeom prst="rect">
+            <a:avLst/>
+          </a:prstGeom>
+          <a:noFill/>
+          <a:ln/>
+        </p:spPr>
+        <p:txBody>
+          <a:bodyPr wrap="square" lIns="0" tIns="0" rIns="0" bIns="0" rtlCol="0" anchor="ctr"/>
+          <a:lstStyle/>
+          <a:p>
+            <a:pPr rtl="1" algn="r" indent="0" marL="0">
+              <a:lnSpc>
+                <a:spcPts val="1400"/>
+              </a:lnSpc>
+              <a:buNone/>
+            </a:pPr>
+            <a:r>
+              <a:rPr lang="en-US" sz="1050" dirty="0">
+                <a:solidFill>
+                  <a:srgbClr val="5C7378"/>
+                </a:solidFill>
+                <a:latin typeface="Arial" pitchFamily="34" charset="0"/>
+                <a:ea typeface="Arial" pitchFamily="34" charset="-122"/>
+                <a:cs typeface="Arial" pitchFamily="34" charset="-120"/>
+              </a:rPr>
+              <a:t>المخيمات المسجّلة فعلًا، لأن السبب الأغلب اختلاف في التسمية</a:t>
+            </a:r>
+            <a:endParaRPr lang="en-US" sz="1050" dirty="0"/>
+          </a:p>
+        </p:txBody>
+      </p:sp>
+      <p:sp>
+        <p:nvSpPr>
+          <p:cNvPr id="31" name="Shape 27"/>
+          <p:cNvSpPr/>
+          <p:nvPr/>
+        </p:nvSpPr>
+        <p:spPr>
+          <a:xfrm>
+            <a:off x="548640" y="6053328"/>
+            <a:ext cx="11094415" cy="658368"/>
+          </a:xfrm>
+          <a:prstGeom prst="roundRect">
+            <a:avLst>
+              <a:gd name="adj" fmla="val 12500"/>
+            </a:avLst>
+          </a:prstGeom>
+          <a:solidFill>
+            <a:srgbClr val="0A2E36"/>
+          </a:solidFill>
+          <a:ln/>
+        </p:spPr>
+      </p:sp>
+      <p:sp>
+        <p:nvSpPr>
+          <p:cNvPr id="32" name="Text 28"/>
+          <p:cNvSpPr txBox="1"/>
+          <p:nvPr/>
+        </p:nvSpPr>
+        <p:spPr>
+          <a:xfrm>
+            <a:off x="822960" y="6053328"/>
+            <a:ext cx="10545775" cy="658368"/>
+          </a:xfrm>
+          <a:prstGeom prst="rect">
+            <a:avLst/>
+          </a:prstGeom>
+          <a:noFill/>
+          <a:ln/>
+        </p:spPr>
+        <p:txBody>
+          <a:bodyPr wrap="square" lIns="0" tIns="0" rIns="0" bIns="0" rtlCol="0" anchor="ctr"/>
+          <a:lstStyle/>
+          <a:p>
+            <a:pPr rtl="1" algn="ctr" indent="0" marL="0">
+              <a:buNone/>
+            </a:pPr>
+            <a:r>
+              <a:rPr lang="en-US" sz="1100" dirty="0">
+                <a:solidFill>
                   <a:srgbClr val="BFD4D7"/>
                 </a:solidFill>
                 <a:latin typeface="Arial" pitchFamily="34" charset="0"/>
                 <a:ea typeface="Arial" pitchFamily="34" charset="-122"/>
                 <a:cs typeface="Arial" pitchFamily="34" charset="-120"/>
               </a:rPr>
-              <a:t>• يتحقق أن السؤال المتسبّب سُجِّل فعلًا في سجل الأخطاء مع مُعرِّف المستخدم</a:t>
-            </a:r>
-            <a:endParaRPr lang="en-US" sz="1050" dirty="0"/>
+              <a:t>وحالتان أخريان: «لم أجد» تُقال بنبرة تختلف عن «صفر»، والسؤال غير المفهوم يُمرَّر إلى البحث الشامل ثم تُعرض أمثلة يفهمها النظام</a:t>
+            </a:r>
+            <a:endParaRPr lang="en-US" sz="1100" dirty="0"/>
           </a:p>
         </p:txBody>
       </p:sp>
@@ -15720,7 +16483,7 @@
                 <a:ea typeface="Arial" pitchFamily="34" charset="-122"/>
                 <a:cs typeface="Arial" pitchFamily="34" charset="-120"/>
               </a:rPr>
-              <a:t>المحور السادس · البرهان</a:t>
+              <a:t>المحور الخامس · المتانة</a:t>
             </a:r>
             <a:endParaRPr lang="en-US" sz="1300" dirty="0"/>
           </a:p>
@@ -15759,7 +16522,7 @@
                 <a:ea typeface="Arial" pitchFamily="34" charset="-122"/>
                 <a:cs typeface="Arial" pitchFamily="34" charset="-120"/>
               </a:rPr>
-              <a:t>الاختبار وضمان الجودة</a:t>
+              <a:t>معالجة الاستثناءات — شبكة الأمان الأخيرة</a:t>
             </a:r>
             <a:endParaRPr lang="en-US" sz="3300" dirty="0"/>
           </a:p>
@@ -15774,15 +16537,15 @@
         <p:spPr>
           <a:xfrm>
             <a:off x="548640" y="1572768"/>
-            <a:ext cx="6400800" cy="3840480"/>
+            <a:ext cx="5943600" cy="3310128"/>
           </a:xfrm>
           <a:prstGeom prst="roundRect">
             <a:avLst>
-              <a:gd name="adj" fmla="val 2381"/>
+              <a:gd name="adj" fmla="val 2762"/>
             </a:avLst>
           </a:prstGeom>
           <a:solidFill>
-            <a:srgbClr val="0C1E22"/>
+            <a:srgbClr val="0A2E36"/>
           </a:solidFill>
           <a:ln/>
         </p:spPr>
@@ -15795,8 +16558,8 @@
         </p:nvSpPr>
         <p:spPr>
           <a:xfrm>
-            <a:off x="841248" y="1810512"/>
-            <a:ext cx="5815584" cy="219456"/>
+            <a:off x="822960" y="1719072"/>
+            <a:ext cx="5394960" cy="237744"/>
           </a:xfrm>
           <a:prstGeom prst="rect">
             <a:avLst/>
@@ -15812,15 +16575,54 @@
               <a:buNone/>
             </a:pPr>
             <a:r>
+              <a:rPr lang="en-US" sz="1000" b="1" dirty="0">
+                <a:solidFill>
+                  <a:srgbClr val="00A896"/>
+                </a:solidFill>
+                <a:latin typeface="Arial" pitchFamily="34" charset="0"/>
+                <a:ea typeface="Arial" pitchFamily="34" charset="-122"/>
+                <a:cs typeface="Arial" pitchFamily="34" charset="-120"/>
+              </a:rPr>
+              <a:t>AssistantController::ask()</a:t>
+            </a:r>
+            <a:endParaRPr lang="en-US" sz="1000" dirty="0"/>
+          </a:p>
+        </p:txBody>
+      </p:sp>
+      <p:sp>
+        <p:nvSpPr>
+          <p:cNvPr id="6" name="Text 4"/>
+          <p:cNvSpPr txBox="1"/>
+          <p:nvPr/>
+        </p:nvSpPr>
+        <p:spPr>
+          <a:xfrm>
+            <a:off x="822960" y="2048256"/>
+            <a:ext cx="5394960" cy="201168"/>
+          </a:xfrm>
+          <a:prstGeom prst="rect">
+            <a:avLst/>
+          </a:prstGeom>
+          <a:noFill/>
+          <a:ln/>
+        </p:spPr>
+        <p:txBody>
+          <a:bodyPr wrap="square" lIns="0" tIns="0" rIns="0" bIns="0" rtlCol="0" anchor="ctr"/>
+          <a:lstStyle/>
+          <a:p>
+            <a:pPr algn="l" indent="0" marL="0">
+              <a:buNone/>
+            </a:pPr>
+            <a:r>
               <a:rPr lang="en-US" sz="950" dirty="0">
                 <a:solidFill>
-                  <a:srgbClr val="00A896"/>
+                  <a:srgbClr val="BFD4D7"/>
                 </a:solidFill>
                 <a:latin typeface="Courier New" pitchFamily="34" charset="0"/>
                 <a:ea typeface="Courier New" pitchFamily="34" charset="-122"/>
                 <a:cs typeface="Courier New" pitchFamily="34" charset="-120"/>
               </a:rPr>
-              <a:t>$ vendor/bin/phpunit</a:t>
+              <a:t>try {</a:t>
             </a:r>
             <a:endParaRPr lang="en-US" sz="950" dirty="0"/>
           </a:p>
@@ -15828,14 +16630,14 @@
       </p:sp>
       <p:sp>
         <p:nvSpPr>
-          <p:cNvPr id="6" name="Text 4"/>
-          <p:cNvSpPr txBox="1"/>
-          <p:nvPr/>
-        </p:nvSpPr>
-        <p:spPr>
-          <a:xfrm>
-            <a:off x="841248" y="2034540"/>
-            <a:ext cx="5815584" cy="219456"/>
+          <p:cNvPr id="7" name="Text 5"/>
+          <p:cNvSpPr txBox="1"/>
+          <p:nvPr/>
+        </p:nvSpPr>
+        <p:spPr>
+          <a:xfrm>
+            <a:off x="822960" y="2251253"/>
+            <a:ext cx="5394960" cy="201168"/>
           </a:xfrm>
           <a:prstGeom prst="rect">
             <a:avLst/>
@@ -15850,44 +16652,16 @@
             <a:pPr algn="l" indent="0" marL="0">
               <a:buNone/>
             </a:pPr>
-            <a:endParaRPr lang="en-US" sz="950" dirty="0"/>
-          </a:p>
-        </p:txBody>
-      </p:sp>
-      <p:sp>
-        <p:nvSpPr>
-          <p:cNvPr id="7" name="Text 5"/>
-          <p:cNvSpPr txBox="1"/>
-          <p:nvPr/>
-        </p:nvSpPr>
-        <p:spPr>
-          <a:xfrm>
-            <a:off x="841248" y="2258568"/>
-            <a:ext cx="5815584" cy="219456"/>
-          </a:xfrm>
-          <a:prstGeom prst="rect">
-            <a:avLst/>
-          </a:prstGeom>
-          <a:noFill/>
-          <a:ln/>
-        </p:spPr>
-        <p:txBody>
-          <a:bodyPr wrap="square" lIns="0" tIns="0" rIns="0" bIns="0" rtlCol="0" anchor="ctr"/>
-          <a:lstStyle/>
-          <a:p>
-            <a:pPr algn="l" indent="0" marL="0">
-              <a:buNone/>
-            </a:pPr>
             <a:r>
               <a:rPr lang="en-US" sz="950" dirty="0">
                 <a:solidFill>
-                  <a:srgbClr val="BFD4D7"/>
+                  <a:srgbClr val="FFFFFF"/>
                 </a:solidFill>
                 <a:latin typeface="Courier New" pitchFamily="34" charset="0"/>
                 <a:ea typeface="Courier New" pitchFamily="34" charset="-122"/>
                 <a:cs typeface="Courier New" pitchFamily="34" charset="-120"/>
               </a:rPr>
-              <a:t>PHPUnit 11.5.56 by Sebastian Bergmann.</a:t>
+              <a:t>    $answer = $this-&gt;assistant</a:t>
             </a:r>
             <a:endParaRPr lang="en-US" sz="950" dirty="0"/>
           </a:p>
@@ -15901,8 +16675,8 @@
         </p:nvSpPr>
         <p:spPr>
           <a:xfrm>
-            <a:off x="841248" y="2482596"/>
-            <a:ext cx="5815584" cy="219456"/>
+            <a:off x="822960" y="2454250"/>
+            <a:ext cx="5394960" cy="201168"/>
           </a:xfrm>
           <a:prstGeom prst="rect">
             <a:avLst/>
@@ -15917,44 +16691,16 @@
             <a:pPr algn="l" indent="0" marL="0">
               <a:buNone/>
             </a:pPr>
-            <a:endParaRPr lang="en-US" sz="950" dirty="0"/>
-          </a:p>
-        </p:txBody>
-      </p:sp>
-      <p:sp>
-        <p:nvSpPr>
-          <p:cNvPr id="9" name="Text 7"/>
-          <p:cNvSpPr txBox="1"/>
-          <p:nvPr/>
-        </p:nvSpPr>
-        <p:spPr>
-          <a:xfrm>
-            <a:off x="841248" y="2706624"/>
-            <a:ext cx="5815584" cy="219456"/>
-          </a:xfrm>
-          <a:prstGeom prst="rect">
-            <a:avLst/>
-          </a:prstGeom>
-          <a:noFill/>
-          <a:ln/>
-        </p:spPr>
-        <p:txBody>
-          <a:bodyPr wrap="square" lIns="0" tIns="0" rIns="0" bIns="0" rtlCol="0" anchor="ctr"/>
-          <a:lstStyle/>
-          <a:p>
-            <a:pPr algn="l" indent="0" marL="0">
-              <a:buNone/>
-            </a:pPr>
             <a:r>
               <a:rPr lang="en-US" sz="950" dirty="0">
                 <a:solidFill>
-                  <a:srgbClr val="BFD4D7"/>
+                  <a:srgbClr val="FFFFFF"/>
                 </a:solidFill>
                 <a:latin typeface="Courier New" pitchFamily="34" charset="0"/>
                 <a:ea typeface="Courier New" pitchFamily="34" charset="-122"/>
                 <a:cs typeface="Courier New" pitchFamily="34" charset="-120"/>
               </a:rPr>
-              <a:t>Runtime:       PHP 8.4.19</a:t>
+              <a:t>        -&gt;ask($question, $request-&gt;user())</a:t>
             </a:r>
             <a:endParaRPr lang="en-US" sz="950" dirty="0"/>
           </a:p>
@@ -15962,14 +16708,14 @@
       </p:sp>
       <p:sp>
         <p:nvSpPr>
-          <p:cNvPr id="10" name="Text 8"/>
-          <p:cNvSpPr txBox="1"/>
-          <p:nvPr/>
-        </p:nvSpPr>
-        <p:spPr>
-          <a:xfrm>
-            <a:off x="841248" y="2930652"/>
-            <a:ext cx="5815584" cy="219456"/>
+          <p:cNvPr id="9" name="Text 7"/>
+          <p:cNvSpPr txBox="1"/>
+          <p:nvPr/>
+        </p:nvSpPr>
+        <p:spPr>
+          <a:xfrm>
+            <a:off x="822960" y="2657246"/>
+            <a:ext cx="5394960" cy="201168"/>
           </a:xfrm>
           <a:prstGeom prst="rect">
             <a:avLst/>
@@ -15987,13 +16733,13 @@
             <a:r>
               <a:rPr lang="en-US" sz="950" dirty="0">
                 <a:solidFill>
-                  <a:srgbClr val="BFD4D7"/>
+                  <a:srgbClr val="FFFFFF"/>
                 </a:solidFill>
                 <a:latin typeface="Courier New" pitchFamily="34" charset="0"/>
                 <a:ea typeface="Courier New" pitchFamily="34" charset="-122"/>
                 <a:cs typeface="Courier New" pitchFamily="34" charset="-120"/>
               </a:rPr>
-              <a:t>Configuration: phpunit.xml</a:t>
+              <a:t>        -&gt;toArray();</a:t>
             </a:r>
             <a:endParaRPr lang="en-US" sz="950" dirty="0"/>
           </a:p>
@@ -16001,14 +16747,14 @@
       </p:sp>
       <p:sp>
         <p:nvSpPr>
-          <p:cNvPr id="11" name="Text 9"/>
-          <p:cNvSpPr txBox="1"/>
-          <p:nvPr/>
-        </p:nvSpPr>
-        <p:spPr>
-          <a:xfrm>
-            <a:off x="841248" y="3154680"/>
-            <a:ext cx="5815584" cy="219456"/>
+          <p:cNvPr id="10" name="Text 8"/>
+          <p:cNvSpPr txBox="1"/>
+          <p:nvPr/>
+        </p:nvSpPr>
+        <p:spPr>
+          <a:xfrm>
+            <a:off x="822960" y="2860243"/>
+            <a:ext cx="5394960" cy="201168"/>
           </a:xfrm>
           <a:prstGeom prst="rect">
             <a:avLst/>
@@ -16023,44 +16769,16 @@
             <a:pPr algn="l" indent="0" marL="0">
               <a:buNone/>
             </a:pPr>
-            <a:endParaRPr lang="en-US" sz="950" dirty="0"/>
-          </a:p>
-        </p:txBody>
-      </p:sp>
-      <p:sp>
-        <p:nvSpPr>
-          <p:cNvPr id="12" name="Text 10"/>
-          <p:cNvSpPr txBox="1"/>
-          <p:nvPr/>
-        </p:nvSpPr>
-        <p:spPr>
-          <a:xfrm>
-            <a:off x="841248" y="3378708"/>
-            <a:ext cx="5815584" cy="219456"/>
-          </a:xfrm>
-          <a:prstGeom prst="rect">
-            <a:avLst/>
-          </a:prstGeom>
-          <a:noFill/>
-          <a:ln/>
-        </p:spPr>
-        <p:txBody>
-          <a:bodyPr wrap="square" lIns="0" tIns="0" rIns="0" bIns="0" rtlCol="0" anchor="ctr"/>
-          <a:lstStyle/>
-          <a:p>
-            <a:pPr algn="l" indent="0" marL="0">
-              <a:buNone/>
-            </a:pPr>
             <a:r>
               <a:rPr lang="en-US" sz="950" dirty="0">
                 <a:solidFill>
-                  <a:srgbClr val="FFFFFF"/>
+                  <a:srgbClr val="E9A13B"/>
                 </a:solidFill>
                 <a:latin typeface="Courier New" pitchFamily="34" charset="0"/>
                 <a:ea typeface="Courier New" pitchFamily="34" charset="-122"/>
                 <a:cs typeface="Courier New" pitchFamily="34" charset="-120"/>
               </a:rPr>
-              <a:t>...............................................  63 / 284 ( 22%)</a:t>
+              <a:t>} catch (Throwable $e) {</a:t>
             </a:r>
             <a:endParaRPr lang="en-US" sz="950" dirty="0"/>
           </a:p>
@@ -16068,14 +16786,14 @@
       </p:sp>
       <p:sp>
         <p:nvSpPr>
-          <p:cNvPr id="13" name="Text 11"/>
-          <p:cNvSpPr txBox="1"/>
-          <p:nvPr/>
-        </p:nvSpPr>
-        <p:spPr>
-          <a:xfrm>
-            <a:off x="841248" y="3602736"/>
-            <a:ext cx="5815584" cy="219456"/>
+          <p:cNvPr id="11" name="Text 9"/>
+          <p:cNvSpPr txBox="1"/>
+          <p:nvPr/>
+        </p:nvSpPr>
+        <p:spPr>
+          <a:xfrm>
+            <a:off x="822960" y="3063240"/>
+            <a:ext cx="5394960" cy="201168"/>
           </a:xfrm>
           <a:prstGeom prst="rect">
             <a:avLst/>
@@ -16099,7 +16817,7 @@
                 <a:ea typeface="Courier New" pitchFamily="34" charset="-122"/>
                 <a:cs typeface="Courier New" pitchFamily="34" charset="-120"/>
               </a:rPr>
-              <a:t>............................................... 126 / 284 ( 44%)</a:t>
+              <a:t>    Log::error('Assistant failed to answer', [</a:t>
             </a:r>
             <a:endParaRPr lang="en-US" sz="950" dirty="0"/>
           </a:p>
@@ -16107,14 +16825,14 @@
       </p:sp>
       <p:sp>
         <p:nvSpPr>
-          <p:cNvPr id="14" name="Text 12"/>
-          <p:cNvSpPr txBox="1"/>
-          <p:nvPr/>
-        </p:nvSpPr>
-        <p:spPr>
-          <a:xfrm>
-            <a:off x="841248" y="3826764"/>
-            <a:ext cx="5815584" cy="219456"/>
+          <p:cNvPr id="12" name="Text 10"/>
+          <p:cNvSpPr txBox="1"/>
+          <p:nvPr/>
+        </p:nvSpPr>
+        <p:spPr>
+          <a:xfrm>
+            <a:off x="822960" y="3266237"/>
+            <a:ext cx="5394960" cy="201168"/>
           </a:xfrm>
           <a:prstGeom prst="rect">
             <a:avLst/>
@@ -16138,7 +16856,7 @@
                 <a:ea typeface="Courier New" pitchFamily="34" charset="-122"/>
                 <a:cs typeface="Courier New" pitchFamily="34" charset="-120"/>
               </a:rPr>
-              <a:t>............................................... 189 / 284 ( 66%)</a:t>
+              <a:t>        'question'  =&gt; $question,</a:t>
             </a:r>
             <a:endParaRPr lang="en-US" sz="950" dirty="0"/>
           </a:p>
@@ -16146,14 +16864,14 @@
       </p:sp>
       <p:sp>
         <p:nvSpPr>
-          <p:cNvPr id="15" name="Text 13"/>
-          <p:cNvSpPr txBox="1"/>
-          <p:nvPr/>
-        </p:nvSpPr>
-        <p:spPr>
-          <a:xfrm>
-            <a:off x="841248" y="4050792"/>
-            <a:ext cx="5815584" cy="219456"/>
+          <p:cNvPr id="13" name="Text 11"/>
+          <p:cNvSpPr txBox="1"/>
+          <p:nvPr/>
+        </p:nvSpPr>
+        <p:spPr>
+          <a:xfrm>
+            <a:off x="822960" y="3469234"/>
+            <a:ext cx="5394960" cy="201168"/>
           </a:xfrm>
           <a:prstGeom prst="rect">
             <a:avLst/>
@@ -16177,7 +16895,7 @@
                 <a:ea typeface="Courier New" pitchFamily="34" charset="-122"/>
                 <a:cs typeface="Courier New" pitchFamily="34" charset="-120"/>
               </a:rPr>
-              <a:t>............................................... 252 / 284 ( 88%)</a:t>
+              <a:t>        'user_id'   =&gt; $request-&gt;user()?-&gt;id,</a:t>
             </a:r>
             <a:endParaRPr lang="en-US" sz="950" dirty="0"/>
           </a:p>
@@ -16185,14 +16903,14 @@
       </p:sp>
       <p:sp>
         <p:nvSpPr>
-          <p:cNvPr id="16" name="Text 14"/>
-          <p:cNvSpPr txBox="1"/>
-          <p:nvPr/>
-        </p:nvSpPr>
-        <p:spPr>
-          <a:xfrm>
-            <a:off x="841248" y="4274820"/>
-            <a:ext cx="5815584" cy="219456"/>
+          <p:cNvPr id="14" name="Text 12"/>
+          <p:cNvSpPr txBox="1"/>
+          <p:nvPr/>
+        </p:nvSpPr>
+        <p:spPr>
+          <a:xfrm>
+            <a:off x="822960" y="3672230"/>
+            <a:ext cx="5394960" cy="201168"/>
           </a:xfrm>
           <a:prstGeom prst="rect">
             <a:avLst/>
@@ -16216,7 +16934,7 @@
                 <a:ea typeface="Courier New" pitchFamily="34" charset="-122"/>
                 <a:cs typeface="Courier New" pitchFamily="34" charset="-120"/>
               </a:rPr>
-              <a:t>...............................                 284 / 284 (100%)</a:t>
+              <a:t>        'exception' =&gt; $e,</a:t>
             </a:r>
             <a:endParaRPr lang="en-US" sz="950" dirty="0"/>
           </a:p>
@@ -16224,14 +16942,14 @@
       </p:sp>
       <p:sp>
         <p:nvSpPr>
-          <p:cNvPr id="17" name="Text 15"/>
-          <p:cNvSpPr txBox="1"/>
-          <p:nvPr/>
-        </p:nvSpPr>
-        <p:spPr>
-          <a:xfrm>
-            <a:off x="841248" y="4498848"/>
-            <a:ext cx="5815584" cy="219456"/>
+          <p:cNvPr id="15" name="Text 13"/>
+          <p:cNvSpPr txBox="1"/>
+          <p:nvPr/>
+        </p:nvSpPr>
+        <p:spPr>
+          <a:xfrm>
+            <a:off x="822960" y="3875227"/>
+            <a:ext cx="5394960" cy="201168"/>
           </a:xfrm>
           <a:prstGeom prst="rect">
             <a:avLst/>
@@ -16246,44 +16964,16 @@
             <a:pPr algn="l" indent="0" marL="0">
               <a:buNone/>
             </a:pPr>
-            <a:endParaRPr lang="en-US" sz="950" dirty="0"/>
-          </a:p>
-        </p:txBody>
-      </p:sp>
-      <p:sp>
-        <p:nvSpPr>
-          <p:cNvPr id="18" name="Text 16"/>
-          <p:cNvSpPr txBox="1"/>
-          <p:nvPr/>
-        </p:nvSpPr>
-        <p:spPr>
-          <a:xfrm>
-            <a:off x="841248" y="4722876"/>
-            <a:ext cx="5815584" cy="219456"/>
-          </a:xfrm>
-          <a:prstGeom prst="rect">
-            <a:avLst/>
-          </a:prstGeom>
-          <a:noFill/>
-          <a:ln/>
-        </p:spPr>
-        <p:txBody>
-          <a:bodyPr wrap="square" lIns="0" tIns="0" rIns="0" bIns="0" rtlCol="0" anchor="ctr"/>
-          <a:lstStyle/>
-          <a:p>
-            <a:pPr algn="l" indent="0" marL="0">
-              <a:buNone/>
-            </a:pPr>
             <a:r>
               <a:rPr lang="en-US" sz="950" dirty="0">
                 <a:solidFill>
-                  <a:srgbClr val="BFD4D7"/>
+                  <a:srgbClr val="FFFFFF"/>
                 </a:solidFill>
                 <a:latin typeface="Courier New" pitchFamily="34" charset="0"/>
                 <a:ea typeface="Courier New" pitchFamily="34" charset="-122"/>
                 <a:cs typeface="Courier New" pitchFamily="34" charset="-120"/>
               </a:rPr>
-              <a:t>Time: 00:06.900, Memory: 78.50 MB</a:t>
+              <a:t>    ]);</a:t>
             </a:r>
             <a:endParaRPr lang="en-US" sz="950" dirty="0"/>
           </a:p>
@@ -16291,14 +16981,14 @@
       </p:sp>
       <p:sp>
         <p:nvSpPr>
-          <p:cNvPr id="19" name="Text 17"/>
-          <p:cNvSpPr txBox="1"/>
-          <p:nvPr/>
-        </p:nvSpPr>
-        <p:spPr>
-          <a:xfrm>
-            <a:off x="841248" y="4946904"/>
-            <a:ext cx="5815584" cy="219456"/>
+          <p:cNvPr id="16" name="Text 14"/>
+          <p:cNvSpPr txBox="1"/>
+          <p:nvPr/>
+        </p:nvSpPr>
+        <p:spPr>
+          <a:xfrm>
+            <a:off x="822960" y="4078224"/>
+            <a:ext cx="5394960" cy="201168"/>
           </a:xfrm>
           <a:prstGeom prst="rect">
             <a:avLst/>
@@ -16319,14 +17009,14 @@
       </p:sp>
       <p:sp>
         <p:nvSpPr>
-          <p:cNvPr id="20" name="Text 18"/>
-          <p:cNvSpPr txBox="1"/>
-          <p:nvPr/>
-        </p:nvSpPr>
-        <p:spPr>
-          <a:xfrm>
-            <a:off x="841248" y="5170932"/>
-            <a:ext cx="5815584" cy="219456"/>
+          <p:cNvPr id="17" name="Text 15"/>
+          <p:cNvSpPr txBox="1"/>
+          <p:nvPr/>
+        </p:nvSpPr>
+        <p:spPr>
+          <a:xfrm>
+            <a:off x="822960" y="4281221"/>
+            <a:ext cx="5394960" cy="201168"/>
           </a:xfrm>
           <a:prstGeom prst="rect">
             <a:avLst/>
@@ -16342,15 +17032,15 @@
               <a:buNone/>
             </a:pPr>
             <a:r>
-              <a:rPr lang="en-US" sz="950" b="1" dirty="0">
-                <a:solidFill>
-                  <a:srgbClr val="5BD98A"/>
+              <a:rPr lang="en-US" sz="950" dirty="0">
+                <a:solidFill>
+                  <a:srgbClr val="00A896"/>
                 </a:solidFill>
                 <a:latin typeface="Courier New" pitchFamily="34" charset="0"/>
                 <a:ea typeface="Courier New" pitchFamily="34" charset="-122"/>
                 <a:cs typeface="Courier New" pitchFamily="34" charset="-120"/>
               </a:rPr>
-              <a:t>OK (284 tests, 883 assertions)</a:t>
+              <a:t>    $answer = Answer::failed(/* ... */)</a:t>
             </a:r>
             <a:endParaRPr lang="en-US" sz="950" dirty="0"/>
           </a:p>
@@ -16358,57 +17048,96 @@
       </p:sp>
       <p:sp>
         <p:nvSpPr>
-          <p:cNvPr id="21" name="Text 19"/>
-          <p:cNvSpPr txBox="1"/>
-          <p:nvPr/>
-        </p:nvSpPr>
-        <p:spPr>
-          <a:xfrm>
-            <a:off x="7253935" y="1572768"/>
-            <a:ext cx="4389120" cy="274320"/>
-          </a:xfrm>
-          <a:prstGeom prst="rect">
-            <a:avLst/>
-          </a:prstGeom>
-          <a:noFill/>
-          <a:ln/>
-        </p:spPr>
-        <p:txBody>
-          <a:bodyPr wrap="square" lIns="0" tIns="0" rIns="0" bIns="0" rtlCol="0" anchor="ctr"/>
-          <a:lstStyle/>
-          <a:p>
-            <a:pPr rtl="1" algn="r" indent="0" marL="0">
-              <a:buNone/>
-            </a:pPr>
-            <a:r>
-              <a:rPr lang="en-US" sz="1300" b="1" dirty="0">
-                <a:solidFill>
-                  <a:srgbClr val="02717D"/>
-                </a:solidFill>
-                <a:latin typeface="Arial" pitchFamily="34" charset="0"/>
-                <a:ea typeface="Arial" pitchFamily="34" charset="-122"/>
-                <a:cs typeface="Arial" pitchFamily="34" charset="-120"/>
-              </a:rPr>
-              <a:t>أين تتركّز التغطية</a:t>
-            </a:r>
-            <a:endParaRPr lang="en-US" sz="1300" dirty="0"/>
-          </a:p>
-        </p:txBody>
-      </p:sp>
-      <p:sp>
-        <p:nvSpPr>
-          <p:cNvPr id="22" name="Shape 20"/>
-          <p:cNvSpPr/>
-          <p:nvPr/>
-        </p:nvSpPr>
-        <p:spPr>
-          <a:xfrm>
-            <a:off x="7253935" y="1956816"/>
-            <a:ext cx="4389120" cy="475488"/>
+          <p:cNvPr id="18" name="Text 16"/>
+          <p:cNvSpPr txBox="1"/>
+          <p:nvPr/>
+        </p:nvSpPr>
+        <p:spPr>
+          <a:xfrm>
+            <a:off x="822960" y="4484218"/>
+            <a:ext cx="5394960" cy="201168"/>
+          </a:xfrm>
+          <a:prstGeom prst="rect">
+            <a:avLst/>
+          </a:prstGeom>
+          <a:noFill/>
+          <a:ln/>
+        </p:spPr>
+        <p:txBody>
+          <a:bodyPr wrap="square" lIns="0" tIns="0" rIns="0" bIns="0" rtlCol="0" anchor="ctr"/>
+          <a:lstStyle/>
+          <a:p>
+            <a:pPr algn="l" indent="0" marL="0">
+              <a:buNone/>
+            </a:pPr>
+            <a:r>
+              <a:rPr lang="en-US" sz="950" dirty="0">
+                <a:solidFill>
+                  <a:srgbClr val="00A896"/>
+                </a:solidFill>
+                <a:latin typeface="Courier New" pitchFamily="34" charset="0"/>
+                <a:ea typeface="Courier New" pitchFamily="34" charset="-122"/>
+                <a:cs typeface="Courier New" pitchFamily="34" charset="-120"/>
+              </a:rPr>
+              <a:t>        -&gt;toArray();</a:t>
+            </a:r>
+            <a:endParaRPr lang="en-US" sz="950" dirty="0"/>
+          </a:p>
+        </p:txBody>
+      </p:sp>
+      <p:sp>
+        <p:nvSpPr>
+          <p:cNvPr id="19" name="Text 17"/>
+          <p:cNvSpPr txBox="1"/>
+          <p:nvPr/>
+        </p:nvSpPr>
+        <p:spPr>
+          <a:xfrm>
+            <a:off x="822960" y="4687214"/>
+            <a:ext cx="5394960" cy="201168"/>
+          </a:xfrm>
+          <a:prstGeom prst="rect">
+            <a:avLst/>
+          </a:prstGeom>
+          <a:noFill/>
+          <a:ln/>
+        </p:spPr>
+        <p:txBody>
+          <a:bodyPr wrap="square" lIns="0" tIns="0" rIns="0" bIns="0" rtlCol="0" anchor="ctr"/>
+          <a:lstStyle/>
+          <a:p>
+            <a:pPr algn="l" indent="0" marL="0">
+              <a:buNone/>
+            </a:pPr>
+            <a:r>
+              <a:rPr lang="en-US" sz="950" dirty="0">
+                <a:solidFill>
+                  <a:srgbClr val="BFD4D7"/>
+                </a:solidFill>
+                <a:latin typeface="Courier New" pitchFamily="34" charset="0"/>
+                <a:ea typeface="Courier New" pitchFamily="34" charset="-122"/>
+                <a:cs typeface="Courier New" pitchFamily="34" charset="-120"/>
+              </a:rPr>
+              <a:t>}</a:t>
+            </a:r>
+            <a:endParaRPr lang="en-US" sz="950" dirty="0"/>
+          </a:p>
+        </p:txBody>
+      </p:sp>
+      <p:sp>
+        <p:nvSpPr>
+          <p:cNvPr id="20" name="Shape 18"/>
+          <p:cNvSpPr/>
+          <p:nvPr/>
+        </p:nvSpPr>
+        <p:spPr>
+          <a:xfrm>
+            <a:off x="6796735" y="1572768"/>
+            <a:ext cx="4846320" cy="914400"/>
           </a:xfrm>
           <a:prstGeom prst="roundRect">
             <a:avLst>
-              <a:gd name="adj" fmla="val 17308"/>
+              <a:gd name="adj" fmla="val 9000"/>
             </a:avLst>
           </a:prstGeom>
           <a:solidFill>
@@ -16426,14 +17155,58 @@
       </p:sp>
       <p:sp>
         <p:nvSpPr>
-          <p:cNvPr id="23" name="Text 21"/>
-          <p:cNvSpPr txBox="1"/>
-          <p:nvPr/>
-        </p:nvSpPr>
-        <p:spPr>
-          <a:xfrm>
-            <a:off x="7473391" y="1956816"/>
-            <a:ext cx="3291840" cy="475488"/>
+          <p:cNvPr id="21" name="Shape 19"/>
+          <p:cNvSpPr/>
+          <p:nvPr/>
+        </p:nvSpPr>
+        <p:spPr>
+          <a:xfrm>
+            <a:off x="11112703" y="1719072"/>
+            <a:ext cx="292608" cy="292608"/>
+          </a:xfrm>
+          <a:prstGeom prst="ellipse">
+            <a:avLst/>
+          </a:prstGeom>
+          <a:solidFill>
+            <a:srgbClr val="00A896"/>
+          </a:solidFill>
+          <a:ln/>
+        </p:spPr>
+      </p:sp>
+      <p:pic>
+        <p:nvPicPr>
+          <p:cNvPr id="22" name="Image 0" descr="preencoded.png">    </p:cNvPr>
+          <p:cNvPicPr>
+            <a:picLocks noChangeAspect="1"/>
+          </p:cNvPicPr>
+          <p:nvPr/>
+        </p:nvPicPr>
+        <p:blipFill>
+          <a:blip r:embed="rId1"/>
+          <a:stretch>
+            <a:fillRect/>
+          </a:stretch>
+        </p:blipFill>
+        <p:spPr>
+          <a:xfrm>
+            <a:off x="11185855" y="1792224"/>
+            <a:ext cx="146304" cy="146304"/>
+          </a:xfrm>
+          <a:prstGeom prst="rect">
+            <a:avLst/>
+          </a:prstGeom>
+        </p:spPr>
+      </p:pic>
+      <p:sp>
+        <p:nvSpPr>
+          <p:cNvPr id="23" name="Text 20"/>
+          <p:cNvSpPr txBox="1"/>
+          <p:nvPr/>
+        </p:nvSpPr>
+        <p:spPr>
+          <a:xfrm>
+            <a:off x="7016191" y="1700784"/>
+            <a:ext cx="3977640" cy="256032"/>
           </a:xfrm>
           <a:prstGeom prst="rect">
             <a:avLst/>
@@ -16449,7 +17222,7 @@
               <a:buNone/>
             </a:pPr>
             <a:r>
-              <a:rPr lang="en-US" sz="1150" dirty="0">
+              <a:rPr lang="en-US" sz="1350" b="1" dirty="0">
                 <a:solidFill>
                   <a:srgbClr val="16292E"/>
                 </a:solidFill>
@@ -16457,87 +17230,68 @@
                 <a:ea typeface="Arial" pitchFamily="34" charset="-122"/>
                 <a:cs typeface="Arial" pitchFamily="34" charset="-120"/>
               </a:rPr>
-              <a:t>المساعد الذكي</a:t>
-            </a:r>
-            <a:endParaRPr lang="en-US" sz="1150" dirty="0"/>
-          </a:p>
-        </p:txBody>
-      </p:sp>
-      <p:sp>
-        <p:nvSpPr>
-          <p:cNvPr id="24" name="Shape 22"/>
-          <p:cNvSpPr/>
-          <p:nvPr/>
-        </p:nvSpPr>
-        <p:spPr>
-          <a:xfrm>
-            <a:off x="10801807" y="2039112"/>
-            <a:ext cx="621792" cy="310896"/>
+              <a:t>للمستخدم</a:t>
+            </a:r>
+            <a:endParaRPr lang="en-US" sz="1350" dirty="0"/>
+          </a:p>
+        </p:txBody>
+      </p:sp>
+      <p:sp>
+        <p:nvSpPr>
+          <p:cNvPr id="24" name="Text 21"/>
+          <p:cNvSpPr txBox="1"/>
+          <p:nvPr/>
+        </p:nvSpPr>
+        <p:spPr>
+          <a:xfrm>
+            <a:off x="7016191" y="1984248"/>
+            <a:ext cx="4389120" cy="411480"/>
+          </a:xfrm>
+          <a:prstGeom prst="rect">
+            <a:avLst/>
+          </a:prstGeom>
+          <a:noFill/>
+          <a:ln/>
+        </p:spPr>
+        <p:txBody>
+          <a:bodyPr wrap="square" lIns="0" tIns="0" rIns="0" bIns="0" rtlCol="0" anchor="ctr"/>
+          <a:lstStyle/>
+          <a:p>
+            <a:pPr rtl="1" algn="r" indent="0" marL="0">
+              <a:lnSpc>
+                <a:spcPts val="1400"/>
+              </a:lnSpc>
+              <a:buNone/>
+            </a:pPr>
+            <a:r>
+              <a:rPr lang="en-US" sz="1100" dirty="0">
+                <a:solidFill>
+                  <a:srgbClr val="5C7378"/>
+                </a:solidFill>
+                <a:latin typeface="Arial" pitchFamily="34" charset="0"/>
+                <a:ea typeface="Arial" pitchFamily="34" charset="-122"/>
+                <a:cs typeface="Arial" pitchFamily="34" charset="-120"/>
+              </a:rPr>
+              <a:t>جملة عربية لبقة تقترح خطوة بديلة، بحالة ⁦HTTP 200⁩، ودون أي تفصيل تقني</a:t>
+            </a:r>
+            <a:endParaRPr lang="en-US" sz="1100" dirty="0"/>
+          </a:p>
+        </p:txBody>
+      </p:sp>
+      <p:sp>
+        <p:nvSpPr>
+          <p:cNvPr id="25" name="Shape 22"/>
+          <p:cNvSpPr/>
+          <p:nvPr/>
+        </p:nvSpPr>
+        <p:spPr>
+          <a:xfrm>
+            <a:off x="6796735" y="2596896"/>
+            <a:ext cx="4846320" cy="914400"/>
           </a:xfrm>
           <a:prstGeom prst="roundRect">
             <a:avLst>
-              <a:gd name="adj" fmla="val 23529"/>
-            </a:avLst>
-          </a:prstGeom>
-          <a:solidFill>
-            <a:srgbClr val="E9A13B"/>
-          </a:solidFill>
-          <a:ln/>
-        </p:spPr>
-      </p:sp>
-      <p:sp>
-        <p:nvSpPr>
-          <p:cNvPr id="25" name="Text 23"/>
-          <p:cNvSpPr txBox="1"/>
-          <p:nvPr/>
-        </p:nvSpPr>
-        <p:spPr>
-          <a:xfrm>
-            <a:off x="10801807" y="2039112"/>
-            <a:ext cx="621792" cy="310896"/>
-          </a:xfrm>
-          <a:prstGeom prst="rect">
-            <a:avLst/>
-          </a:prstGeom>
-          <a:noFill/>
-          <a:ln/>
-        </p:spPr>
-        <p:txBody>
-          <a:bodyPr wrap="square" lIns="0" tIns="0" rIns="0" bIns="0" rtlCol="0" anchor="ctr"/>
-          <a:lstStyle/>
-          <a:p>
-            <a:pPr algn="ctr" indent="0" marL="0">
-              <a:buNone/>
-            </a:pPr>
-            <a:r>
-              <a:rPr lang="en-US" sz="1150" b="1" dirty="0">
-                <a:solidFill>
-                  <a:srgbClr val="FFFFFF"/>
-                </a:solidFill>
-                <a:latin typeface="Arial" pitchFamily="34" charset="0"/>
-                <a:ea typeface="Arial" pitchFamily="34" charset="-122"/>
-                <a:cs typeface="Arial" pitchFamily="34" charset="-120"/>
-              </a:rPr>
-              <a:t>50</a:t>
-            </a:r>
-            <a:endParaRPr lang="en-US" sz="1150" dirty="0"/>
-          </a:p>
-        </p:txBody>
-      </p:sp>
-      <p:sp>
-        <p:nvSpPr>
-          <p:cNvPr id="26" name="Shape 24"/>
-          <p:cNvSpPr/>
-          <p:nvPr/>
-        </p:nvSpPr>
-        <p:spPr>
-          <a:xfrm>
-            <a:off x="7253935" y="2523744"/>
-            <a:ext cx="4389120" cy="475488"/>
-          </a:xfrm>
-          <a:prstGeom prst="roundRect">
-            <a:avLst>
-              <a:gd name="adj" fmla="val 17308"/>
+              <a:gd name="adj" fmla="val 9000"/>
             </a:avLst>
           </a:prstGeom>
           <a:solidFill>
@@ -16555,14 +17309,58 @@
       </p:sp>
       <p:sp>
         <p:nvSpPr>
-          <p:cNvPr id="27" name="Text 25"/>
-          <p:cNvSpPr txBox="1"/>
-          <p:nvPr/>
-        </p:nvSpPr>
-        <p:spPr>
-          <a:xfrm>
-            <a:off x="7473391" y="2523744"/>
-            <a:ext cx="3291840" cy="475488"/>
+          <p:cNvPr id="26" name="Shape 23"/>
+          <p:cNvSpPr/>
+          <p:nvPr/>
+        </p:nvSpPr>
+        <p:spPr>
+          <a:xfrm>
+            <a:off x="11112703" y="2743200"/>
+            <a:ext cx="292608" cy="292608"/>
+          </a:xfrm>
+          <a:prstGeom prst="ellipse">
+            <a:avLst/>
+          </a:prstGeom>
+          <a:solidFill>
+            <a:srgbClr val="E9A13B"/>
+          </a:solidFill>
+          <a:ln/>
+        </p:spPr>
+      </p:sp>
+      <p:pic>
+        <p:nvPicPr>
+          <p:cNvPr id="27" name="Image 1" descr="preencoded.png">    </p:cNvPr>
+          <p:cNvPicPr>
+            <a:picLocks noChangeAspect="1"/>
+          </p:cNvPicPr>
+          <p:nvPr/>
+        </p:nvPicPr>
+        <p:blipFill>
+          <a:blip r:embed="rId2"/>
+          <a:stretch>
+            <a:fillRect/>
+          </a:stretch>
+        </p:blipFill>
+        <p:spPr>
+          <a:xfrm>
+            <a:off x="11185855" y="2816352"/>
+            <a:ext cx="146304" cy="146304"/>
+          </a:xfrm>
+          <a:prstGeom prst="rect">
+            <a:avLst/>
+          </a:prstGeom>
+        </p:spPr>
+      </p:pic>
+      <p:sp>
+        <p:nvSpPr>
+          <p:cNvPr id="28" name="Text 24"/>
+          <p:cNvSpPr txBox="1"/>
+          <p:nvPr/>
+        </p:nvSpPr>
+        <p:spPr>
+          <a:xfrm>
+            <a:off x="7016191" y="2724912"/>
+            <a:ext cx="3977640" cy="256032"/>
           </a:xfrm>
           <a:prstGeom prst="rect">
             <a:avLst/>
@@ -16578,7 +17376,7 @@
               <a:buNone/>
             </a:pPr>
             <a:r>
-              <a:rPr lang="en-US" sz="1150" dirty="0">
+              <a:rPr lang="en-US" sz="1350" b="1" dirty="0">
                 <a:solidFill>
                   <a:srgbClr val="16292E"/>
                 </a:solidFill>
@@ -16586,87 +17384,68 @@
                 <a:ea typeface="Arial" pitchFamily="34" charset="-122"/>
                 <a:cs typeface="Arial" pitchFamily="34" charset="-120"/>
               </a:rPr>
-              <a:t>خدمات المجال</a:t>
-            </a:r>
-            <a:endParaRPr lang="en-US" sz="1150" dirty="0"/>
-          </a:p>
-        </p:txBody>
-      </p:sp>
-      <p:sp>
-        <p:nvSpPr>
-          <p:cNvPr id="28" name="Shape 26"/>
-          <p:cNvSpPr/>
-          <p:nvPr/>
-        </p:nvSpPr>
-        <p:spPr>
-          <a:xfrm>
-            <a:off x="10801807" y="2606040"/>
-            <a:ext cx="621792" cy="310896"/>
+              <a:t>للمطوّر</a:t>
+            </a:r>
+            <a:endParaRPr lang="en-US" sz="1350" dirty="0"/>
+          </a:p>
+        </p:txBody>
+      </p:sp>
+      <p:sp>
+        <p:nvSpPr>
+          <p:cNvPr id="29" name="Text 25"/>
+          <p:cNvSpPr txBox="1"/>
+          <p:nvPr/>
+        </p:nvSpPr>
+        <p:spPr>
+          <a:xfrm>
+            <a:off x="7016191" y="3008376"/>
+            <a:ext cx="4389120" cy="411480"/>
+          </a:xfrm>
+          <a:prstGeom prst="rect">
+            <a:avLst/>
+          </a:prstGeom>
+          <a:noFill/>
+          <a:ln/>
+        </p:spPr>
+        <p:txBody>
+          <a:bodyPr wrap="square" lIns="0" tIns="0" rIns="0" bIns="0" rtlCol="0" anchor="ctr"/>
+          <a:lstStyle/>
+          <a:p>
+            <a:pPr rtl="1" algn="r" indent="0" marL="0">
+              <a:lnSpc>
+                <a:spcPts val="1400"/>
+              </a:lnSpc>
+              <a:buNone/>
+            </a:pPr>
+            <a:r>
+              <a:rPr lang="en-US" sz="1100" dirty="0">
+                <a:solidFill>
+                  <a:srgbClr val="5C7378"/>
+                </a:solidFill>
+                <a:latin typeface="Arial" pitchFamily="34" charset="0"/>
+                <a:ea typeface="Arial" pitchFamily="34" charset="-122"/>
+                <a:cs typeface="Arial" pitchFamily="34" charset="-120"/>
+              </a:rPr>
+              <a:t>الاستثناء كاملًا في السجل، ومعه نص السؤال الذي سبّبه ومُعرِّف المستخدم</a:t>
+            </a:r>
+            <a:endParaRPr lang="en-US" sz="1100" dirty="0"/>
+          </a:p>
+        </p:txBody>
+      </p:sp>
+      <p:sp>
+        <p:nvSpPr>
+          <p:cNvPr id="30" name="Shape 26"/>
+          <p:cNvSpPr/>
+          <p:nvPr/>
+        </p:nvSpPr>
+        <p:spPr>
+          <a:xfrm>
+            <a:off x="6796735" y="3621024"/>
+            <a:ext cx="4846320" cy="1261872"/>
           </a:xfrm>
           <a:prstGeom prst="roundRect">
             <a:avLst>
-              <a:gd name="adj" fmla="val 23529"/>
-            </a:avLst>
-          </a:prstGeom>
-          <a:solidFill>
-            <a:srgbClr val="02717D"/>
-          </a:solidFill>
-          <a:ln/>
-        </p:spPr>
-      </p:sp>
-      <p:sp>
-        <p:nvSpPr>
-          <p:cNvPr id="29" name="Text 27"/>
-          <p:cNvSpPr txBox="1"/>
-          <p:nvPr/>
-        </p:nvSpPr>
-        <p:spPr>
-          <a:xfrm>
-            <a:off x="10801807" y="2606040"/>
-            <a:ext cx="621792" cy="310896"/>
-          </a:xfrm>
-          <a:prstGeom prst="rect">
-            <a:avLst/>
-          </a:prstGeom>
-          <a:noFill/>
-          <a:ln/>
-        </p:spPr>
-        <p:txBody>
-          <a:bodyPr wrap="square" lIns="0" tIns="0" rIns="0" bIns="0" rtlCol="0" anchor="ctr"/>
-          <a:lstStyle/>
-          <a:p>
-            <a:pPr algn="ctr" indent="0" marL="0">
-              <a:buNone/>
-            </a:pPr>
-            <a:r>
-              <a:rPr lang="en-US" sz="1150" b="1" dirty="0">
-                <a:solidFill>
-                  <a:srgbClr val="FFFFFF"/>
-                </a:solidFill>
-                <a:latin typeface="Arial" pitchFamily="34" charset="0"/>
-                <a:ea typeface="Arial" pitchFamily="34" charset="-122"/>
-                <a:cs typeface="Arial" pitchFamily="34" charset="-120"/>
-              </a:rPr>
-              <a:t>28</a:t>
-            </a:r>
-            <a:endParaRPr lang="en-US" sz="1150" dirty="0"/>
-          </a:p>
-        </p:txBody>
-      </p:sp>
-      <p:sp>
-        <p:nvSpPr>
-          <p:cNvPr id="30" name="Shape 28"/>
-          <p:cNvSpPr/>
-          <p:nvPr/>
-        </p:nvSpPr>
-        <p:spPr>
-          <a:xfrm>
-            <a:off x="7253935" y="3090672"/>
-            <a:ext cx="4389120" cy="475488"/>
-          </a:xfrm>
-          <a:prstGeom prst="roundRect">
-            <a:avLst>
-              <a:gd name="adj" fmla="val 17308"/>
+              <a:gd name="adj" fmla="val 6522"/>
             </a:avLst>
           </a:prstGeom>
           <a:solidFill>
@@ -16684,14 +17463,14 @@
       </p:sp>
       <p:sp>
         <p:nvSpPr>
-          <p:cNvPr id="31" name="Text 29"/>
-          <p:cNvSpPr txBox="1"/>
-          <p:nvPr/>
-        </p:nvSpPr>
-        <p:spPr>
-          <a:xfrm>
-            <a:off x="7473391" y="3090672"/>
-            <a:ext cx="3291840" cy="475488"/>
+          <p:cNvPr id="31" name="Text 27"/>
+          <p:cNvSpPr txBox="1"/>
+          <p:nvPr/>
+        </p:nvSpPr>
+        <p:spPr>
+          <a:xfrm>
+            <a:off x="7016191" y="3749040"/>
+            <a:ext cx="4407408" cy="237744"/>
           </a:xfrm>
           <a:prstGeom prst="rect">
             <a:avLst/>
@@ -16707,539 +17486,52 @@
               <a:buNone/>
             </a:pPr>
             <a:r>
-              <a:rPr lang="en-US" sz="1150" dirty="0">
-                <a:solidFill>
-                  <a:srgbClr val="16292E"/>
-                </a:solidFill>
-                <a:latin typeface="Arial" pitchFamily="34" charset="0"/>
-                <a:ea typeface="Arial" pitchFamily="34" charset="-122"/>
-                <a:cs typeface="Arial" pitchFamily="34" charset="-120"/>
-              </a:rPr>
-              <a:t>الترشيح والقوائم</a:t>
-            </a:r>
-            <a:endParaRPr lang="en-US" sz="1150" dirty="0"/>
-          </a:p>
-        </p:txBody>
-      </p:sp>
-      <p:sp>
-        <p:nvSpPr>
-          <p:cNvPr id="32" name="Shape 30"/>
-          <p:cNvSpPr/>
-          <p:nvPr/>
-        </p:nvSpPr>
-        <p:spPr>
-          <a:xfrm>
-            <a:off x="10801807" y="3172968"/>
-            <a:ext cx="621792" cy="310896"/>
+              <a:rPr lang="en-US" sz="1050" b="1" dirty="0">
+                <a:solidFill>
+                  <a:srgbClr val="02717D"/>
+                </a:solidFill>
+                <a:latin typeface="Arial" pitchFamily="34" charset="0"/>
+                <a:ea typeface="Arial" pitchFamily="34" charset="-122"/>
+                <a:cs typeface="Arial" pitchFamily="34" charset="-120"/>
+              </a:rPr>
+              <a:t>ما يراه المستخدم</a:t>
+            </a:r>
+            <a:endParaRPr lang="en-US" sz="1050" dirty="0"/>
+          </a:p>
+        </p:txBody>
+      </p:sp>
+      <p:sp>
+        <p:nvSpPr>
+          <p:cNvPr id="32" name="Shape 28"/>
+          <p:cNvSpPr/>
+          <p:nvPr/>
+        </p:nvSpPr>
+        <p:spPr>
+          <a:xfrm>
+            <a:off x="7016191" y="4041648"/>
+            <a:ext cx="4407408" cy="694944"/>
           </a:xfrm>
           <a:prstGeom prst="roundRect">
             <a:avLst>
-              <a:gd name="adj" fmla="val 23529"/>
+              <a:gd name="adj" fmla="val 15789"/>
             </a:avLst>
           </a:prstGeom>
           <a:solidFill>
-            <a:srgbClr val="02717D"/>
-          </a:solidFill>
-          <a:ln/>
-        </p:spPr>
-      </p:sp>
-      <p:sp>
-        <p:nvSpPr>
-          <p:cNvPr id="33" name="Text 31"/>
-          <p:cNvSpPr txBox="1"/>
-          <p:nvPr/>
-        </p:nvSpPr>
-        <p:spPr>
-          <a:xfrm>
-            <a:off x="10801807" y="3172968"/>
-            <a:ext cx="621792" cy="310896"/>
-          </a:xfrm>
-          <a:prstGeom prst="rect">
-            <a:avLst/>
-          </a:prstGeom>
-          <a:noFill/>
-          <a:ln/>
-        </p:spPr>
-        <p:txBody>
-          <a:bodyPr wrap="square" lIns="0" tIns="0" rIns="0" bIns="0" rtlCol="0" anchor="ctr"/>
-          <a:lstStyle/>
-          <a:p>
-            <a:pPr algn="ctr" indent="0" marL="0">
-              <a:buNone/>
-            </a:pPr>
-            <a:r>
-              <a:rPr lang="en-US" sz="1150" b="1" dirty="0">
-                <a:solidFill>
-                  <a:srgbClr val="FFFFFF"/>
-                </a:solidFill>
-                <a:latin typeface="Arial" pitchFamily="34" charset="0"/>
-                <a:ea typeface="Arial" pitchFamily="34" charset="-122"/>
-                <a:cs typeface="Arial" pitchFamily="34" charset="-120"/>
-              </a:rPr>
-              <a:t>28</a:t>
-            </a:r>
-            <a:endParaRPr lang="en-US" sz="1150" dirty="0"/>
-          </a:p>
-        </p:txBody>
-      </p:sp>
-      <p:sp>
-        <p:nvSpPr>
-          <p:cNvPr id="34" name="Shape 32"/>
-          <p:cNvSpPr/>
-          <p:nvPr/>
-        </p:nvSpPr>
-        <p:spPr>
-          <a:xfrm>
-            <a:off x="7253935" y="3657600"/>
-            <a:ext cx="4389120" cy="475488"/>
-          </a:xfrm>
-          <a:prstGeom prst="roundRect">
-            <a:avLst>
-              <a:gd name="adj" fmla="val 17308"/>
-            </a:avLst>
-          </a:prstGeom>
-          <a:solidFill>
-            <a:srgbClr val="FFFFFF"/>
-          </a:solidFill>
-          <a:ln/>
-          <a:effectLst>
-            <a:outerShdw sx="100000" sy="100000" kx="0" ky="0" algn="bl" rotWithShape="0" blurRad="127000" dist="25400" dir="5400000">
-              <a:srgbClr val="0A2E36">
-                <a:alpha val="10000"/>
-              </a:srgbClr>
-            </a:outerShdw>
-          </a:effectLst>
-        </p:spPr>
-      </p:sp>
-      <p:sp>
-        <p:nvSpPr>
-          <p:cNvPr id="35" name="Text 33"/>
-          <p:cNvSpPr txBox="1"/>
-          <p:nvPr/>
-        </p:nvSpPr>
-        <p:spPr>
-          <a:xfrm>
-            <a:off x="7473391" y="3657600"/>
-            <a:ext cx="3291840" cy="475488"/>
-          </a:xfrm>
-          <a:prstGeom prst="rect">
-            <a:avLst/>
-          </a:prstGeom>
-          <a:noFill/>
-          <a:ln/>
-        </p:spPr>
-        <p:txBody>
-          <a:bodyPr wrap="square" lIns="0" tIns="0" rIns="0" bIns="0" rtlCol="0" anchor="ctr"/>
-          <a:lstStyle/>
-          <a:p>
-            <a:pPr rtl="1" algn="r" indent="0" marL="0">
-              <a:buNone/>
-            </a:pPr>
-            <a:r>
-              <a:rPr lang="en-US" sz="1150" dirty="0">
-                <a:solidFill>
-                  <a:srgbClr val="16292E"/>
-                </a:solidFill>
-                <a:latin typeface="Arial" pitchFamily="34" charset="0"/>
-                <a:ea typeface="Arial" pitchFamily="34" charset="-122"/>
-                <a:cs typeface="Arial" pitchFamily="34" charset="-120"/>
-              </a:rPr>
-              <a:t>البحث العربي والفهرسة</a:t>
-            </a:r>
-            <a:endParaRPr lang="en-US" sz="1150" dirty="0"/>
-          </a:p>
-        </p:txBody>
-      </p:sp>
-      <p:sp>
-        <p:nvSpPr>
-          <p:cNvPr id="36" name="Shape 34"/>
-          <p:cNvSpPr/>
-          <p:nvPr/>
-        </p:nvSpPr>
-        <p:spPr>
-          <a:xfrm>
-            <a:off x="10801807" y="3739896"/>
-            <a:ext cx="621792" cy="310896"/>
-          </a:xfrm>
-          <a:prstGeom prst="roundRect">
-            <a:avLst>
-              <a:gd name="adj" fmla="val 23529"/>
-            </a:avLst>
-          </a:prstGeom>
-          <a:solidFill>
-            <a:srgbClr val="02717D"/>
-          </a:solidFill>
-          <a:ln/>
-        </p:spPr>
-      </p:sp>
-      <p:sp>
-        <p:nvSpPr>
-          <p:cNvPr id="37" name="Text 35"/>
-          <p:cNvSpPr txBox="1"/>
-          <p:nvPr/>
-        </p:nvSpPr>
-        <p:spPr>
-          <a:xfrm>
-            <a:off x="10801807" y="3739896"/>
-            <a:ext cx="621792" cy="310896"/>
-          </a:xfrm>
-          <a:prstGeom prst="rect">
-            <a:avLst/>
-          </a:prstGeom>
-          <a:noFill/>
-          <a:ln/>
-        </p:spPr>
-        <p:txBody>
-          <a:bodyPr wrap="square" lIns="0" tIns="0" rIns="0" bIns="0" rtlCol="0" anchor="ctr"/>
-          <a:lstStyle/>
-          <a:p>
-            <a:pPr algn="ctr" indent="0" marL="0">
-              <a:buNone/>
-            </a:pPr>
-            <a:r>
-              <a:rPr lang="en-US" sz="1150" b="1" dirty="0">
-                <a:solidFill>
-                  <a:srgbClr val="FFFFFF"/>
-                </a:solidFill>
-                <a:latin typeface="Arial" pitchFamily="34" charset="0"/>
-                <a:ea typeface="Arial" pitchFamily="34" charset="-122"/>
-                <a:cs typeface="Arial" pitchFamily="34" charset="-120"/>
-              </a:rPr>
-              <a:t>22</a:t>
-            </a:r>
-            <a:endParaRPr lang="en-US" sz="1150" dirty="0"/>
-          </a:p>
-        </p:txBody>
-      </p:sp>
-      <p:sp>
-        <p:nvSpPr>
-          <p:cNvPr id="38" name="Shape 36"/>
-          <p:cNvSpPr/>
-          <p:nvPr/>
-        </p:nvSpPr>
-        <p:spPr>
-          <a:xfrm>
-            <a:off x="7253935" y="4224528"/>
-            <a:ext cx="4389120" cy="475488"/>
-          </a:xfrm>
-          <a:prstGeom prst="roundRect">
-            <a:avLst>
-              <a:gd name="adj" fmla="val 17308"/>
-            </a:avLst>
-          </a:prstGeom>
-          <a:solidFill>
-            <a:srgbClr val="FFFFFF"/>
-          </a:solidFill>
-          <a:ln/>
-          <a:effectLst>
-            <a:outerShdw sx="100000" sy="100000" kx="0" ky="0" algn="bl" rotWithShape="0" blurRad="127000" dist="25400" dir="5400000">
-              <a:srgbClr val="0A2E36">
-                <a:alpha val="10000"/>
-              </a:srgbClr>
-            </a:outerShdw>
-          </a:effectLst>
-        </p:spPr>
-      </p:sp>
-      <p:sp>
-        <p:nvSpPr>
-          <p:cNvPr id="39" name="Text 37"/>
-          <p:cNvSpPr txBox="1"/>
-          <p:nvPr/>
-        </p:nvSpPr>
-        <p:spPr>
-          <a:xfrm>
-            <a:off x="7473391" y="4224528"/>
-            <a:ext cx="3291840" cy="475488"/>
-          </a:xfrm>
-          <a:prstGeom prst="rect">
-            <a:avLst/>
-          </a:prstGeom>
-          <a:noFill/>
-          <a:ln/>
-        </p:spPr>
-        <p:txBody>
-          <a:bodyPr wrap="square" lIns="0" tIns="0" rIns="0" bIns="0" rtlCol="0" anchor="ctr"/>
-          <a:lstStyle/>
-          <a:p>
-            <a:pPr rtl="1" algn="r" indent="0" marL="0">
-              <a:buNone/>
-            </a:pPr>
-            <a:r>
-              <a:rPr lang="en-US" sz="1150" dirty="0">
-                <a:solidFill>
-                  <a:srgbClr val="16292E"/>
-                </a:solidFill>
-                <a:latin typeface="Arial" pitchFamily="34" charset="0"/>
-                <a:ea typeface="Arial" pitchFamily="34" charset="-122"/>
-                <a:cs typeface="Arial" pitchFamily="34" charset="-120"/>
-              </a:rPr>
-              <a:t>التحقق من المدخلات</a:t>
-            </a:r>
-            <a:endParaRPr lang="en-US" sz="1150" dirty="0"/>
-          </a:p>
-        </p:txBody>
-      </p:sp>
-      <p:sp>
-        <p:nvSpPr>
-          <p:cNvPr id="40" name="Shape 38"/>
-          <p:cNvSpPr/>
-          <p:nvPr/>
-        </p:nvSpPr>
-        <p:spPr>
-          <a:xfrm>
-            <a:off x="10801807" y="4306824"/>
-            <a:ext cx="621792" cy="310896"/>
-          </a:xfrm>
-          <a:prstGeom prst="roundRect">
-            <a:avLst>
-              <a:gd name="adj" fmla="val 23529"/>
-            </a:avLst>
-          </a:prstGeom>
-          <a:solidFill>
-            <a:srgbClr val="02717D"/>
-          </a:solidFill>
-          <a:ln/>
-        </p:spPr>
-      </p:sp>
-      <p:sp>
-        <p:nvSpPr>
-          <p:cNvPr id="41" name="Text 39"/>
-          <p:cNvSpPr txBox="1"/>
-          <p:nvPr/>
-        </p:nvSpPr>
-        <p:spPr>
-          <a:xfrm>
-            <a:off x="10801807" y="4306824"/>
-            <a:ext cx="621792" cy="310896"/>
-          </a:xfrm>
-          <a:prstGeom prst="rect">
-            <a:avLst/>
-          </a:prstGeom>
-          <a:noFill/>
-          <a:ln/>
-        </p:spPr>
-        <p:txBody>
-          <a:bodyPr wrap="square" lIns="0" tIns="0" rIns="0" bIns="0" rtlCol="0" anchor="ctr"/>
-          <a:lstStyle/>
-          <a:p>
-            <a:pPr algn="ctr" indent="0" marL="0">
-              <a:buNone/>
-            </a:pPr>
-            <a:r>
-              <a:rPr lang="en-US" sz="1150" b="1" dirty="0">
-                <a:solidFill>
-                  <a:srgbClr val="FFFFFF"/>
-                </a:solidFill>
-                <a:latin typeface="Arial" pitchFamily="34" charset="0"/>
-                <a:ea typeface="Arial" pitchFamily="34" charset="-122"/>
-                <a:cs typeface="Arial" pitchFamily="34" charset="-120"/>
-              </a:rPr>
-              <a:t>13</a:t>
-            </a:r>
-            <a:endParaRPr lang="en-US" sz="1150" dirty="0"/>
-          </a:p>
-        </p:txBody>
-      </p:sp>
-      <p:sp>
-        <p:nvSpPr>
-          <p:cNvPr id="42" name="Shape 40"/>
-          <p:cNvSpPr/>
-          <p:nvPr/>
-        </p:nvSpPr>
-        <p:spPr>
-          <a:xfrm>
-            <a:off x="7253935" y="4791456"/>
-            <a:ext cx="4389120" cy="475488"/>
-          </a:xfrm>
-          <a:prstGeom prst="roundRect">
-            <a:avLst>
-              <a:gd name="adj" fmla="val 17308"/>
-            </a:avLst>
-          </a:prstGeom>
-          <a:solidFill>
-            <a:srgbClr val="FFFFFF"/>
-          </a:solidFill>
-          <a:ln/>
-          <a:effectLst>
-            <a:outerShdw sx="100000" sy="100000" kx="0" ky="0" algn="bl" rotWithShape="0" blurRad="127000" dist="25400" dir="5400000">
-              <a:srgbClr val="0A2E36">
-                <a:alpha val="10000"/>
-              </a:srgbClr>
-            </a:outerShdw>
-          </a:effectLst>
-        </p:spPr>
-      </p:sp>
-      <p:sp>
-        <p:nvSpPr>
-          <p:cNvPr id="43" name="Text 41"/>
-          <p:cNvSpPr txBox="1"/>
-          <p:nvPr/>
-        </p:nvSpPr>
-        <p:spPr>
-          <a:xfrm>
-            <a:off x="7473391" y="4791456"/>
-            <a:ext cx="3291840" cy="475488"/>
-          </a:xfrm>
-          <a:prstGeom prst="rect">
-            <a:avLst/>
-          </a:prstGeom>
-          <a:noFill/>
-          <a:ln/>
-        </p:spPr>
-        <p:txBody>
-          <a:bodyPr wrap="square" lIns="0" tIns="0" rIns="0" bIns="0" rtlCol="0" anchor="ctr"/>
-          <a:lstStyle/>
-          <a:p>
-            <a:pPr rtl="1" algn="r" indent="0" marL="0">
-              <a:buNone/>
-            </a:pPr>
-            <a:r>
-              <a:rPr lang="en-US" sz="1150" dirty="0">
-                <a:solidFill>
-                  <a:srgbClr val="16292E"/>
-                </a:solidFill>
-                <a:latin typeface="Arial" pitchFamily="34" charset="0"/>
-                <a:ea typeface="Arial" pitchFamily="34" charset="-122"/>
-                <a:cs typeface="Arial" pitchFamily="34" charset="-120"/>
-              </a:rPr>
-              <a:t>الصلاحيات والمصادقة</a:t>
-            </a:r>
-            <a:endParaRPr lang="en-US" sz="1150" dirty="0"/>
-          </a:p>
-        </p:txBody>
-      </p:sp>
-      <p:sp>
-        <p:nvSpPr>
-          <p:cNvPr id="44" name="Shape 42"/>
-          <p:cNvSpPr/>
-          <p:nvPr/>
-        </p:nvSpPr>
-        <p:spPr>
-          <a:xfrm>
-            <a:off x="10801807" y="4873752"/>
-            <a:ext cx="621792" cy="310896"/>
-          </a:xfrm>
-          <a:prstGeom prst="roundRect">
-            <a:avLst>
-              <a:gd name="adj" fmla="val 23529"/>
-            </a:avLst>
-          </a:prstGeom>
-          <a:solidFill>
-            <a:srgbClr val="02717D"/>
-          </a:solidFill>
-          <a:ln/>
-        </p:spPr>
-      </p:sp>
-      <p:sp>
-        <p:nvSpPr>
-          <p:cNvPr id="45" name="Text 43"/>
-          <p:cNvSpPr txBox="1"/>
-          <p:nvPr/>
-        </p:nvSpPr>
-        <p:spPr>
-          <a:xfrm>
-            <a:off x="10801807" y="4873752"/>
-            <a:ext cx="621792" cy="310896"/>
-          </a:xfrm>
-          <a:prstGeom prst="rect">
-            <a:avLst/>
-          </a:prstGeom>
-          <a:noFill/>
-          <a:ln/>
-        </p:spPr>
-        <p:txBody>
-          <a:bodyPr wrap="square" lIns="0" tIns="0" rIns="0" bIns="0" rtlCol="0" anchor="ctr"/>
-          <a:lstStyle/>
-          <a:p>
-            <a:pPr algn="ctr" indent="0" marL="0">
-              <a:buNone/>
-            </a:pPr>
-            <a:r>
-              <a:rPr lang="en-US" sz="1150" b="1" dirty="0">
-                <a:solidFill>
-                  <a:srgbClr val="FFFFFF"/>
-                </a:solidFill>
-                <a:latin typeface="Arial" pitchFamily="34" charset="0"/>
-                <a:ea typeface="Arial" pitchFamily="34" charset="-122"/>
-                <a:cs typeface="Arial" pitchFamily="34" charset="-120"/>
-              </a:rPr>
-              <a:t>11</a:t>
-            </a:r>
-            <a:endParaRPr lang="en-US" sz="1150" dirty="0"/>
-          </a:p>
-        </p:txBody>
-      </p:sp>
-      <p:sp>
-        <p:nvSpPr>
-          <p:cNvPr id="46" name="Shape 44"/>
-          <p:cNvSpPr/>
-          <p:nvPr/>
-        </p:nvSpPr>
-        <p:spPr>
-          <a:xfrm>
-            <a:off x="7253935" y="5394960"/>
-            <a:ext cx="4389120" cy="877824"/>
-          </a:xfrm>
-          <a:prstGeom prst="roundRect">
-            <a:avLst>
-              <a:gd name="adj" fmla="val 9375"/>
-            </a:avLst>
-          </a:prstGeom>
-          <a:solidFill>
-            <a:srgbClr val="0A2E36"/>
-          </a:solidFill>
-          <a:ln/>
-        </p:spPr>
-      </p:sp>
-      <p:sp>
-        <p:nvSpPr>
-          <p:cNvPr id="47" name="Text 45"/>
-          <p:cNvSpPr txBox="1"/>
-          <p:nvPr/>
-        </p:nvSpPr>
-        <p:spPr>
-          <a:xfrm>
-            <a:off x="7473391" y="5504688"/>
-            <a:ext cx="3950208" cy="256032"/>
-          </a:xfrm>
-          <a:prstGeom prst="rect">
-            <a:avLst/>
-          </a:prstGeom>
-          <a:noFill/>
-          <a:ln/>
-        </p:spPr>
-        <p:txBody>
-          <a:bodyPr wrap="square" lIns="0" tIns="0" rIns="0" bIns="0" rtlCol="0" anchor="ctr"/>
-          <a:lstStyle/>
-          <a:p>
-            <a:pPr rtl="1" algn="r" indent="0" marL="0">
-              <a:buNone/>
-            </a:pPr>
-            <a:r>
-              <a:rPr lang="en-US" sz="1200" b="1" dirty="0">
-                <a:solidFill>
-                  <a:srgbClr val="00A896"/>
-                </a:solidFill>
-                <a:latin typeface="Arial" pitchFamily="34" charset="0"/>
-                <a:ea typeface="Arial" pitchFamily="34" charset="-122"/>
-                <a:cs typeface="Arial" pitchFamily="34" charset="-120"/>
-              </a:rPr>
-              <a:t>تعمل آليًا عند كل رفع</a:t>
-            </a:r>
-            <a:endParaRPr lang="en-US" sz="1200" dirty="0"/>
-          </a:p>
-        </p:txBody>
-      </p:sp>
-      <p:sp>
-        <p:nvSpPr>
-          <p:cNvPr id="48" name="Text 46"/>
-          <p:cNvSpPr txBox="1"/>
-          <p:nvPr/>
-        </p:nvSpPr>
-        <p:spPr>
-          <a:xfrm>
-            <a:off x="7473391" y="5779008"/>
-            <a:ext cx="3950208" cy="402336"/>
+            <a:srgbClr val="FBEDE8"/>
+          </a:solidFill>
+          <a:ln/>
+        </p:spPr>
+      </p:sp>
+      <p:sp>
+        <p:nvSpPr>
+          <p:cNvPr id="33" name="Text 29"/>
+          <p:cNvSpPr txBox="1"/>
+          <p:nvPr/>
+        </p:nvSpPr>
+        <p:spPr>
+          <a:xfrm>
+            <a:off x="7180783" y="4041648"/>
+            <a:ext cx="4078224" cy="694944"/>
           </a:xfrm>
           <a:prstGeom prst="rect">
             <a:avLst/>
@@ -17260,13 +17552,13 @@
             <a:r>
               <a:rPr lang="en-US" sz="1050" dirty="0">
                 <a:solidFill>
-                  <a:srgbClr val="BFD4D7"/>
-                </a:solidFill>
-                <a:latin typeface="Arial" pitchFamily="34" charset="0"/>
-                <a:ea typeface="Arial" pitchFamily="34" charset="-122"/>
-                <a:cs typeface="Arial" pitchFamily="34" charset="-120"/>
-              </a:rPr>
-              <a:t>⁦GitHub Actions⁩ يفحص التنسيق ثم يشغّل المجموعة كاملة قبل أي دمج</a:t>
+                  <a:srgbClr val="8C3A1E"/>
+                </a:solidFill>
+                <a:latin typeface="Arial" pitchFamily="34" charset="0"/>
+                <a:ea typeface="Arial" pitchFamily="34" charset="-122"/>
+                <a:cs typeface="Arial" pitchFamily="34" charset="-120"/>
+              </a:rPr>
+              <a:t>تعذّر إعداد الإجابة على هذا السؤال. جرّب صياغة أبسط، أو استخدم البحث من الشريط العلوي.</a:t>
             </a:r>
             <a:endParaRPr lang="en-US" sz="1050" dirty="0"/>
           </a:p>
@@ -17274,14 +17566,36 @@
       </p:sp>
       <p:sp>
         <p:nvSpPr>
-          <p:cNvPr id="49" name="Text 47"/>
-          <p:cNvSpPr txBox="1"/>
-          <p:nvPr/>
-        </p:nvSpPr>
-        <p:spPr>
-          <a:xfrm>
-            <a:off x="548640" y="5559552"/>
-            <a:ext cx="6400800" cy="457200"/>
+          <p:cNvPr id="34" name="Shape 30"/>
+          <p:cNvSpPr/>
+          <p:nvPr/>
+        </p:nvSpPr>
+        <p:spPr>
+          <a:xfrm>
+            <a:off x="548640" y="5084064"/>
+            <a:ext cx="11094415" cy="1188720"/>
+          </a:xfrm>
+          <a:prstGeom prst="roundRect">
+            <a:avLst>
+              <a:gd name="adj" fmla="val 7692"/>
+            </a:avLst>
+          </a:prstGeom>
+          <a:solidFill>
+            <a:srgbClr val="0A2E36"/>
+          </a:solidFill>
+          <a:ln/>
+        </p:spPr>
+      </p:sp>
+      <p:sp>
+        <p:nvSpPr>
+          <p:cNvPr id="35" name="Text 31"/>
+          <p:cNvSpPr txBox="1"/>
+          <p:nvPr/>
+        </p:nvSpPr>
+        <p:spPr>
+          <a:xfrm>
+            <a:off x="822960" y="5230368"/>
+            <a:ext cx="10545775" cy="274320"/>
           </a:xfrm>
           <a:prstGeom prst="rect">
             <a:avLst/>
@@ -17294,6 +17608,45 @@
           <a:lstStyle/>
           <a:p>
             <a:pPr rtl="1" algn="ctr" indent="0" marL="0">
+              <a:buNone/>
+            </a:pPr>
+            <a:r>
+              <a:rPr lang="en-US" sz="1300" b="1" dirty="0">
+                <a:solidFill>
+                  <a:srgbClr val="00A896"/>
+                </a:solidFill>
+                <a:latin typeface="Arial" pitchFamily="34" charset="0"/>
+                <a:ea typeface="Arial" pitchFamily="34" charset="-122"/>
+                <a:cs typeface="Arial" pitchFamily="34" charset="-120"/>
+              </a:rPr>
+              <a:t>والسلوك نفسه مُثبَت باختبارين، لا بالكلام</a:t>
+            </a:r>
+            <a:endParaRPr lang="en-US" sz="1300" dirty="0"/>
+          </a:p>
+        </p:txBody>
+      </p:sp>
+      <p:sp>
+        <p:nvSpPr>
+          <p:cNvPr id="36" name="Text 32"/>
+          <p:cNvSpPr txBox="1"/>
+          <p:nvPr/>
+        </p:nvSpPr>
+        <p:spPr>
+          <a:xfrm>
+            <a:off x="6233008" y="5577840"/>
+            <a:ext cx="5135728" cy="548640"/>
+          </a:xfrm>
+          <a:prstGeom prst="rect">
+            <a:avLst/>
+          </a:prstGeom>
+          <a:noFill/>
+          <a:ln/>
+        </p:spPr>
+        <p:txBody>
+          <a:bodyPr wrap="square" lIns="0" tIns="0" rIns="0" bIns="0" rtlCol="0" anchor="ctr"/>
+          <a:lstStyle/>
+          <a:p>
+            <a:pPr rtl="1" algn="r" indent="0" marL="0">
               <a:lnSpc>
                 <a:spcPts val="1400"/>
               </a:lnSpc>
@@ -17302,13 +17655,55 @@
             <a:r>
               <a:rPr lang="en-US" sz="1050" dirty="0">
                 <a:solidFill>
-                  <a:srgbClr val="5C7378"/>
-                </a:solidFill>
-                <a:latin typeface="Arial" pitchFamily="34" charset="0"/>
-                <a:ea typeface="Arial" pitchFamily="34" charset="-122"/>
-                <a:cs typeface="Arial" pitchFamily="34" charset="-120"/>
-              </a:rPr>
-              <a:t>الاختبارات تعمل على قاعدة بيانات في الذاكرة تُنشأ من الصفر عند كل تشغيل، فلا تعتمد على بيانات سابقة</a:t>
+                  <a:srgbClr val="BFD4D7"/>
+                </a:solidFill>
+                <a:latin typeface="Arial" pitchFamily="34" charset="0"/>
+                <a:ea typeface="Arial" pitchFamily="34" charset="-122"/>
+                <a:cs typeface="Arial" pitchFamily="34" charset="-120"/>
+              </a:rPr>
+              <a:t>• يفتعل عطلًا داخل المساعد، ويتحقق أن الاستجابة 200 لا 500، وأن كلمة الخطأ التقنية لم تصل إلى المتصفح</a:t>
+            </a:r>
+            <a:endParaRPr lang="en-US" sz="1050" dirty="0"/>
+          </a:p>
+        </p:txBody>
+      </p:sp>
+      <p:sp>
+        <p:nvSpPr>
+          <p:cNvPr id="37" name="Text 33"/>
+          <p:cNvSpPr txBox="1"/>
+          <p:nvPr/>
+        </p:nvSpPr>
+        <p:spPr>
+          <a:xfrm>
+            <a:off x="822960" y="5577840"/>
+            <a:ext cx="5135728" cy="548640"/>
+          </a:xfrm>
+          <a:prstGeom prst="rect">
+            <a:avLst/>
+          </a:prstGeom>
+          <a:noFill/>
+          <a:ln/>
+        </p:spPr>
+        <p:txBody>
+          <a:bodyPr wrap="square" lIns="0" tIns="0" rIns="0" bIns="0" rtlCol="0" anchor="ctr"/>
+          <a:lstStyle/>
+          <a:p>
+            <a:pPr rtl="1" algn="r" indent="0" marL="0">
+              <a:lnSpc>
+                <a:spcPts val="1400"/>
+              </a:lnSpc>
+              <a:buNone/>
+            </a:pPr>
+            <a:r>
+              <a:rPr lang="en-US" sz="1050" dirty="0">
+                <a:solidFill>
+                  <a:srgbClr val="BFD4D7"/>
+                </a:solidFill>
+                <a:latin typeface="Arial" pitchFamily="34" charset="0"/>
+                <a:ea typeface="Arial" pitchFamily="34" charset="-122"/>
+                <a:cs typeface="Arial" pitchFamily="34" charset="-120"/>
+              </a:rPr>
+              <a:t>• يتحقق أن السؤال المتسبّب سُجِّل فعلًا في سجل الأخطاء مع مُعرِّف المستخدم</a:t>
             </a:r>
             <a:endParaRPr lang="en-US" sz="1050" dirty="0"/>
           </a:p>
@@ -17325,6 +17720,1704 @@
 <file path=ppt/slides/slide24.xml><?xml version="1.0" encoding="utf-8"?>
 <p:sld xmlns:a="http://schemas.openxmlformats.org/drawingml/2006/main" xmlns:r="http://schemas.openxmlformats.org/officeDocument/2006/relationships" xmlns:p="http://schemas.openxmlformats.org/presentationml/2006/main">
   <p:cSld name="Slide 24">
+    <p:bg>
+      <p:bgPr>
+        <a:solidFill>
+          <a:srgbClr val="F5F8F8"/>
+        </a:solidFill>
+      </p:bgPr>
+    </p:bg>
+    <p:spTree>
+      <p:nvGrpSpPr>
+        <p:cNvPr id="1" name=""/>
+        <p:cNvGrpSpPr/>
+        <p:nvPr/>
+      </p:nvGrpSpPr>
+      <p:grpSpPr>
+        <a:xfrm>
+          <a:off x="0" y="0"/>
+          <a:ext cx="0" cy="0"/>
+          <a:chOff x="0" y="0"/>
+          <a:chExt cx="0" cy="0"/>
+        </a:xfrm>
+      </p:grpSpPr>
+      <p:sp>
+        <p:nvSpPr>
+          <p:cNvPr id="2" name="Text 0"/>
+          <p:cNvSpPr txBox="1"/>
+          <p:nvPr/>
+        </p:nvSpPr>
+        <p:spPr>
+          <a:xfrm>
+            <a:off x="548640" y="384048"/>
+            <a:ext cx="11094415" cy="274320"/>
+          </a:xfrm>
+          <a:prstGeom prst="rect">
+            <a:avLst/>
+          </a:prstGeom>
+          <a:noFill/>
+          <a:ln/>
+        </p:spPr>
+        <p:txBody>
+          <a:bodyPr wrap="square" lIns="0" tIns="0" rIns="0" bIns="0" rtlCol="0" anchor="ctr"/>
+          <a:lstStyle/>
+          <a:p>
+            <a:pPr rtl="1" algn="r" indent="0" marL="0">
+              <a:buNone/>
+            </a:pPr>
+            <a:r>
+              <a:rPr lang="en-US" sz="1300" b="1" spc="100" kern="0" dirty="0">
+                <a:solidFill>
+                  <a:srgbClr val="02717D"/>
+                </a:solidFill>
+                <a:latin typeface="Arial" pitchFamily="34" charset="0"/>
+                <a:ea typeface="Arial" pitchFamily="34" charset="-122"/>
+                <a:cs typeface="Arial" pitchFamily="34" charset="-120"/>
+              </a:rPr>
+              <a:t>المحور السادس · البرهان</a:t>
+            </a:r>
+            <a:endParaRPr lang="en-US" sz="1300" dirty="0"/>
+          </a:p>
+        </p:txBody>
+      </p:sp>
+      <p:sp>
+        <p:nvSpPr>
+          <p:cNvPr id="3" name="Text 1"/>
+          <p:cNvSpPr txBox="1"/>
+          <p:nvPr/>
+        </p:nvSpPr>
+        <p:spPr>
+          <a:xfrm>
+            <a:off x="548640" y="694944"/>
+            <a:ext cx="11094415" cy="566928"/>
+          </a:xfrm>
+          <a:prstGeom prst="rect">
+            <a:avLst/>
+          </a:prstGeom>
+          <a:noFill/>
+          <a:ln/>
+        </p:spPr>
+        <p:txBody>
+          <a:bodyPr wrap="square" lIns="0" tIns="0" rIns="0" bIns="0" rtlCol="0" anchor="ctr"/>
+          <a:lstStyle/>
+          <a:p>
+            <a:pPr rtl="1" algn="r" indent="0" marL="0">
+              <a:buNone/>
+            </a:pPr>
+            <a:r>
+              <a:rPr lang="en-US" sz="3300" b="1" dirty="0">
+                <a:solidFill>
+                  <a:srgbClr val="16292E"/>
+                </a:solidFill>
+                <a:latin typeface="Arial" pitchFamily="34" charset="0"/>
+                <a:ea typeface="Arial" pitchFamily="34" charset="-122"/>
+                <a:cs typeface="Arial" pitchFamily="34" charset="-120"/>
+              </a:rPr>
+              <a:t>الاختبار وضمان الجودة</a:t>
+            </a:r>
+            <a:endParaRPr lang="en-US" sz="3300" dirty="0"/>
+          </a:p>
+        </p:txBody>
+      </p:sp>
+      <p:sp>
+        <p:nvSpPr>
+          <p:cNvPr id="4" name="Shape 2"/>
+          <p:cNvSpPr/>
+          <p:nvPr/>
+        </p:nvSpPr>
+        <p:spPr>
+          <a:xfrm>
+            <a:off x="548640" y="1572768"/>
+            <a:ext cx="6400800" cy="3840480"/>
+          </a:xfrm>
+          <a:prstGeom prst="roundRect">
+            <a:avLst>
+              <a:gd name="adj" fmla="val 2381"/>
+            </a:avLst>
+          </a:prstGeom>
+          <a:solidFill>
+            <a:srgbClr val="0C1E22"/>
+          </a:solidFill>
+          <a:ln/>
+        </p:spPr>
+      </p:sp>
+      <p:sp>
+        <p:nvSpPr>
+          <p:cNvPr id="5" name="Text 3"/>
+          <p:cNvSpPr txBox="1"/>
+          <p:nvPr/>
+        </p:nvSpPr>
+        <p:spPr>
+          <a:xfrm>
+            <a:off x="841248" y="1755648"/>
+            <a:ext cx="5815584" cy="219456"/>
+          </a:xfrm>
+          <a:prstGeom prst="rect">
+            <a:avLst/>
+          </a:prstGeom>
+          <a:noFill/>
+          <a:ln/>
+        </p:spPr>
+        <p:txBody>
+          <a:bodyPr wrap="square" lIns="0" tIns="0" rIns="0" bIns="0" rtlCol="0" anchor="ctr"/>
+          <a:lstStyle/>
+          <a:p>
+            <a:pPr algn="l" indent="0" marL="0">
+              <a:buNone/>
+            </a:pPr>
+            <a:r>
+              <a:rPr lang="en-US" sz="950" dirty="0">
+                <a:solidFill>
+                  <a:srgbClr val="00A896"/>
+                </a:solidFill>
+                <a:latin typeface="Courier New" pitchFamily="34" charset="0"/>
+                <a:ea typeface="Courier New" pitchFamily="34" charset="-122"/>
+                <a:cs typeface="Courier New" pitchFamily="34" charset="-120"/>
+              </a:rPr>
+              <a:t>$ vendor/bin/phpunit</a:t>
+            </a:r>
+            <a:endParaRPr lang="en-US" sz="950" dirty="0"/>
+          </a:p>
+        </p:txBody>
+      </p:sp>
+      <p:sp>
+        <p:nvSpPr>
+          <p:cNvPr id="6" name="Text 4"/>
+          <p:cNvSpPr txBox="1"/>
+          <p:nvPr/>
+        </p:nvSpPr>
+        <p:spPr>
+          <a:xfrm>
+            <a:off x="841248" y="1965960"/>
+            <a:ext cx="5815584" cy="219456"/>
+          </a:xfrm>
+          <a:prstGeom prst="rect">
+            <a:avLst/>
+          </a:prstGeom>
+          <a:noFill/>
+          <a:ln/>
+        </p:spPr>
+        <p:txBody>
+          <a:bodyPr wrap="square" lIns="0" tIns="0" rIns="0" bIns="0" rtlCol="0" anchor="ctr"/>
+          <a:lstStyle/>
+          <a:p>
+            <a:pPr algn="l" indent="0" marL="0">
+              <a:buNone/>
+            </a:pPr>
+            <a:endParaRPr lang="en-US" sz="950" dirty="0"/>
+          </a:p>
+        </p:txBody>
+      </p:sp>
+      <p:sp>
+        <p:nvSpPr>
+          <p:cNvPr id="7" name="Text 5"/>
+          <p:cNvSpPr txBox="1"/>
+          <p:nvPr/>
+        </p:nvSpPr>
+        <p:spPr>
+          <a:xfrm>
+            <a:off x="841248" y="2176272"/>
+            <a:ext cx="5815584" cy="219456"/>
+          </a:xfrm>
+          <a:prstGeom prst="rect">
+            <a:avLst/>
+          </a:prstGeom>
+          <a:noFill/>
+          <a:ln/>
+        </p:spPr>
+        <p:txBody>
+          <a:bodyPr wrap="square" lIns="0" tIns="0" rIns="0" bIns="0" rtlCol="0" anchor="ctr"/>
+          <a:lstStyle/>
+          <a:p>
+            <a:pPr algn="l" indent="0" marL="0">
+              <a:buNone/>
+            </a:pPr>
+            <a:r>
+              <a:rPr lang="en-US" sz="950" dirty="0">
+                <a:solidFill>
+                  <a:srgbClr val="BFD4D7"/>
+                </a:solidFill>
+                <a:latin typeface="Courier New" pitchFamily="34" charset="0"/>
+                <a:ea typeface="Courier New" pitchFamily="34" charset="-122"/>
+                <a:cs typeface="Courier New" pitchFamily="34" charset="-120"/>
+              </a:rPr>
+              <a:t>PHPUnit 11.5.56 by Sebastian Bergmann.</a:t>
+            </a:r>
+            <a:endParaRPr lang="en-US" sz="950" dirty="0"/>
+          </a:p>
+        </p:txBody>
+      </p:sp>
+      <p:sp>
+        <p:nvSpPr>
+          <p:cNvPr id="8" name="Text 6"/>
+          <p:cNvSpPr txBox="1"/>
+          <p:nvPr/>
+        </p:nvSpPr>
+        <p:spPr>
+          <a:xfrm>
+            <a:off x="841248" y="2386584"/>
+            <a:ext cx="5815584" cy="219456"/>
+          </a:xfrm>
+          <a:prstGeom prst="rect">
+            <a:avLst/>
+          </a:prstGeom>
+          <a:noFill/>
+          <a:ln/>
+        </p:spPr>
+        <p:txBody>
+          <a:bodyPr wrap="square" lIns="0" tIns="0" rIns="0" bIns="0" rtlCol="0" anchor="ctr"/>
+          <a:lstStyle/>
+          <a:p>
+            <a:pPr algn="l" indent="0" marL="0">
+              <a:buNone/>
+            </a:pPr>
+            <a:endParaRPr lang="en-US" sz="950" dirty="0"/>
+          </a:p>
+        </p:txBody>
+      </p:sp>
+      <p:sp>
+        <p:nvSpPr>
+          <p:cNvPr id="9" name="Text 7"/>
+          <p:cNvSpPr txBox="1"/>
+          <p:nvPr/>
+        </p:nvSpPr>
+        <p:spPr>
+          <a:xfrm>
+            <a:off x="841248" y="2596896"/>
+            <a:ext cx="5815584" cy="219456"/>
+          </a:xfrm>
+          <a:prstGeom prst="rect">
+            <a:avLst/>
+          </a:prstGeom>
+          <a:noFill/>
+          <a:ln/>
+        </p:spPr>
+        <p:txBody>
+          <a:bodyPr wrap="square" lIns="0" tIns="0" rIns="0" bIns="0" rtlCol="0" anchor="ctr"/>
+          <a:lstStyle/>
+          <a:p>
+            <a:pPr algn="l" indent="0" marL="0">
+              <a:buNone/>
+            </a:pPr>
+            <a:r>
+              <a:rPr lang="en-US" sz="950" dirty="0">
+                <a:solidFill>
+                  <a:srgbClr val="BFD4D7"/>
+                </a:solidFill>
+                <a:latin typeface="Courier New" pitchFamily="34" charset="0"/>
+                <a:ea typeface="Courier New" pitchFamily="34" charset="-122"/>
+                <a:cs typeface="Courier New" pitchFamily="34" charset="-120"/>
+              </a:rPr>
+              <a:t>Runtime:       PHP 8.4.19</a:t>
+            </a:r>
+            <a:endParaRPr lang="en-US" sz="950" dirty="0"/>
+          </a:p>
+        </p:txBody>
+      </p:sp>
+      <p:sp>
+        <p:nvSpPr>
+          <p:cNvPr id="10" name="Text 8"/>
+          <p:cNvSpPr txBox="1"/>
+          <p:nvPr/>
+        </p:nvSpPr>
+        <p:spPr>
+          <a:xfrm>
+            <a:off x="841248" y="2807208"/>
+            <a:ext cx="5815584" cy="219456"/>
+          </a:xfrm>
+          <a:prstGeom prst="rect">
+            <a:avLst/>
+          </a:prstGeom>
+          <a:noFill/>
+          <a:ln/>
+        </p:spPr>
+        <p:txBody>
+          <a:bodyPr wrap="square" lIns="0" tIns="0" rIns="0" bIns="0" rtlCol="0" anchor="ctr"/>
+          <a:lstStyle/>
+          <a:p>
+            <a:pPr algn="l" indent="0" marL="0">
+              <a:buNone/>
+            </a:pPr>
+            <a:r>
+              <a:rPr lang="en-US" sz="950" dirty="0">
+                <a:solidFill>
+                  <a:srgbClr val="BFD4D7"/>
+                </a:solidFill>
+                <a:latin typeface="Courier New" pitchFamily="34" charset="0"/>
+                <a:ea typeface="Courier New" pitchFamily="34" charset="-122"/>
+                <a:cs typeface="Courier New" pitchFamily="34" charset="-120"/>
+              </a:rPr>
+              <a:t>Configuration: phpunit.xml</a:t>
+            </a:r>
+            <a:endParaRPr lang="en-US" sz="950" dirty="0"/>
+          </a:p>
+        </p:txBody>
+      </p:sp>
+      <p:sp>
+        <p:nvSpPr>
+          <p:cNvPr id="11" name="Text 9"/>
+          <p:cNvSpPr txBox="1"/>
+          <p:nvPr/>
+        </p:nvSpPr>
+        <p:spPr>
+          <a:xfrm>
+            <a:off x="841248" y="3017520"/>
+            <a:ext cx="5815584" cy="219456"/>
+          </a:xfrm>
+          <a:prstGeom prst="rect">
+            <a:avLst/>
+          </a:prstGeom>
+          <a:noFill/>
+          <a:ln/>
+        </p:spPr>
+        <p:txBody>
+          <a:bodyPr wrap="square" lIns="0" tIns="0" rIns="0" bIns="0" rtlCol="0" anchor="ctr"/>
+          <a:lstStyle/>
+          <a:p>
+            <a:pPr algn="l" indent="0" marL="0">
+              <a:buNone/>
+            </a:pPr>
+            <a:endParaRPr lang="en-US" sz="950" dirty="0"/>
+          </a:p>
+        </p:txBody>
+      </p:sp>
+      <p:sp>
+        <p:nvSpPr>
+          <p:cNvPr id="12" name="Text 10"/>
+          <p:cNvSpPr txBox="1"/>
+          <p:nvPr/>
+        </p:nvSpPr>
+        <p:spPr>
+          <a:xfrm>
+            <a:off x="841248" y="3227832"/>
+            <a:ext cx="5815584" cy="219456"/>
+          </a:xfrm>
+          <a:prstGeom prst="rect">
+            <a:avLst/>
+          </a:prstGeom>
+          <a:noFill/>
+          <a:ln/>
+        </p:spPr>
+        <p:txBody>
+          <a:bodyPr wrap="square" lIns="0" tIns="0" rIns="0" bIns="0" rtlCol="0" anchor="ctr"/>
+          <a:lstStyle/>
+          <a:p>
+            <a:pPr algn="l" indent="0" marL="0">
+              <a:buNone/>
+            </a:pPr>
+            <a:r>
+              <a:rPr lang="en-US" sz="950" dirty="0">
+                <a:solidFill>
+                  <a:srgbClr val="FFFFFF"/>
+                </a:solidFill>
+                <a:latin typeface="Courier New" pitchFamily="34" charset="0"/>
+                <a:ea typeface="Courier New" pitchFamily="34" charset="-122"/>
+                <a:cs typeface="Courier New" pitchFamily="34" charset="-120"/>
+              </a:rPr>
+              <a:t>...............................................  63 / 347 ( 18%)</a:t>
+            </a:r>
+            <a:endParaRPr lang="en-US" sz="950" dirty="0"/>
+          </a:p>
+        </p:txBody>
+      </p:sp>
+      <p:sp>
+        <p:nvSpPr>
+          <p:cNvPr id="13" name="Text 11"/>
+          <p:cNvSpPr txBox="1"/>
+          <p:nvPr/>
+        </p:nvSpPr>
+        <p:spPr>
+          <a:xfrm>
+            <a:off x="841248" y="3438144"/>
+            <a:ext cx="5815584" cy="219456"/>
+          </a:xfrm>
+          <a:prstGeom prst="rect">
+            <a:avLst/>
+          </a:prstGeom>
+          <a:noFill/>
+          <a:ln/>
+        </p:spPr>
+        <p:txBody>
+          <a:bodyPr wrap="square" lIns="0" tIns="0" rIns="0" bIns="0" rtlCol="0" anchor="ctr"/>
+          <a:lstStyle/>
+          <a:p>
+            <a:pPr algn="l" indent="0" marL="0">
+              <a:buNone/>
+            </a:pPr>
+            <a:r>
+              <a:rPr lang="en-US" sz="950" dirty="0">
+                <a:solidFill>
+                  <a:srgbClr val="FFFFFF"/>
+                </a:solidFill>
+                <a:latin typeface="Courier New" pitchFamily="34" charset="0"/>
+                <a:ea typeface="Courier New" pitchFamily="34" charset="-122"/>
+                <a:cs typeface="Courier New" pitchFamily="34" charset="-120"/>
+              </a:rPr>
+              <a:t>............................................... 126 / 347 ( 36%)</a:t>
+            </a:r>
+            <a:endParaRPr lang="en-US" sz="950" dirty="0"/>
+          </a:p>
+        </p:txBody>
+      </p:sp>
+      <p:sp>
+        <p:nvSpPr>
+          <p:cNvPr id="14" name="Text 12"/>
+          <p:cNvSpPr txBox="1"/>
+          <p:nvPr/>
+        </p:nvSpPr>
+        <p:spPr>
+          <a:xfrm>
+            <a:off x="841248" y="3648456"/>
+            <a:ext cx="5815584" cy="219456"/>
+          </a:xfrm>
+          <a:prstGeom prst="rect">
+            <a:avLst/>
+          </a:prstGeom>
+          <a:noFill/>
+          <a:ln/>
+        </p:spPr>
+        <p:txBody>
+          <a:bodyPr wrap="square" lIns="0" tIns="0" rIns="0" bIns="0" rtlCol="0" anchor="ctr"/>
+          <a:lstStyle/>
+          <a:p>
+            <a:pPr algn="l" indent="0" marL="0">
+              <a:buNone/>
+            </a:pPr>
+            <a:r>
+              <a:rPr lang="en-US" sz="950" dirty="0">
+                <a:solidFill>
+                  <a:srgbClr val="FFFFFF"/>
+                </a:solidFill>
+                <a:latin typeface="Courier New" pitchFamily="34" charset="0"/>
+                <a:ea typeface="Courier New" pitchFamily="34" charset="-122"/>
+                <a:cs typeface="Courier New" pitchFamily="34" charset="-120"/>
+              </a:rPr>
+              <a:t>............................................... 189 / 347 ( 54%)</a:t>
+            </a:r>
+            <a:endParaRPr lang="en-US" sz="950" dirty="0"/>
+          </a:p>
+        </p:txBody>
+      </p:sp>
+      <p:sp>
+        <p:nvSpPr>
+          <p:cNvPr id="15" name="Text 13"/>
+          <p:cNvSpPr txBox="1"/>
+          <p:nvPr/>
+        </p:nvSpPr>
+        <p:spPr>
+          <a:xfrm>
+            <a:off x="841248" y="3858768"/>
+            <a:ext cx="5815584" cy="219456"/>
+          </a:xfrm>
+          <a:prstGeom prst="rect">
+            <a:avLst/>
+          </a:prstGeom>
+          <a:noFill/>
+          <a:ln/>
+        </p:spPr>
+        <p:txBody>
+          <a:bodyPr wrap="square" lIns="0" tIns="0" rIns="0" bIns="0" rtlCol="0" anchor="ctr"/>
+          <a:lstStyle/>
+          <a:p>
+            <a:pPr algn="l" indent="0" marL="0">
+              <a:buNone/>
+            </a:pPr>
+            <a:r>
+              <a:rPr lang="en-US" sz="950" dirty="0">
+                <a:solidFill>
+                  <a:srgbClr val="FFFFFF"/>
+                </a:solidFill>
+                <a:latin typeface="Courier New" pitchFamily="34" charset="0"/>
+                <a:ea typeface="Courier New" pitchFamily="34" charset="-122"/>
+                <a:cs typeface="Courier New" pitchFamily="34" charset="-120"/>
+              </a:rPr>
+              <a:t>............................................... 252 / 347 ( 72%)</a:t>
+            </a:r>
+            <a:endParaRPr lang="en-US" sz="950" dirty="0"/>
+          </a:p>
+        </p:txBody>
+      </p:sp>
+      <p:sp>
+        <p:nvSpPr>
+          <p:cNvPr id="16" name="Text 14"/>
+          <p:cNvSpPr txBox="1"/>
+          <p:nvPr/>
+        </p:nvSpPr>
+        <p:spPr>
+          <a:xfrm>
+            <a:off x="841248" y="4069080"/>
+            <a:ext cx="5815584" cy="219456"/>
+          </a:xfrm>
+          <a:prstGeom prst="rect">
+            <a:avLst/>
+          </a:prstGeom>
+          <a:noFill/>
+          <a:ln/>
+        </p:spPr>
+        <p:txBody>
+          <a:bodyPr wrap="square" lIns="0" tIns="0" rIns="0" bIns="0" rtlCol="0" anchor="ctr"/>
+          <a:lstStyle/>
+          <a:p>
+            <a:pPr algn="l" indent="0" marL="0">
+              <a:buNone/>
+            </a:pPr>
+            <a:r>
+              <a:rPr lang="en-US" sz="950" dirty="0">
+                <a:solidFill>
+                  <a:srgbClr val="FFFFFF"/>
+                </a:solidFill>
+                <a:latin typeface="Courier New" pitchFamily="34" charset="0"/>
+                <a:ea typeface="Courier New" pitchFamily="34" charset="-122"/>
+                <a:cs typeface="Courier New" pitchFamily="34" charset="-120"/>
+              </a:rPr>
+              <a:t>............................................... 315 / 347 ( 90%)</a:t>
+            </a:r>
+            <a:endParaRPr lang="en-US" sz="950" dirty="0"/>
+          </a:p>
+        </p:txBody>
+      </p:sp>
+      <p:sp>
+        <p:nvSpPr>
+          <p:cNvPr id="17" name="Text 15"/>
+          <p:cNvSpPr txBox="1"/>
+          <p:nvPr/>
+        </p:nvSpPr>
+        <p:spPr>
+          <a:xfrm>
+            <a:off x="841248" y="4279392"/>
+            <a:ext cx="5815584" cy="219456"/>
+          </a:xfrm>
+          <a:prstGeom prst="rect">
+            <a:avLst/>
+          </a:prstGeom>
+          <a:noFill/>
+          <a:ln/>
+        </p:spPr>
+        <p:txBody>
+          <a:bodyPr wrap="square" lIns="0" tIns="0" rIns="0" bIns="0" rtlCol="0" anchor="ctr"/>
+          <a:lstStyle/>
+          <a:p>
+            <a:pPr algn="l" indent="0" marL="0">
+              <a:buNone/>
+            </a:pPr>
+            <a:r>
+              <a:rPr lang="en-US" sz="950" dirty="0">
+                <a:solidFill>
+                  <a:srgbClr val="FFFFFF"/>
+                </a:solidFill>
+                <a:latin typeface="Courier New" pitchFamily="34" charset="0"/>
+                <a:ea typeface="Courier New" pitchFamily="34" charset="-122"/>
+                <a:cs typeface="Courier New" pitchFamily="34" charset="-120"/>
+              </a:rPr>
+              <a:t>................................                347 / 347 (100%)</a:t>
+            </a:r>
+            <a:endParaRPr lang="en-US" sz="950" dirty="0"/>
+          </a:p>
+        </p:txBody>
+      </p:sp>
+      <p:sp>
+        <p:nvSpPr>
+          <p:cNvPr id="18" name="Text 16"/>
+          <p:cNvSpPr txBox="1"/>
+          <p:nvPr/>
+        </p:nvSpPr>
+        <p:spPr>
+          <a:xfrm>
+            <a:off x="841248" y="4489704"/>
+            <a:ext cx="5815584" cy="219456"/>
+          </a:xfrm>
+          <a:prstGeom prst="rect">
+            <a:avLst/>
+          </a:prstGeom>
+          <a:noFill/>
+          <a:ln/>
+        </p:spPr>
+        <p:txBody>
+          <a:bodyPr wrap="square" lIns="0" tIns="0" rIns="0" bIns="0" rtlCol="0" anchor="ctr"/>
+          <a:lstStyle/>
+          <a:p>
+            <a:pPr algn="l" indent="0" marL="0">
+              <a:buNone/>
+            </a:pPr>
+            <a:endParaRPr lang="en-US" sz="950" dirty="0"/>
+          </a:p>
+        </p:txBody>
+      </p:sp>
+      <p:sp>
+        <p:nvSpPr>
+          <p:cNvPr id="19" name="Text 17"/>
+          <p:cNvSpPr txBox="1"/>
+          <p:nvPr/>
+        </p:nvSpPr>
+        <p:spPr>
+          <a:xfrm>
+            <a:off x="841248" y="4700016"/>
+            <a:ext cx="5815584" cy="219456"/>
+          </a:xfrm>
+          <a:prstGeom prst="rect">
+            <a:avLst/>
+          </a:prstGeom>
+          <a:noFill/>
+          <a:ln/>
+        </p:spPr>
+        <p:txBody>
+          <a:bodyPr wrap="square" lIns="0" tIns="0" rIns="0" bIns="0" rtlCol="0" anchor="ctr"/>
+          <a:lstStyle/>
+          <a:p>
+            <a:pPr algn="l" indent="0" marL="0">
+              <a:buNone/>
+            </a:pPr>
+            <a:r>
+              <a:rPr lang="en-US" sz="950" dirty="0">
+                <a:solidFill>
+                  <a:srgbClr val="BFD4D7"/>
+                </a:solidFill>
+                <a:latin typeface="Courier New" pitchFamily="34" charset="0"/>
+                <a:ea typeface="Courier New" pitchFamily="34" charset="-122"/>
+                <a:cs typeface="Courier New" pitchFamily="34" charset="-120"/>
+              </a:rPr>
+              <a:t>Time: 00:09.875, Memory: 84.50 MB</a:t>
+            </a:r>
+            <a:endParaRPr lang="en-US" sz="950" dirty="0"/>
+          </a:p>
+        </p:txBody>
+      </p:sp>
+      <p:sp>
+        <p:nvSpPr>
+          <p:cNvPr id="20" name="Text 18"/>
+          <p:cNvSpPr txBox="1"/>
+          <p:nvPr/>
+        </p:nvSpPr>
+        <p:spPr>
+          <a:xfrm>
+            <a:off x="841248" y="4910328"/>
+            <a:ext cx="5815584" cy="219456"/>
+          </a:xfrm>
+          <a:prstGeom prst="rect">
+            <a:avLst/>
+          </a:prstGeom>
+          <a:noFill/>
+          <a:ln/>
+        </p:spPr>
+        <p:txBody>
+          <a:bodyPr wrap="square" lIns="0" tIns="0" rIns="0" bIns="0" rtlCol="0" anchor="ctr"/>
+          <a:lstStyle/>
+          <a:p>
+            <a:pPr algn="l" indent="0" marL="0">
+              <a:buNone/>
+            </a:pPr>
+            <a:endParaRPr lang="en-US" sz="950" dirty="0"/>
+          </a:p>
+        </p:txBody>
+      </p:sp>
+      <p:sp>
+        <p:nvSpPr>
+          <p:cNvPr id="21" name="Text 19"/>
+          <p:cNvSpPr txBox="1"/>
+          <p:nvPr/>
+        </p:nvSpPr>
+        <p:spPr>
+          <a:xfrm>
+            <a:off x="841248" y="5120640"/>
+            <a:ext cx="5815584" cy="219456"/>
+          </a:xfrm>
+          <a:prstGeom prst="rect">
+            <a:avLst/>
+          </a:prstGeom>
+          <a:noFill/>
+          <a:ln/>
+        </p:spPr>
+        <p:txBody>
+          <a:bodyPr wrap="square" lIns="0" tIns="0" rIns="0" bIns="0" rtlCol="0" anchor="ctr"/>
+          <a:lstStyle/>
+          <a:p>
+            <a:pPr algn="l" indent="0" marL="0">
+              <a:buNone/>
+            </a:pPr>
+            <a:r>
+              <a:rPr lang="en-US" sz="950" b="1" dirty="0">
+                <a:solidFill>
+                  <a:srgbClr val="5BD98A"/>
+                </a:solidFill>
+                <a:latin typeface="Courier New" pitchFamily="34" charset="0"/>
+                <a:ea typeface="Courier New" pitchFamily="34" charset="-122"/>
+                <a:cs typeface="Courier New" pitchFamily="34" charset="-120"/>
+              </a:rPr>
+              <a:t>OK (347 tests, 1066 assertions)</a:t>
+            </a:r>
+            <a:endParaRPr lang="en-US" sz="950" dirty="0"/>
+          </a:p>
+        </p:txBody>
+      </p:sp>
+      <p:sp>
+        <p:nvSpPr>
+          <p:cNvPr id="22" name="Text 20"/>
+          <p:cNvSpPr txBox="1"/>
+          <p:nvPr/>
+        </p:nvSpPr>
+        <p:spPr>
+          <a:xfrm>
+            <a:off x="7253935" y="1572768"/>
+            <a:ext cx="4389120" cy="274320"/>
+          </a:xfrm>
+          <a:prstGeom prst="rect">
+            <a:avLst/>
+          </a:prstGeom>
+          <a:noFill/>
+          <a:ln/>
+        </p:spPr>
+        <p:txBody>
+          <a:bodyPr wrap="square" lIns="0" tIns="0" rIns="0" bIns="0" rtlCol="0" anchor="ctr"/>
+          <a:lstStyle/>
+          <a:p>
+            <a:pPr rtl="1" algn="r" indent="0" marL="0">
+              <a:buNone/>
+            </a:pPr>
+            <a:r>
+              <a:rPr lang="en-US" sz="1300" b="1" dirty="0">
+                <a:solidFill>
+                  <a:srgbClr val="02717D"/>
+                </a:solidFill>
+                <a:latin typeface="Arial" pitchFamily="34" charset="0"/>
+                <a:ea typeface="Arial" pitchFamily="34" charset="-122"/>
+                <a:cs typeface="Arial" pitchFamily="34" charset="-120"/>
+              </a:rPr>
+              <a:t>أين تتركّز التغطية</a:t>
+            </a:r>
+            <a:endParaRPr lang="en-US" sz="1300" dirty="0"/>
+          </a:p>
+        </p:txBody>
+      </p:sp>
+      <p:sp>
+        <p:nvSpPr>
+          <p:cNvPr id="23" name="Shape 21"/>
+          <p:cNvSpPr/>
+          <p:nvPr/>
+        </p:nvSpPr>
+        <p:spPr>
+          <a:xfrm>
+            <a:off x="7253935" y="1956816"/>
+            <a:ext cx="4389120" cy="475488"/>
+          </a:xfrm>
+          <a:prstGeom prst="roundRect">
+            <a:avLst>
+              <a:gd name="adj" fmla="val 17308"/>
+            </a:avLst>
+          </a:prstGeom>
+          <a:solidFill>
+            <a:srgbClr val="FFFFFF"/>
+          </a:solidFill>
+          <a:ln/>
+          <a:effectLst>
+            <a:outerShdw sx="100000" sy="100000" kx="0" ky="0" algn="bl" rotWithShape="0" blurRad="127000" dist="25400" dir="5400000">
+              <a:srgbClr val="0A2E36">
+                <a:alpha val="10000"/>
+              </a:srgbClr>
+            </a:outerShdw>
+          </a:effectLst>
+        </p:spPr>
+      </p:sp>
+      <p:sp>
+        <p:nvSpPr>
+          <p:cNvPr id="24" name="Text 22"/>
+          <p:cNvSpPr txBox="1"/>
+          <p:nvPr/>
+        </p:nvSpPr>
+        <p:spPr>
+          <a:xfrm>
+            <a:off x="7473391" y="1956816"/>
+            <a:ext cx="3291840" cy="475488"/>
+          </a:xfrm>
+          <a:prstGeom prst="rect">
+            <a:avLst/>
+          </a:prstGeom>
+          <a:noFill/>
+          <a:ln/>
+        </p:spPr>
+        <p:txBody>
+          <a:bodyPr wrap="square" lIns="0" tIns="0" rIns="0" bIns="0" rtlCol="0" anchor="ctr"/>
+          <a:lstStyle/>
+          <a:p>
+            <a:pPr rtl="1" algn="r" indent="0" marL="0">
+              <a:buNone/>
+            </a:pPr>
+            <a:r>
+              <a:rPr lang="en-US" sz="1150" dirty="0">
+                <a:solidFill>
+                  <a:srgbClr val="16292E"/>
+                </a:solidFill>
+                <a:latin typeface="Arial" pitchFamily="34" charset="0"/>
+                <a:ea typeface="Arial" pitchFamily="34" charset="-122"/>
+                <a:cs typeface="Arial" pitchFamily="34" charset="-120"/>
+              </a:rPr>
+              <a:t>المساعد الذكي</a:t>
+            </a:r>
+            <a:endParaRPr lang="en-US" sz="1150" dirty="0"/>
+          </a:p>
+        </p:txBody>
+      </p:sp>
+      <p:sp>
+        <p:nvSpPr>
+          <p:cNvPr id="25" name="Shape 23"/>
+          <p:cNvSpPr/>
+          <p:nvPr/>
+        </p:nvSpPr>
+        <p:spPr>
+          <a:xfrm>
+            <a:off x="10801807" y="2039112"/>
+            <a:ext cx="621792" cy="310896"/>
+          </a:xfrm>
+          <a:prstGeom prst="roundRect">
+            <a:avLst>
+              <a:gd name="adj" fmla="val 23529"/>
+            </a:avLst>
+          </a:prstGeom>
+          <a:solidFill>
+            <a:srgbClr val="E9A13B"/>
+          </a:solidFill>
+          <a:ln/>
+        </p:spPr>
+      </p:sp>
+      <p:sp>
+        <p:nvSpPr>
+          <p:cNvPr id="26" name="Text 24"/>
+          <p:cNvSpPr txBox="1"/>
+          <p:nvPr/>
+        </p:nvSpPr>
+        <p:spPr>
+          <a:xfrm>
+            <a:off x="10801807" y="2039112"/>
+            <a:ext cx="621792" cy="310896"/>
+          </a:xfrm>
+          <a:prstGeom prst="rect">
+            <a:avLst/>
+          </a:prstGeom>
+          <a:noFill/>
+          <a:ln/>
+        </p:spPr>
+        <p:txBody>
+          <a:bodyPr wrap="square" lIns="0" tIns="0" rIns="0" bIns="0" rtlCol="0" anchor="ctr"/>
+          <a:lstStyle/>
+          <a:p>
+            <a:pPr algn="ctr" indent="0" marL="0">
+              <a:buNone/>
+            </a:pPr>
+            <a:r>
+              <a:rPr lang="en-US" sz="1150" b="1" dirty="0">
+                <a:solidFill>
+                  <a:srgbClr val="FFFFFF"/>
+                </a:solidFill>
+                <a:latin typeface="Arial" pitchFamily="34" charset="0"/>
+                <a:ea typeface="Arial" pitchFamily="34" charset="-122"/>
+                <a:cs typeface="Arial" pitchFamily="34" charset="-120"/>
+              </a:rPr>
+              <a:t>70</a:t>
+            </a:r>
+            <a:endParaRPr lang="en-US" sz="1150" dirty="0"/>
+          </a:p>
+        </p:txBody>
+      </p:sp>
+      <p:sp>
+        <p:nvSpPr>
+          <p:cNvPr id="27" name="Shape 25"/>
+          <p:cNvSpPr/>
+          <p:nvPr/>
+        </p:nvSpPr>
+        <p:spPr>
+          <a:xfrm>
+            <a:off x="7253935" y="2523744"/>
+            <a:ext cx="4389120" cy="475488"/>
+          </a:xfrm>
+          <a:prstGeom prst="roundRect">
+            <a:avLst>
+              <a:gd name="adj" fmla="val 17308"/>
+            </a:avLst>
+          </a:prstGeom>
+          <a:solidFill>
+            <a:srgbClr val="FFFFFF"/>
+          </a:solidFill>
+          <a:ln/>
+          <a:effectLst>
+            <a:outerShdw sx="100000" sy="100000" kx="0" ky="0" algn="bl" rotWithShape="0" blurRad="127000" dist="25400" dir="5400000">
+              <a:srgbClr val="0A2E36">
+                <a:alpha val="10000"/>
+              </a:srgbClr>
+            </a:outerShdw>
+          </a:effectLst>
+        </p:spPr>
+      </p:sp>
+      <p:sp>
+        <p:nvSpPr>
+          <p:cNvPr id="28" name="Text 26"/>
+          <p:cNvSpPr txBox="1"/>
+          <p:nvPr/>
+        </p:nvSpPr>
+        <p:spPr>
+          <a:xfrm>
+            <a:off x="7473391" y="2523744"/>
+            <a:ext cx="3291840" cy="475488"/>
+          </a:xfrm>
+          <a:prstGeom prst="rect">
+            <a:avLst/>
+          </a:prstGeom>
+          <a:noFill/>
+          <a:ln/>
+        </p:spPr>
+        <p:txBody>
+          <a:bodyPr wrap="square" lIns="0" tIns="0" rIns="0" bIns="0" rtlCol="0" anchor="ctr"/>
+          <a:lstStyle/>
+          <a:p>
+            <a:pPr rtl="1" algn="r" indent="0" marL="0">
+              <a:buNone/>
+            </a:pPr>
+            <a:r>
+              <a:rPr lang="en-US" sz="1150" dirty="0">
+                <a:solidFill>
+                  <a:srgbClr val="16292E"/>
+                </a:solidFill>
+                <a:latin typeface="Arial" pitchFamily="34" charset="0"/>
+                <a:ea typeface="Arial" pitchFamily="34" charset="-122"/>
+                <a:cs typeface="Arial" pitchFamily="34" charset="-120"/>
+              </a:rPr>
+              <a:t>خدمات المجال</a:t>
+            </a:r>
+            <a:endParaRPr lang="en-US" sz="1150" dirty="0"/>
+          </a:p>
+        </p:txBody>
+      </p:sp>
+      <p:sp>
+        <p:nvSpPr>
+          <p:cNvPr id="29" name="Shape 27"/>
+          <p:cNvSpPr/>
+          <p:nvPr/>
+        </p:nvSpPr>
+        <p:spPr>
+          <a:xfrm>
+            <a:off x="10801807" y="2606040"/>
+            <a:ext cx="621792" cy="310896"/>
+          </a:xfrm>
+          <a:prstGeom prst="roundRect">
+            <a:avLst>
+              <a:gd name="adj" fmla="val 23529"/>
+            </a:avLst>
+          </a:prstGeom>
+          <a:solidFill>
+            <a:srgbClr val="02717D"/>
+          </a:solidFill>
+          <a:ln/>
+        </p:spPr>
+      </p:sp>
+      <p:sp>
+        <p:nvSpPr>
+          <p:cNvPr id="30" name="Text 28"/>
+          <p:cNvSpPr txBox="1"/>
+          <p:nvPr/>
+        </p:nvSpPr>
+        <p:spPr>
+          <a:xfrm>
+            <a:off x="10801807" y="2606040"/>
+            <a:ext cx="621792" cy="310896"/>
+          </a:xfrm>
+          <a:prstGeom prst="rect">
+            <a:avLst/>
+          </a:prstGeom>
+          <a:noFill/>
+          <a:ln/>
+        </p:spPr>
+        <p:txBody>
+          <a:bodyPr wrap="square" lIns="0" tIns="0" rIns="0" bIns="0" rtlCol="0" anchor="ctr"/>
+          <a:lstStyle/>
+          <a:p>
+            <a:pPr algn="ctr" indent="0" marL="0">
+              <a:buNone/>
+            </a:pPr>
+            <a:r>
+              <a:rPr lang="en-US" sz="1150" b="1" dirty="0">
+                <a:solidFill>
+                  <a:srgbClr val="FFFFFF"/>
+                </a:solidFill>
+                <a:latin typeface="Arial" pitchFamily="34" charset="0"/>
+                <a:ea typeface="Arial" pitchFamily="34" charset="-122"/>
+                <a:cs typeface="Arial" pitchFamily="34" charset="-120"/>
+              </a:rPr>
+              <a:t>28</a:t>
+            </a:r>
+            <a:endParaRPr lang="en-US" sz="1150" dirty="0"/>
+          </a:p>
+        </p:txBody>
+      </p:sp>
+      <p:sp>
+        <p:nvSpPr>
+          <p:cNvPr id="31" name="Shape 29"/>
+          <p:cNvSpPr/>
+          <p:nvPr/>
+        </p:nvSpPr>
+        <p:spPr>
+          <a:xfrm>
+            <a:off x="7253935" y="3090672"/>
+            <a:ext cx="4389120" cy="475488"/>
+          </a:xfrm>
+          <a:prstGeom prst="roundRect">
+            <a:avLst>
+              <a:gd name="adj" fmla="val 17308"/>
+            </a:avLst>
+          </a:prstGeom>
+          <a:solidFill>
+            <a:srgbClr val="FFFFFF"/>
+          </a:solidFill>
+          <a:ln/>
+          <a:effectLst>
+            <a:outerShdw sx="100000" sy="100000" kx="0" ky="0" algn="bl" rotWithShape="0" blurRad="127000" dist="25400" dir="5400000">
+              <a:srgbClr val="0A2E36">
+                <a:alpha val="10000"/>
+              </a:srgbClr>
+            </a:outerShdw>
+          </a:effectLst>
+        </p:spPr>
+      </p:sp>
+      <p:sp>
+        <p:nvSpPr>
+          <p:cNvPr id="32" name="Text 30"/>
+          <p:cNvSpPr txBox="1"/>
+          <p:nvPr/>
+        </p:nvSpPr>
+        <p:spPr>
+          <a:xfrm>
+            <a:off x="7473391" y="3090672"/>
+            <a:ext cx="3291840" cy="475488"/>
+          </a:xfrm>
+          <a:prstGeom prst="rect">
+            <a:avLst/>
+          </a:prstGeom>
+          <a:noFill/>
+          <a:ln/>
+        </p:spPr>
+        <p:txBody>
+          <a:bodyPr wrap="square" lIns="0" tIns="0" rIns="0" bIns="0" rtlCol="0" anchor="ctr"/>
+          <a:lstStyle/>
+          <a:p>
+            <a:pPr rtl="1" algn="r" indent="0" marL="0">
+              <a:buNone/>
+            </a:pPr>
+            <a:r>
+              <a:rPr lang="en-US" sz="1150" dirty="0">
+                <a:solidFill>
+                  <a:srgbClr val="16292E"/>
+                </a:solidFill>
+                <a:latin typeface="Arial" pitchFamily="34" charset="0"/>
+                <a:ea typeface="Arial" pitchFamily="34" charset="-122"/>
+                <a:cs typeface="Arial" pitchFamily="34" charset="-120"/>
+              </a:rPr>
+              <a:t>الترشيح والقوائم</a:t>
+            </a:r>
+            <a:endParaRPr lang="en-US" sz="1150" dirty="0"/>
+          </a:p>
+        </p:txBody>
+      </p:sp>
+      <p:sp>
+        <p:nvSpPr>
+          <p:cNvPr id="33" name="Shape 31"/>
+          <p:cNvSpPr/>
+          <p:nvPr/>
+        </p:nvSpPr>
+        <p:spPr>
+          <a:xfrm>
+            <a:off x="10801807" y="3172968"/>
+            <a:ext cx="621792" cy="310896"/>
+          </a:xfrm>
+          <a:prstGeom prst="roundRect">
+            <a:avLst>
+              <a:gd name="adj" fmla="val 23529"/>
+            </a:avLst>
+          </a:prstGeom>
+          <a:solidFill>
+            <a:srgbClr val="02717D"/>
+          </a:solidFill>
+          <a:ln/>
+        </p:spPr>
+      </p:sp>
+      <p:sp>
+        <p:nvSpPr>
+          <p:cNvPr id="34" name="Text 32"/>
+          <p:cNvSpPr txBox="1"/>
+          <p:nvPr/>
+        </p:nvSpPr>
+        <p:spPr>
+          <a:xfrm>
+            <a:off x="10801807" y="3172968"/>
+            <a:ext cx="621792" cy="310896"/>
+          </a:xfrm>
+          <a:prstGeom prst="rect">
+            <a:avLst/>
+          </a:prstGeom>
+          <a:noFill/>
+          <a:ln/>
+        </p:spPr>
+        <p:txBody>
+          <a:bodyPr wrap="square" lIns="0" tIns="0" rIns="0" bIns="0" rtlCol="0" anchor="ctr"/>
+          <a:lstStyle/>
+          <a:p>
+            <a:pPr algn="ctr" indent="0" marL="0">
+              <a:buNone/>
+            </a:pPr>
+            <a:r>
+              <a:rPr lang="en-US" sz="1150" b="1" dirty="0">
+                <a:solidFill>
+                  <a:srgbClr val="FFFFFF"/>
+                </a:solidFill>
+                <a:latin typeface="Arial" pitchFamily="34" charset="0"/>
+                <a:ea typeface="Arial" pitchFamily="34" charset="-122"/>
+                <a:cs typeface="Arial" pitchFamily="34" charset="-120"/>
+              </a:rPr>
+              <a:t>28</a:t>
+            </a:r>
+            <a:endParaRPr lang="en-US" sz="1150" dirty="0"/>
+          </a:p>
+        </p:txBody>
+      </p:sp>
+      <p:sp>
+        <p:nvSpPr>
+          <p:cNvPr id="35" name="Shape 33"/>
+          <p:cNvSpPr/>
+          <p:nvPr/>
+        </p:nvSpPr>
+        <p:spPr>
+          <a:xfrm>
+            <a:off x="7253935" y="3657600"/>
+            <a:ext cx="4389120" cy="475488"/>
+          </a:xfrm>
+          <a:prstGeom prst="roundRect">
+            <a:avLst>
+              <a:gd name="adj" fmla="val 17308"/>
+            </a:avLst>
+          </a:prstGeom>
+          <a:solidFill>
+            <a:srgbClr val="FFFFFF"/>
+          </a:solidFill>
+          <a:ln/>
+          <a:effectLst>
+            <a:outerShdw sx="100000" sy="100000" kx="0" ky="0" algn="bl" rotWithShape="0" blurRad="127000" dist="25400" dir="5400000">
+              <a:srgbClr val="0A2E36">
+                <a:alpha val="10000"/>
+              </a:srgbClr>
+            </a:outerShdw>
+          </a:effectLst>
+        </p:spPr>
+      </p:sp>
+      <p:sp>
+        <p:nvSpPr>
+          <p:cNvPr id="36" name="Text 34"/>
+          <p:cNvSpPr txBox="1"/>
+          <p:nvPr/>
+        </p:nvSpPr>
+        <p:spPr>
+          <a:xfrm>
+            <a:off x="7473391" y="3657600"/>
+            <a:ext cx="3291840" cy="475488"/>
+          </a:xfrm>
+          <a:prstGeom prst="rect">
+            <a:avLst/>
+          </a:prstGeom>
+          <a:noFill/>
+          <a:ln/>
+        </p:spPr>
+        <p:txBody>
+          <a:bodyPr wrap="square" lIns="0" tIns="0" rIns="0" bIns="0" rtlCol="0" anchor="ctr"/>
+          <a:lstStyle/>
+          <a:p>
+            <a:pPr rtl="1" algn="r" indent="0" marL="0">
+              <a:buNone/>
+            </a:pPr>
+            <a:r>
+              <a:rPr lang="en-US" sz="1150" dirty="0">
+                <a:solidFill>
+                  <a:srgbClr val="16292E"/>
+                </a:solidFill>
+                <a:latin typeface="Arial" pitchFamily="34" charset="0"/>
+                <a:ea typeface="Arial" pitchFamily="34" charset="-122"/>
+                <a:cs typeface="Arial" pitchFamily="34" charset="-120"/>
+              </a:rPr>
+              <a:t>الحذف والأرشفة</a:t>
+            </a:r>
+            <a:endParaRPr lang="en-US" sz="1150" dirty="0"/>
+          </a:p>
+        </p:txBody>
+      </p:sp>
+      <p:sp>
+        <p:nvSpPr>
+          <p:cNvPr id="37" name="Shape 35"/>
+          <p:cNvSpPr/>
+          <p:nvPr/>
+        </p:nvSpPr>
+        <p:spPr>
+          <a:xfrm>
+            <a:off x="10801807" y="3739896"/>
+            <a:ext cx="621792" cy="310896"/>
+          </a:xfrm>
+          <a:prstGeom prst="roundRect">
+            <a:avLst>
+              <a:gd name="adj" fmla="val 23529"/>
+            </a:avLst>
+          </a:prstGeom>
+          <a:solidFill>
+            <a:srgbClr val="E9A13B"/>
+          </a:solidFill>
+          <a:ln/>
+        </p:spPr>
+      </p:sp>
+      <p:sp>
+        <p:nvSpPr>
+          <p:cNvPr id="38" name="Text 36"/>
+          <p:cNvSpPr txBox="1"/>
+          <p:nvPr/>
+        </p:nvSpPr>
+        <p:spPr>
+          <a:xfrm>
+            <a:off x="10801807" y="3739896"/>
+            <a:ext cx="621792" cy="310896"/>
+          </a:xfrm>
+          <a:prstGeom prst="rect">
+            <a:avLst/>
+          </a:prstGeom>
+          <a:noFill/>
+          <a:ln/>
+        </p:spPr>
+        <p:txBody>
+          <a:bodyPr wrap="square" lIns="0" tIns="0" rIns="0" bIns="0" rtlCol="0" anchor="ctr"/>
+          <a:lstStyle/>
+          <a:p>
+            <a:pPr algn="ctr" indent="0" marL="0">
+              <a:buNone/>
+            </a:pPr>
+            <a:r>
+              <a:rPr lang="en-US" sz="1150" b="1" dirty="0">
+                <a:solidFill>
+                  <a:srgbClr val="FFFFFF"/>
+                </a:solidFill>
+                <a:latin typeface="Arial" pitchFamily="34" charset="0"/>
+                <a:ea typeface="Arial" pitchFamily="34" charset="-122"/>
+                <a:cs typeface="Arial" pitchFamily="34" charset="-120"/>
+              </a:rPr>
+              <a:t>27</a:t>
+            </a:r>
+            <a:endParaRPr lang="en-US" sz="1150" dirty="0"/>
+          </a:p>
+        </p:txBody>
+      </p:sp>
+      <p:sp>
+        <p:nvSpPr>
+          <p:cNvPr id="39" name="Shape 37"/>
+          <p:cNvSpPr/>
+          <p:nvPr/>
+        </p:nvSpPr>
+        <p:spPr>
+          <a:xfrm>
+            <a:off x="7253935" y="4224528"/>
+            <a:ext cx="4389120" cy="475488"/>
+          </a:xfrm>
+          <a:prstGeom prst="roundRect">
+            <a:avLst>
+              <a:gd name="adj" fmla="val 17308"/>
+            </a:avLst>
+          </a:prstGeom>
+          <a:solidFill>
+            <a:srgbClr val="FFFFFF"/>
+          </a:solidFill>
+          <a:ln/>
+          <a:effectLst>
+            <a:outerShdw sx="100000" sy="100000" kx="0" ky="0" algn="bl" rotWithShape="0" blurRad="127000" dist="25400" dir="5400000">
+              <a:srgbClr val="0A2E36">
+                <a:alpha val="10000"/>
+              </a:srgbClr>
+            </a:outerShdw>
+          </a:effectLst>
+        </p:spPr>
+      </p:sp>
+      <p:sp>
+        <p:nvSpPr>
+          <p:cNvPr id="40" name="Text 38"/>
+          <p:cNvSpPr txBox="1"/>
+          <p:nvPr/>
+        </p:nvSpPr>
+        <p:spPr>
+          <a:xfrm>
+            <a:off x="7473391" y="4224528"/>
+            <a:ext cx="3291840" cy="475488"/>
+          </a:xfrm>
+          <a:prstGeom prst="rect">
+            <a:avLst/>
+          </a:prstGeom>
+          <a:noFill/>
+          <a:ln/>
+        </p:spPr>
+        <p:txBody>
+          <a:bodyPr wrap="square" lIns="0" tIns="0" rIns="0" bIns="0" rtlCol="0" anchor="ctr"/>
+          <a:lstStyle/>
+          <a:p>
+            <a:pPr rtl="1" algn="r" indent="0" marL="0">
+              <a:buNone/>
+            </a:pPr>
+            <a:r>
+              <a:rPr lang="en-US" sz="1150" dirty="0">
+                <a:solidFill>
+                  <a:srgbClr val="16292E"/>
+                </a:solidFill>
+                <a:latin typeface="Arial" pitchFamily="34" charset="0"/>
+                <a:ea typeface="Arial" pitchFamily="34" charset="-122"/>
+                <a:cs typeface="Arial" pitchFamily="34" charset="-120"/>
+              </a:rPr>
+              <a:t>البحث العربي والفهرسة</a:t>
+            </a:r>
+            <a:endParaRPr lang="en-US" sz="1150" dirty="0"/>
+          </a:p>
+        </p:txBody>
+      </p:sp>
+      <p:sp>
+        <p:nvSpPr>
+          <p:cNvPr id="41" name="Shape 39"/>
+          <p:cNvSpPr/>
+          <p:nvPr/>
+        </p:nvSpPr>
+        <p:spPr>
+          <a:xfrm>
+            <a:off x="10801807" y="4306824"/>
+            <a:ext cx="621792" cy="310896"/>
+          </a:xfrm>
+          <a:prstGeom prst="roundRect">
+            <a:avLst>
+              <a:gd name="adj" fmla="val 23529"/>
+            </a:avLst>
+          </a:prstGeom>
+          <a:solidFill>
+            <a:srgbClr val="02717D"/>
+          </a:solidFill>
+          <a:ln/>
+        </p:spPr>
+      </p:sp>
+      <p:sp>
+        <p:nvSpPr>
+          <p:cNvPr id="42" name="Text 40"/>
+          <p:cNvSpPr txBox="1"/>
+          <p:nvPr/>
+        </p:nvSpPr>
+        <p:spPr>
+          <a:xfrm>
+            <a:off x="10801807" y="4306824"/>
+            <a:ext cx="621792" cy="310896"/>
+          </a:xfrm>
+          <a:prstGeom prst="rect">
+            <a:avLst/>
+          </a:prstGeom>
+          <a:noFill/>
+          <a:ln/>
+        </p:spPr>
+        <p:txBody>
+          <a:bodyPr wrap="square" lIns="0" tIns="0" rIns="0" bIns="0" rtlCol="0" anchor="ctr"/>
+          <a:lstStyle/>
+          <a:p>
+            <a:pPr algn="ctr" indent="0" marL="0">
+              <a:buNone/>
+            </a:pPr>
+            <a:r>
+              <a:rPr lang="en-US" sz="1150" b="1" dirty="0">
+                <a:solidFill>
+                  <a:srgbClr val="FFFFFF"/>
+                </a:solidFill>
+                <a:latin typeface="Arial" pitchFamily="34" charset="0"/>
+                <a:ea typeface="Arial" pitchFamily="34" charset="-122"/>
+                <a:cs typeface="Arial" pitchFamily="34" charset="-120"/>
+              </a:rPr>
+              <a:t>22</a:t>
+            </a:r>
+            <a:endParaRPr lang="en-US" sz="1150" dirty="0"/>
+          </a:p>
+        </p:txBody>
+      </p:sp>
+      <p:sp>
+        <p:nvSpPr>
+          <p:cNvPr id="43" name="Shape 41"/>
+          <p:cNvSpPr/>
+          <p:nvPr/>
+        </p:nvSpPr>
+        <p:spPr>
+          <a:xfrm>
+            <a:off x="7253935" y="4791456"/>
+            <a:ext cx="4389120" cy="475488"/>
+          </a:xfrm>
+          <a:prstGeom prst="roundRect">
+            <a:avLst>
+              <a:gd name="adj" fmla="val 17308"/>
+            </a:avLst>
+          </a:prstGeom>
+          <a:solidFill>
+            <a:srgbClr val="FFFFFF"/>
+          </a:solidFill>
+          <a:ln/>
+          <a:effectLst>
+            <a:outerShdw sx="100000" sy="100000" kx="0" ky="0" algn="bl" rotWithShape="0" blurRad="127000" dist="25400" dir="5400000">
+              <a:srgbClr val="0A2E36">
+                <a:alpha val="10000"/>
+              </a:srgbClr>
+            </a:outerShdw>
+          </a:effectLst>
+        </p:spPr>
+      </p:sp>
+      <p:sp>
+        <p:nvSpPr>
+          <p:cNvPr id="44" name="Text 42"/>
+          <p:cNvSpPr txBox="1"/>
+          <p:nvPr/>
+        </p:nvSpPr>
+        <p:spPr>
+          <a:xfrm>
+            <a:off x="7473391" y="4791456"/>
+            <a:ext cx="3291840" cy="475488"/>
+          </a:xfrm>
+          <a:prstGeom prst="rect">
+            <a:avLst/>
+          </a:prstGeom>
+          <a:noFill/>
+          <a:ln/>
+        </p:spPr>
+        <p:txBody>
+          <a:bodyPr wrap="square" lIns="0" tIns="0" rIns="0" bIns="0" rtlCol="0" anchor="ctr"/>
+          <a:lstStyle/>
+          <a:p>
+            <a:pPr rtl="1" algn="r" indent="0" marL="0">
+              <a:buNone/>
+            </a:pPr>
+            <a:r>
+              <a:rPr lang="en-US" sz="1150" dirty="0">
+                <a:solidFill>
+                  <a:srgbClr val="16292E"/>
+                </a:solidFill>
+                <a:latin typeface="Arial" pitchFamily="34" charset="0"/>
+                <a:ea typeface="Arial" pitchFamily="34" charset="-122"/>
+                <a:cs typeface="Arial" pitchFamily="34" charset="-120"/>
+              </a:rPr>
+              <a:t>البيانات الاختبارية</a:t>
+            </a:r>
+            <a:endParaRPr lang="en-US" sz="1150" dirty="0"/>
+          </a:p>
+        </p:txBody>
+      </p:sp>
+      <p:sp>
+        <p:nvSpPr>
+          <p:cNvPr id="45" name="Shape 43"/>
+          <p:cNvSpPr/>
+          <p:nvPr/>
+        </p:nvSpPr>
+        <p:spPr>
+          <a:xfrm>
+            <a:off x="10801807" y="4873752"/>
+            <a:ext cx="621792" cy="310896"/>
+          </a:xfrm>
+          <a:prstGeom prst="roundRect">
+            <a:avLst>
+              <a:gd name="adj" fmla="val 23529"/>
+            </a:avLst>
+          </a:prstGeom>
+          <a:solidFill>
+            <a:srgbClr val="02717D"/>
+          </a:solidFill>
+          <a:ln/>
+        </p:spPr>
+      </p:sp>
+      <p:sp>
+        <p:nvSpPr>
+          <p:cNvPr id="46" name="Text 44"/>
+          <p:cNvSpPr txBox="1"/>
+          <p:nvPr/>
+        </p:nvSpPr>
+        <p:spPr>
+          <a:xfrm>
+            <a:off x="10801807" y="4873752"/>
+            <a:ext cx="621792" cy="310896"/>
+          </a:xfrm>
+          <a:prstGeom prst="rect">
+            <a:avLst/>
+          </a:prstGeom>
+          <a:noFill/>
+          <a:ln/>
+        </p:spPr>
+        <p:txBody>
+          <a:bodyPr wrap="square" lIns="0" tIns="0" rIns="0" bIns="0" rtlCol="0" anchor="ctr"/>
+          <a:lstStyle/>
+          <a:p>
+            <a:pPr algn="ctr" indent="0" marL="0">
+              <a:buNone/>
+            </a:pPr>
+            <a:r>
+              <a:rPr lang="en-US" sz="1150" b="1" dirty="0">
+                <a:solidFill>
+                  <a:srgbClr val="FFFFFF"/>
+                </a:solidFill>
+                <a:latin typeface="Arial" pitchFamily="34" charset="0"/>
+                <a:ea typeface="Arial" pitchFamily="34" charset="-122"/>
+                <a:cs typeface="Arial" pitchFamily="34" charset="-120"/>
+              </a:rPr>
+              <a:t>9</a:t>
+            </a:r>
+            <a:endParaRPr lang="en-US" sz="1150" dirty="0"/>
+          </a:p>
+        </p:txBody>
+      </p:sp>
+      <p:sp>
+        <p:nvSpPr>
+          <p:cNvPr id="47" name="Shape 45"/>
+          <p:cNvSpPr/>
+          <p:nvPr/>
+        </p:nvSpPr>
+        <p:spPr>
+          <a:xfrm>
+            <a:off x="7253935" y="5394960"/>
+            <a:ext cx="4389120" cy="877824"/>
+          </a:xfrm>
+          <a:prstGeom prst="roundRect">
+            <a:avLst>
+              <a:gd name="adj" fmla="val 9375"/>
+            </a:avLst>
+          </a:prstGeom>
+          <a:solidFill>
+            <a:srgbClr val="0A2E36"/>
+          </a:solidFill>
+          <a:ln/>
+        </p:spPr>
+      </p:sp>
+      <p:sp>
+        <p:nvSpPr>
+          <p:cNvPr id="48" name="Text 46"/>
+          <p:cNvSpPr txBox="1"/>
+          <p:nvPr/>
+        </p:nvSpPr>
+        <p:spPr>
+          <a:xfrm>
+            <a:off x="7473391" y="5504688"/>
+            <a:ext cx="3950208" cy="256032"/>
+          </a:xfrm>
+          <a:prstGeom prst="rect">
+            <a:avLst/>
+          </a:prstGeom>
+          <a:noFill/>
+          <a:ln/>
+        </p:spPr>
+        <p:txBody>
+          <a:bodyPr wrap="square" lIns="0" tIns="0" rIns="0" bIns="0" rtlCol="0" anchor="ctr"/>
+          <a:lstStyle/>
+          <a:p>
+            <a:pPr rtl="1" algn="r" indent="0" marL="0">
+              <a:buNone/>
+            </a:pPr>
+            <a:r>
+              <a:rPr lang="en-US" sz="1200" b="1" dirty="0">
+                <a:solidFill>
+                  <a:srgbClr val="00A896"/>
+                </a:solidFill>
+                <a:latin typeface="Arial" pitchFamily="34" charset="0"/>
+                <a:ea typeface="Arial" pitchFamily="34" charset="-122"/>
+                <a:cs typeface="Arial" pitchFamily="34" charset="-120"/>
+              </a:rPr>
+              <a:t>تعمل آليًا عند كل رفع</a:t>
+            </a:r>
+            <a:endParaRPr lang="en-US" sz="1200" dirty="0"/>
+          </a:p>
+        </p:txBody>
+      </p:sp>
+      <p:sp>
+        <p:nvSpPr>
+          <p:cNvPr id="49" name="Text 47"/>
+          <p:cNvSpPr txBox="1"/>
+          <p:nvPr/>
+        </p:nvSpPr>
+        <p:spPr>
+          <a:xfrm>
+            <a:off x="7473391" y="5779008"/>
+            <a:ext cx="3950208" cy="402336"/>
+          </a:xfrm>
+          <a:prstGeom prst="rect">
+            <a:avLst/>
+          </a:prstGeom>
+          <a:noFill/>
+          <a:ln/>
+        </p:spPr>
+        <p:txBody>
+          <a:bodyPr wrap="square" lIns="0" tIns="0" rIns="0" bIns="0" rtlCol="0" anchor="ctr"/>
+          <a:lstStyle/>
+          <a:p>
+            <a:pPr rtl="1" algn="r" indent="0" marL="0">
+              <a:lnSpc>
+                <a:spcPts val="1400"/>
+              </a:lnSpc>
+              <a:buNone/>
+            </a:pPr>
+            <a:r>
+              <a:rPr lang="en-US" sz="1050" dirty="0">
+                <a:solidFill>
+                  <a:srgbClr val="BFD4D7"/>
+                </a:solidFill>
+                <a:latin typeface="Arial" pitchFamily="34" charset="0"/>
+                <a:ea typeface="Arial" pitchFamily="34" charset="-122"/>
+                <a:cs typeface="Arial" pitchFamily="34" charset="-120"/>
+              </a:rPr>
+              <a:t>⁦GitHub Actions⁩ يفحص التنسيق ثم يشغّل المجموعة كاملة قبل أي دمج</a:t>
+            </a:r>
+            <a:endParaRPr lang="en-US" sz="1050" dirty="0"/>
+          </a:p>
+        </p:txBody>
+      </p:sp>
+      <p:sp>
+        <p:nvSpPr>
+          <p:cNvPr id="50" name="Text 48"/>
+          <p:cNvSpPr txBox="1"/>
+          <p:nvPr/>
+        </p:nvSpPr>
+        <p:spPr>
+          <a:xfrm>
+            <a:off x="548640" y="5559552"/>
+            <a:ext cx="6400800" cy="457200"/>
+          </a:xfrm>
+          <a:prstGeom prst="rect">
+            <a:avLst/>
+          </a:prstGeom>
+          <a:noFill/>
+          <a:ln/>
+        </p:spPr>
+        <p:txBody>
+          <a:bodyPr wrap="square" lIns="0" tIns="0" rIns="0" bIns="0" rtlCol="0" anchor="ctr"/>
+          <a:lstStyle/>
+          <a:p>
+            <a:pPr rtl="1" algn="ctr" indent="0" marL="0">
+              <a:lnSpc>
+                <a:spcPts val="1400"/>
+              </a:lnSpc>
+              <a:buNone/>
+            </a:pPr>
+            <a:r>
+              <a:rPr lang="en-US" sz="1050" dirty="0">
+                <a:solidFill>
+                  <a:srgbClr val="5C7378"/>
+                </a:solidFill>
+                <a:latin typeface="Arial" pitchFamily="34" charset="0"/>
+                <a:ea typeface="Arial" pitchFamily="34" charset="-122"/>
+                <a:cs typeface="Arial" pitchFamily="34" charset="-120"/>
+              </a:rPr>
+              <a:t>الاختبارات تعمل على قاعدة بيانات في الذاكرة تُنشأ من الصفر عند كل تشغيل، فلا تعتمد على بيانات سابقة</a:t>
+            </a:r>
+            <a:endParaRPr lang="en-US" sz="1050" dirty="0"/>
+          </a:p>
+        </p:txBody>
+      </p:sp>
+    </p:spTree>
+  </p:cSld>
+  <p:clrMapOvr>
+    <a:masterClrMapping/>
+  </p:clrMapOvr>
+</p:sld>
+</file>
+
+<file path=ppt/slides/slide25.xml><?xml version="1.0" encoding="utf-8"?>
+<p:sld xmlns:a="http://schemas.openxmlformats.org/drawingml/2006/main" xmlns:r="http://schemas.openxmlformats.org/officeDocument/2006/relationships" xmlns:p="http://schemas.openxmlformats.org/presentationml/2006/main">
+  <p:cSld name="Slide 25">
     <p:bg>
       <p:bgPr>
         <a:solidFill>
@@ -17792,7 +19885,7 @@
                 <a:ea typeface="Arial" pitchFamily="34" charset="-122"/>
                 <a:cs typeface="Arial" pitchFamily="34" charset="-120"/>
               </a:rPr>
-              <a:t>284 اختبارًا آليًا وتكامل مستمر</a:t>
+              <a:t>347 اختبارًا آليًا وتكامل مستمر</a:t>
             </a:r>
             <a:endParaRPr lang="en-US" sz="1250" dirty="0"/>
           </a:p>
@@ -21383,7 +23476,7 @@
                 <a:ea typeface="Arial" pitchFamily="34" charset="-122"/>
                 <a:cs typeface="Arial" pitchFamily="34" charset="-120"/>
               </a:rPr>
-              <a:t>284</a:t>
+              <a:t>347</a:t>
             </a:r>
             <a:endParaRPr lang="en-US" sz="3400" dirty="0"/>
           </a:p>
@@ -21597,7 +23690,7 @@
                 <a:ea typeface="Arial" pitchFamily="34" charset="-122"/>
                 <a:cs typeface="Arial" pitchFamily="34" charset="-120"/>
               </a:rPr>
-              <a:t>12</a:t>
+              <a:t>17</a:t>
             </a:r>
             <a:endParaRPr lang="en-US" sz="3400" dirty="0"/>
           </a:p>
@@ -21636,7 +23729,7 @@
                 <a:ea typeface="Arial" pitchFamily="34" charset="-122"/>
                 <a:cs typeface="Arial" pitchFamily="34" charset="-120"/>
               </a:rPr>
-              <a:t>خدمة مستقلة</a:t>
+              <a:t>نية للمساعد</a:t>
             </a:r>
             <a:endParaRPr lang="en-US" sz="1200" dirty="0"/>
           </a:p>
@@ -21704,7 +23797,7 @@
                 <a:ea typeface="Arial" pitchFamily="34" charset="-122"/>
                 <a:cs typeface="Arial" pitchFamily="34" charset="-120"/>
               </a:rPr>
-              <a:t>13,500</a:t>
+              <a:t>15,000</a:t>
             </a:r>
             <a:endParaRPr lang="en-US" sz="3400" dirty="0"/>
           </a:p>
